--- a/submission/SENTINEL-NIDS_ML-Bubble-2026_Manoj-Kharkar.pptx
+++ b/submission/SENTINEL-NIDS_ML-Bubble-2026_Manoj-Kharkar.pptx
@@ -4,6 +4,9 @@
   <p:sldMasterIdLst>
     <p:sldMasterId id="2147483648" r:id="rId1"/>
   </p:sldMasterIdLst>
+  <p:notesMasterIdLst>
+    <p:notesMasterId r:id="rId19"/>
+  </p:notesMasterIdLst>
   <p:sldIdLst>
     <p:sldId id="256" r:id="rId2"/>
     <p:sldId id="257" r:id="rId3"/>
@@ -23,9 +26,6 @@
     <p:sldId id="271" r:id="rId17"/>
     <p:sldId id="272" r:id="rId18"/>
   </p:sldIdLst>
-  <p:notesMasterIdLst>
-    <p:notesMasterId r:id="rId19"/>
-  </p:notesMasterIdLst>
   <p:sldSz cx="12192000" cy="6858000"/>
   <p:notesSz cx="6858000" cy="12192000"/>
   <p:defaultTextStyle>
@@ -120,13 +120,20 @@
       </a:defRPr>
     </a:lvl9pPr>
   </p:defaultTextStyle>
+  <p:extLst>
+    <p:ext uri="{EFAFB233-063F-42B5-8137-9DF3F51BA10A}">
+      <p15:sldGuideLst xmlns:p15="http://schemas.microsoft.com/office/powerpoint/2012/main"/>
+    </p:ext>
+  </p:extLst>
 </p:presentation>
 </file>
 
 <file path=ppt/charts/chart1.xml><?xml version="1.0" encoding="utf-8"?>
-<c:chartSpace xmlns:c="http://schemas.openxmlformats.org/drawingml/2006/chart" xmlns:a="http://schemas.openxmlformats.org/drawingml/2006/main" xmlns:r="http://schemas.openxmlformats.org/officeDocument/2006/relationships">
+<c:chartSpace xmlns:c="http://schemas.openxmlformats.org/drawingml/2006/chart" xmlns:a="http://schemas.openxmlformats.org/drawingml/2006/main" xmlns:r="http://schemas.openxmlformats.org/officeDocument/2006/relationships" xmlns:c16r2="http://schemas.microsoft.com/office/drawing/2015/06/chart">
   <c:date1904 val="0"/>
+  <c:lang val="en-US"/>
   <c:roundedCorners val="1"/>
+  <c:style val="2"/>
   <c:chart>
     <c:autoTitleDeleted val="1"/>
     <c:plotArea>
@@ -158,18 +165,26 @@
           <c:invertIfNegative val="0"/>
           <c:dLbls>
             <c:numFmt formatCode="0.000" sourceLinked="0"/>
+            <c:spPr>
+              <a:noFill/>
+              <a:ln>
+                <a:noFill/>
+              </a:ln>
+              <a:effectLst/>
+            </c:spPr>
             <c:txPr>
               <a:bodyPr/>
               <a:lstStyle/>
               <a:p>
                 <a:pPr>
-                  <a:defRPr b="0" i="0" strike="noStrike" sz="1000" u="none">
+                  <a:defRPr sz="1000" b="0" i="0" u="none" strike="noStrike">
                     <a:solidFill>
                       <a:srgbClr val="0B0B0B"/>
                     </a:solidFill>
                     <a:latin typeface="Calibri"/>
                   </a:defRPr>
                 </a:pPr>
+                <a:endParaRPr lang="en-US"/>
               </a:p>
             </c:txPr>
             <c:showLegendKey val="0"/>
@@ -179,25 +194,28 @@
             <c:showPercent val="0"/>
             <c:showBubbleSize val="0"/>
             <c:showLeaderLines val="0"/>
+            <c:extLst>
+              <c:ext xmlns:c15="http://schemas.microsoft.com/office/drawing/2012/chart" uri="{CE6537A1-D6FC-4f65-9D91-7224C49458BB}">
+                <c15:showLeaderLines val="0"/>
+              </c:ext>
+            </c:extLst>
           </c:dLbls>
           <c:cat>
-            <c:multiLvlStrRef>
+            <c:strRef>
               <c:f>Sheet1!$A$2:$A$4</c:f>
-              <c:multiLvlStrCache>
+              <c:strCache>
                 <c:ptCount val="3"/>
-                <c:lvl>
-                  <c:pt idx="0">
-                    <c:v>Accuracy</c:v>
-                  </c:pt>
-                  <c:pt idx="1">
-                    <c:v>Macro-F1</c:v>
-                  </c:pt>
-                  <c:pt idx="2">
-                    <c:v>Balanced acc.</c:v>
-                  </c:pt>
-                </c:lvl>
-              </c:multiLvlStrCache>
-            </c:multiLvlStrRef>
+                <c:pt idx="0">
+                  <c:v>Accuracy</c:v>
+                </c:pt>
+                <c:pt idx="1">
+                  <c:v>Macro-F1</c:v>
+                </c:pt>
+                <c:pt idx="2">
+                  <c:v>Balanced acc.</c:v>
+                </c:pt>
+              </c:strCache>
+            </c:strRef>
           </c:cat>
           <c:val>
             <c:numRef>
@@ -206,17 +224,22 @@
                 <c:formatCode>General</c:formatCode>
                 <c:ptCount val="3"/>
                 <c:pt idx="0">
-                  <c:v>0.9951</c:v>
+                  <c:v>0.99509999999999998</c:v>
                 </c:pt>
                 <c:pt idx="1">
-                  <c:v>0.9548</c:v>
+                  <c:v>0.95479999999999998</c:v>
                 </c:pt>
                 <c:pt idx="2">
-                  <c:v>0.9373</c:v>
+                  <c:v>0.93730000000000002</c:v>
                 </c:pt>
               </c:numCache>
             </c:numRef>
           </c:val>
+          <c:extLst>
+            <c:ext xmlns:c16="http://schemas.microsoft.com/office/drawing/2014/chart" uri="{C3380CC4-5D6E-409C-BE32-E72D297353CC}">
+              <c16:uniqueId val="{00000000-3673-4B1F-ACB7-846EC20F938C}"/>
+            </c:ext>
+          </c:extLst>
         </c:ser>
         <c:ser>
           <c:idx val="1"/>
@@ -241,18 +264,26 @@
           <c:invertIfNegative val="0"/>
           <c:dLbls>
             <c:numFmt formatCode="0.000" sourceLinked="0"/>
+            <c:spPr>
+              <a:noFill/>
+              <a:ln>
+                <a:noFill/>
+              </a:ln>
+              <a:effectLst/>
+            </c:spPr>
             <c:txPr>
               <a:bodyPr/>
               <a:lstStyle/>
               <a:p>
                 <a:pPr>
-                  <a:defRPr b="0" i="0" strike="noStrike" sz="1000" u="none">
+                  <a:defRPr sz="1000" b="0" i="0" u="none" strike="noStrike">
                     <a:solidFill>
                       <a:srgbClr val="0B0B0B"/>
                     </a:solidFill>
                     <a:latin typeface="Calibri"/>
                   </a:defRPr>
                 </a:pPr>
+                <a:endParaRPr lang="en-US"/>
               </a:p>
             </c:txPr>
             <c:showLegendKey val="0"/>
@@ -262,25 +293,28 @@
             <c:showPercent val="0"/>
             <c:showBubbleSize val="0"/>
             <c:showLeaderLines val="0"/>
+            <c:extLst>
+              <c:ext xmlns:c15="http://schemas.microsoft.com/office/drawing/2012/chart" uri="{CE6537A1-D6FC-4f65-9D91-7224C49458BB}">
+                <c15:showLeaderLines val="0"/>
+              </c:ext>
+            </c:extLst>
           </c:dLbls>
           <c:cat>
-            <c:multiLvlStrRef>
+            <c:strRef>
               <c:f>Sheet1!$A$2:$A$4</c:f>
-              <c:multiLvlStrCache>
+              <c:strCache>
                 <c:ptCount val="3"/>
-                <c:lvl>
-                  <c:pt idx="0">
-                    <c:v>Accuracy</c:v>
-                  </c:pt>
-                  <c:pt idx="1">
-                    <c:v>Macro-F1</c:v>
-                  </c:pt>
-                  <c:pt idx="2">
-                    <c:v>Balanced acc.</c:v>
-                  </c:pt>
-                </c:lvl>
-              </c:multiLvlStrCache>
-            </c:multiLvlStrRef>
+                <c:pt idx="0">
+                  <c:v>Accuracy</c:v>
+                </c:pt>
+                <c:pt idx="1">
+                  <c:v>Macro-F1</c:v>
+                </c:pt>
+                <c:pt idx="2">
+                  <c:v>Balanced acc.</c:v>
+                </c:pt>
+              </c:strCache>
+            </c:strRef>
           </c:cat>
           <c:val>
             <c:numRef>
@@ -289,47 +323,34 @@
                 <c:formatCode>General</c:formatCode>
                 <c:ptCount val="3"/>
                 <c:pt idx="0">
-                  <c:v>0.7528</c:v>
+                  <c:v>0.75280000000000002</c:v>
                 </c:pt>
                 <c:pt idx="1">
                   <c:v>0.4869</c:v>
                 </c:pt>
                 <c:pt idx="2">
-                  <c:v>0.4835</c:v>
+                  <c:v>0.48349999999999999</c:v>
                 </c:pt>
               </c:numCache>
             </c:numRef>
           </c:val>
+          <c:extLst>
+            <c:ext xmlns:c16="http://schemas.microsoft.com/office/drawing/2014/chart" uri="{C3380CC4-5D6E-409C-BE32-E72D297353CC}">
+              <c16:uniqueId val="{00000001-3673-4B1F-ACB7-846EC20F938C}"/>
+            </c:ext>
+          </c:extLst>
         </c:ser>
         <c:dLbls>
-          <c:numFmt formatCode="0.000" sourceLinked="0"/>
-          <c:txPr>
-            <a:bodyPr/>
-            <a:lstStyle/>
-            <a:p>
-              <a:pPr>
-                <a:defRPr b="0" i="0" strike="noStrike" sz="1000" u="none">
-                  <a:solidFill>
-                    <a:srgbClr val="0B0B0B"/>
-                  </a:solidFill>
-                  <a:latin typeface="Calibri"/>
-                </a:defRPr>
-              </a:pPr>
-            </a:p>
-          </c:txPr>
           <c:showLegendKey val="0"/>
           <c:showVal val="1"/>
           <c:showCatName val="0"/>
           <c:showSerName val="0"/>
           <c:showPercent val="0"/>
           <c:showBubbleSize val="0"/>
-          <c:showLeaderLines val="0"/>
         </c:dLbls>
         <c:gapWidth val="45"/>
-        <c:overlap val="0"/>
         <c:axId val="2094734554"/>
         <c:axId val="2094734552"/>
-        <c:axId val="2094734556"/>
       </c:barChart>
       <c:catAx>
         <c:axId val="2094734554"/>
@@ -368,13 +389,14 @@
         <c:crosses val="autoZero"/>
         <c:auto val="1"/>
         <c:lblAlgn val="ctr"/>
+        <c:lblOffset val="100"/>
         <c:noMultiLvlLbl val="1"/>
       </c:catAx>
       <c:valAx>
         <c:axId val="2094734552"/>
         <c:scaling>
           <c:orientation val="minMax"/>
-          <c:max val="1.15"/>
+          <c:max val="1.1499999999999999"/>
           <c:min val="0"/>
         </c:scaling>
         <c:delete val="0"/>
@@ -447,6 +469,7 @@
     </c:legend>
     <c:plotVisOnly val="1"/>
     <c:dispBlanksAs val="span"/>
+    <c:showDLblsOverMax val="1"/>
   </c:chart>
   <c:spPr>
     <a:noFill/>
@@ -462,9 +485,11 @@
 </file>
 
 <file path=ppt/charts/chart2.xml><?xml version="1.0" encoding="utf-8"?>
-<c:chartSpace xmlns:c="http://schemas.openxmlformats.org/drawingml/2006/chart" xmlns:a="http://schemas.openxmlformats.org/drawingml/2006/main" xmlns:r="http://schemas.openxmlformats.org/officeDocument/2006/relationships">
+<c:chartSpace xmlns:c="http://schemas.openxmlformats.org/drawingml/2006/chart" xmlns:a="http://schemas.openxmlformats.org/drawingml/2006/main" xmlns:r="http://schemas.openxmlformats.org/officeDocument/2006/relationships" xmlns:c16r2="http://schemas.microsoft.com/office/drawing/2015/06/chart">
   <c:date1904 val="0"/>
+  <c:lang val="en-US"/>
   <c:roundedCorners val="1"/>
+  <c:style val="2"/>
   <c:chart>
     <c:autoTitleDeleted val="1"/>
     <c:plotArea>
@@ -496,18 +521,26 @@
           <c:invertIfNegative val="0"/>
           <c:dLbls>
             <c:numFmt formatCode="0.000" sourceLinked="0"/>
+            <c:spPr>
+              <a:noFill/>
+              <a:ln>
+                <a:noFill/>
+              </a:ln>
+              <a:effectLst/>
+            </c:spPr>
             <c:txPr>
               <a:bodyPr/>
               <a:lstStyle/>
               <a:p>
                 <a:pPr>
-                  <a:defRPr b="0" i="0" strike="noStrike" sz="1000" u="none">
+                  <a:defRPr sz="1000" b="0" i="0" u="none" strike="noStrike">
                     <a:solidFill>
                       <a:srgbClr val="0B0B0B"/>
                     </a:solidFill>
                     <a:latin typeface="Calibri"/>
                   </a:defRPr>
                 </a:pPr>
+                <a:endParaRPr lang="en-US"/>
               </a:p>
             </c:txPr>
             <c:showLegendKey val="0"/>
@@ -517,31 +550,34 @@
             <c:showPercent val="0"/>
             <c:showBubbleSize val="0"/>
             <c:showLeaderLines val="0"/>
+            <c:extLst>
+              <c:ext xmlns:c15="http://schemas.microsoft.com/office/drawing/2012/chart" uri="{CE6537A1-D6FC-4f65-9D91-7224C49458BB}">
+                <c15:showLeaderLines val="0"/>
+              </c:ext>
+            </c:extLst>
           </c:dLbls>
           <c:cat>
-            <c:multiLvlStrRef>
+            <c:strRef>
               <c:f>Sheet1!$A$2:$A$6</c:f>
-              <c:multiLvlStrCache>
+              <c:strCache>
                 <c:ptCount val="5"/>
-                <c:lvl>
-                  <c:pt idx="0">
-                    <c:v>Normal</c:v>
-                  </c:pt>
-                  <c:pt idx="1">
-                    <c:v>DoS</c:v>
-                  </c:pt>
-                  <c:pt idx="2">
-                    <c:v>Probe</c:v>
-                  </c:pt>
-                  <c:pt idx="3">
-                    <c:v>R2L</c:v>
-                  </c:pt>
-                  <c:pt idx="4">
-                    <c:v>U2R</c:v>
-                  </c:pt>
-                </c:lvl>
-              </c:multiLvlStrCache>
-            </c:multiLvlStrRef>
+                <c:pt idx="0">
+                  <c:v>Normal</c:v>
+                </c:pt>
+                <c:pt idx="1">
+                  <c:v>DoS</c:v>
+                </c:pt>
+                <c:pt idx="2">
+                  <c:v>Probe</c:v>
+                </c:pt>
+                <c:pt idx="3">
+                  <c:v>R2L</c:v>
+                </c:pt>
+                <c:pt idx="4">
+                  <c:v>U2R</c:v>
+                </c:pt>
+              </c:strCache>
+            </c:strRef>
           </c:cat>
           <c:val>
             <c:numRef>
@@ -550,16 +586,16 @@
                 <c:formatCode>General</c:formatCode>
                 <c:ptCount val="5"/>
                 <c:pt idx="0">
-                  <c:v>0.9966</c:v>
+                  <c:v>0.99660000000000004</c:v>
                 </c:pt>
                 <c:pt idx="1">
-                  <c:v>0.9993</c:v>
+                  <c:v>0.99929999999999997</c:v>
                 </c:pt>
                 <c:pt idx="2">
-                  <c:v>0.9961</c:v>
+                  <c:v>0.99609999999999999</c:v>
                 </c:pt>
                 <c:pt idx="3">
-                  <c:v>0.9147</c:v>
+                  <c:v>0.91469999999999996</c:v>
                 </c:pt>
                 <c:pt idx="4">
                   <c:v>0.78</c:v>
@@ -567,6 +603,11 @@
               </c:numCache>
             </c:numRef>
           </c:val>
+          <c:extLst>
+            <c:ext xmlns:c16="http://schemas.microsoft.com/office/drawing/2014/chart" uri="{C3380CC4-5D6E-409C-BE32-E72D297353CC}">
+              <c16:uniqueId val="{00000000-62C4-4F24-8073-98F5A6C70FFA}"/>
+            </c:ext>
+          </c:extLst>
         </c:ser>
         <c:ser>
           <c:idx val="1"/>
@@ -591,18 +632,26 @@
           <c:invertIfNegative val="0"/>
           <c:dLbls>
             <c:numFmt formatCode="0.000" sourceLinked="0"/>
+            <c:spPr>
+              <a:noFill/>
+              <a:ln>
+                <a:noFill/>
+              </a:ln>
+              <a:effectLst/>
+            </c:spPr>
             <c:txPr>
               <a:bodyPr/>
               <a:lstStyle/>
               <a:p>
                 <a:pPr>
-                  <a:defRPr b="0" i="0" strike="noStrike" sz="1000" u="none">
+                  <a:defRPr sz="1000" b="0" i="0" u="none" strike="noStrike">
                     <a:solidFill>
                       <a:srgbClr val="0B0B0B"/>
                     </a:solidFill>
                     <a:latin typeface="Calibri"/>
                   </a:defRPr>
                 </a:pPr>
+                <a:endParaRPr lang="en-US"/>
               </a:p>
             </c:txPr>
             <c:showLegendKey val="0"/>
@@ -612,31 +661,34 @@
             <c:showPercent val="0"/>
             <c:showBubbleSize val="0"/>
             <c:showLeaderLines val="0"/>
+            <c:extLst>
+              <c:ext xmlns:c15="http://schemas.microsoft.com/office/drawing/2012/chart" uri="{CE6537A1-D6FC-4f65-9D91-7224C49458BB}">
+                <c15:showLeaderLines val="0"/>
+              </c:ext>
+            </c:extLst>
           </c:dLbls>
           <c:cat>
-            <c:multiLvlStrRef>
+            <c:strRef>
               <c:f>Sheet1!$A$2:$A$6</c:f>
-              <c:multiLvlStrCache>
+              <c:strCache>
                 <c:ptCount val="5"/>
-                <c:lvl>
-                  <c:pt idx="0">
-                    <c:v>Normal</c:v>
-                  </c:pt>
-                  <c:pt idx="1">
-                    <c:v>DoS</c:v>
-                  </c:pt>
-                  <c:pt idx="2">
-                    <c:v>Probe</c:v>
-                  </c:pt>
-                  <c:pt idx="3">
-                    <c:v>R2L</c:v>
-                  </c:pt>
-                  <c:pt idx="4">
-                    <c:v>U2R</c:v>
-                  </c:pt>
-                </c:lvl>
-              </c:multiLvlStrCache>
-            </c:multiLvlStrRef>
+                <c:pt idx="0">
+                  <c:v>Normal</c:v>
+                </c:pt>
+                <c:pt idx="1">
+                  <c:v>DoS</c:v>
+                </c:pt>
+                <c:pt idx="2">
+                  <c:v>Probe</c:v>
+                </c:pt>
+                <c:pt idx="3">
+                  <c:v>R2L</c:v>
+                </c:pt>
+                <c:pt idx="4">
+                  <c:v>U2R</c:v>
+                </c:pt>
+              </c:strCache>
+            </c:strRef>
           </c:cat>
           <c:val>
             <c:numRef>
@@ -648,50 +700,37 @@
                   <c:v>0.9738</c:v>
                 </c:pt>
                 <c:pt idx="1">
-                  <c:v>0.7975</c:v>
+                  <c:v>0.79749999999999999</c:v>
                 </c:pt>
                 <c:pt idx="2">
-                  <c:v>0.6026</c:v>
+                  <c:v>0.60260000000000002</c:v>
                 </c:pt>
                 <c:pt idx="3">
-                  <c:v>0.0385</c:v>
+                  <c:v>3.85E-2</c:v>
                 </c:pt>
                 <c:pt idx="4">
-                  <c:v>0.005</c:v>
+                  <c:v>5.0000000000000001E-3</c:v>
                 </c:pt>
               </c:numCache>
             </c:numRef>
           </c:val>
+          <c:extLst>
+            <c:ext xmlns:c16="http://schemas.microsoft.com/office/drawing/2014/chart" uri="{C3380CC4-5D6E-409C-BE32-E72D297353CC}">
+              <c16:uniqueId val="{00000001-62C4-4F24-8073-98F5A6C70FFA}"/>
+            </c:ext>
+          </c:extLst>
         </c:ser>
         <c:dLbls>
-          <c:numFmt formatCode="0.000" sourceLinked="0"/>
-          <c:txPr>
-            <a:bodyPr/>
-            <a:lstStyle/>
-            <a:p>
-              <a:pPr>
-                <a:defRPr b="0" i="0" strike="noStrike" sz="1000" u="none">
-                  <a:solidFill>
-                    <a:srgbClr val="0B0B0B"/>
-                  </a:solidFill>
-                  <a:latin typeface="Calibri"/>
-                </a:defRPr>
-              </a:pPr>
-            </a:p>
-          </c:txPr>
           <c:showLegendKey val="0"/>
           <c:showVal val="1"/>
           <c:showCatName val="0"/>
           <c:showSerName val="0"/>
           <c:showPercent val="0"/>
           <c:showBubbleSize val="0"/>
-          <c:showLeaderLines val="0"/>
         </c:dLbls>
         <c:gapWidth val="45"/>
-        <c:overlap val="0"/>
         <c:axId val="2094734554"/>
         <c:axId val="2094734552"/>
-        <c:axId val="2094734556"/>
       </c:barChart>
       <c:catAx>
         <c:axId val="2094734554"/>
@@ -730,13 +769,14 @@
         <c:crosses val="autoZero"/>
         <c:auto val="1"/>
         <c:lblAlgn val="ctr"/>
+        <c:lblOffset val="100"/>
         <c:noMultiLvlLbl val="1"/>
       </c:catAx>
       <c:valAx>
         <c:axId val="2094734552"/>
         <c:scaling>
           <c:orientation val="minMax"/>
-          <c:max val="1.15"/>
+          <c:max val="1.1499999999999999"/>
           <c:min val="0"/>
         </c:scaling>
         <c:delete val="0"/>
@@ -809,6 +849,7 @@
     </c:legend>
     <c:plotVisOnly val="1"/>
     <c:dispBlanksAs val="span"/>
+    <c:showDLblsOverMax val="1"/>
   </c:chart>
   <c:spPr>
     <a:noFill/>
@@ -824,9 +865,11 @@
 </file>
 
 <file path=ppt/charts/chart3.xml><?xml version="1.0" encoding="utf-8"?>
-<c:chartSpace xmlns:c="http://schemas.openxmlformats.org/drawingml/2006/chart" xmlns:a="http://schemas.openxmlformats.org/drawingml/2006/main" xmlns:r="http://schemas.openxmlformats.org/officeDocument/2006/relationships">
+<c:chartSpace xmlns:c="http://schemas.openxmlformats.org/drawingml/2006/chart" xmlns:a="http://schemas.openxmlformats.org/drawingml/2006/main" xmlns:r="http://schemas.openxmlformats.org/officeDocument/2006/relationships" xmlns:c16r2="http://schemas.microsoft.com/office/drawing/2015/06/chart">
   <c:date1904 val="0"/>
+  <c:lang val="en-US"/>
   <c:roundedCorners val="1"/>
+  <c:style val="2"/>
   <c:chart>
     <c:autoTitleDeleted val="1"/>
     <c:plotArea>
@@ -858,18 +901,26 @@
           <c:invertIfNegative val="0"/>
           <c:dLbls>
             <c:numFmt formatCode="0.0" sourceLinked="0"/>
+            <c:spPr>
+              <a:noFill/>
+              <a:ln>
+                <a:noFill/>
+              </a:ln>
+              <a:effectLst/>
+            </c:spPr>
             <c:txPr>
               <a:bodyPr/>
               <a:lstStyle/>
               <a:p>
                 <a:pPr>
-                  <a:defRPr b="0" i="0" strike="noStrike" sz="1000" u="none">
+                  <a:defRPr sz="1000" b="0" i="0" u="none" strike="noStrike">
                     <a:solidFill>
                       <a:srgbClr val="0B0B0B"/>
                     </a:solidFill>
                     <a:latin typeface="Calibri"/>
                   </a:defRPr>
                 </a:pPr>
+                <a:endParaRPr lang="en-US"/>
               </a:p>
             </c:txPr>
             <c:showLegendKey val="0"/>
@@ -879,31 +930,34 @@
             <c:showPercent val="0"/>
             <c:showBubbleSize val="0"/>
             <c:showLeaderLines val="0"/>
+            <c:extLst>
+              <c:ext xmlns:c15="http://schemas.microsoft.com/office/drawing/2012/chart" uri="{CE6537A1-D6FC-4f65-9D91-7224C49458BB}">
+                <c15:showLeaderLines val="0"/>
+              </c:ext>
+            </c:extLst>
           </c:dLbls>
           <c:cat>
-            <c:multiLvlStrRef>
+            <c:strRef>
               <c:f>Sheet1!$A$2:$A$6</c:f>
-              <c:multiLvlStrCache>
+              <c:strCache>
                 <c:ptCount val="5"/>
-                <c:lvl>
-                  <c:pt idx="0">
-                    <c:v>Normal</c:v>
-                  </c:pt>
-                  <c:pt idx="1">
-                    <c:v>DoS</c:v>
-                  </c:pt>
-                  <c:pt idx="2">
-                    <c:v>Probe</c:v>
-                  </c:pt>
-                  <c:pt idx="3">
-                    <c:v>R2L</c:v>
-                  </c:pt>
-                  <c:pt idx="4">
-                    <c:v>U2R</c:v>
-                  </c:pt>
-                </c:lvl>
-              </c:multiLvlStrCache>
-            </c:multiLvlStrRef>
+                <c:pt idx="0">
+                  <c:v>Normal</c:v>
+                </c:pt>
+                <c:pt idx="1">
+                  <c:v>DoS</c:v>
+                </c:pt>
+                <c:pt idx="2">
+                  <c:v>Probe</c:v>
+                </c:pt>
+                <c:pt idx="3">
+                  <c:v>R2L</c:v>
+                </c:pt>
+                <c:pt idx="4">
+                  <c:v>U2R</c:v>
+                </c:pt>
+              </c:strCache>
+            </c:strRef>
           </c:cat>
           <c:val>
             <c:numRef>
@@ -929,6 +983,11 @@
               </c:numCache>
             </c:numRef>
           </c:val>
+          <c:extLst>
+            <c:ext xmlns:c16="http://schemas.microsoft.com/office/drawing/2014/chart" uri="{C3380CC4-5D6E-409C-BE32-E72D297353CC}">
+              <c16:uniqueId val="{00000000-FA29-4558-81D8-428B76A98E21}"/>
+            </c:ext>
+          </c:extLst>
         </c:ser>
         <c:ser>
           <c:idx val="1"/>
@@ -953,18 +1012,26 @@
           <c:invertIfNegative val="0"/>
           <c:dLbls>
             <c:numFmt formatCode="0.0" sourceLinked="0"/>
+            <c:spPr>
+              <a:noFill/>
+              <a:ln>
+                <a:noFill/>
+              </a:ln>
+              <a:effectLst/>
+            </c:spPr>
             <c:txPr>
               <a:bodyPr/>
               <a:lstStyle/>
               <a:p>
                 <a:pPr>
-                  <a:defRPr b="0" i="0" strike="noStrike" sz="1000" u="none">
+                  <a:defRPr sz="1000" b="0" i="0" u="none" strike="noStrike">
                     <a:solidFill>
                       <a:srgbClr val="0B0B0B"/>
                     </a:solidFill>
                     <a:latin typeface="Calibri"/>
                   </a:defRPr>
                 </a:pPr>
+                <a:endParaRPr lang="en-US"/>
               </a:p>
             </c:txPr>
             <c:showLegendKey val="0"/>
@@ -974,31 +1041,34 @@
             <c:showPercent val="0"/>
             <c:showBubbleSize val="0"/>
             <c:showLeaderLines val="0"/>
+            <c:extLst>
+              <c:ext xmlns:c15="http://schemas.microsoft.com/office/drawing/2012/chart" uri="{CE6537A1-D6FC-4f65-9D91-7224C49458BB}">
+                <c15:showLeaderLines val="0"/>
+              </c:ext>
+            </c:extLst>
           </c:dLbls>
           <c:cat>
-            <c:multiLvlStrRef>
+            <c:strRef>
               <c:f>Sheet1!$A$2:$A$6</c:f>
-              <c:multiLvlStrCache>
+              <c:strCache>
                 <c:ptCount val="5"/>
-                <c:lvl>
-                  <c:pt idx="0">
-                    <c:v>Normal</c:v>
-                  </c:pt>
-                  <c:pt idx="1">
-                    <c:v>DoS</c:v>
-                  </c:pt>
-                  <c:pt idx="2">
-                    <c:v>Probe</c:v>
-                  </c:pt>
-                  <c:pt idx="3">
-                    <c:v>R2L</c:v>
-                  </c:pt>
-                  <c:pt idx="4">
-                    <c:v>U2R</c:v>
-                  </c:pt>
-                </c:lvl>
-              </c:multiLvlStrCache>
-            </c:multiLvlStrRef>
+                <c:pt idx="0">
+                  <c:v>Normal</c:v>
+                </c:pt>
+                <c:pt idx="1">
+                  <c:v>DoS</c:v>
+                </c:pt>
+                <c:pt idx="2">
+                  <c:v>Probe</c:v>
+                </c:pt>
+                <c:pt idx="3">
+                  <c:v>R2L</c:v>
+                </c:pt>
+                <c:pt idx="4">
+                  <c:v>U2R</c:v>
+                </c:pt>
+              </c:strCache>
+            </c:strRef>
           </c:cat>
           <c:val>
             <c:numRef>
@@ -1024,36 +1094,23 @@
               </c:numCache>
             </c:numRef>
           </c:val>
+          <c:extLst>
+            <c:ext xmlns:c16="http://schemas.microsoft.com/office/drawing/2014/chart" uri="{C3380CC4-5D6E-409C-BE32-E72D297353CC}">
+              <c16:uniqueId val="{00000001-FA29-4558-81D8-428B76A98E21}"/>
+            </c:ext>
+          </c:extLst>
         </c:ser>
         <c:dLbls>
-          <c:numFmt formatCode="0.0" sourceLinked="0"/>
-          <c:txPr>
-            <a:bodyPr/>
-            <a:lstStyle/>
-            <a:p>
-              <a:pPr>
-                <a:defRPr b="0" i="0" strike="noStrike" sz="1000" u="none">
-                  <a:solidFill>
-                    <a:srgbClr val="0B0B0B"/>
-                  </a:solidFill>
-                  <a:latin typeface="Calibri"/>
-                </a:defRPr>
-              </a:pPr>
-            </a:p>
-          </c:txPr>
           <c:showLegendKey val="0"/>
           <c:showVal val="1"/>
           <c:showCatName val="0"/>
           <c:showSerName val="0"/>
           <c:showPercent val="0"/>
           <c:showBubbleSize val="0"/>
-          <c:showLeaderLines val="0"/>
         </c:dLbls>
         <c:gapWidth val="45"/>
-        <c:overlap val="0"/>
         <c:axId val="2094734554"/>
         <c:axId val="2094734552"/>
-        <c:axId val="2094734556"/>
       </c:barChart>
       <c:catAx>
         <c:axId val="2094734554"/>
@@ -1092,6 +1149,7 @@
         <c:crosses val="autoZero"/>
         <c:auto val="1"/>
         <c:lblAlgn val="ctr"/>
+        <c:lblOffset val="100"/>
         <c:noMultiLvlLbl val="1"/>
       </c:catAx>
       <c:valAx>
@@ -1170,6 +1228,7 @@
     </c:legend>
     <c:plotVisOnly val="1"/>
     <c:dispBlanksAs val="span"/>
+    <c:showDLblsOverMax val="1"/>
   </c:chart>
   <c:spPr>
     <a:noFill/>
@@ -1185,9 +1244,11 @@
 </file>
 
 <file path=ppt/charts/chart4.xml><?xml version="1.0" encoding="utf-8"?>
-<c:chartSpace xmlns:c="http://schemas.openxmlformats.org/drawingml/2006/chart" xmlns:a="http://schemas.openxmlformats.org/drawingml/2006/main" xmlns:r="http://schemas.openxmlformats.org/officeDocument/2006/relationships">
+<c:chartSpace xmlns:c="http://schemas.openxmlformats.org/drawingml/2006/chart" xmlns:a="http://schemas.openxmlformats.org/drawingml/2006/main" xmlns:r="http://schemas.openxmlformats.org/officeDocument/2006/relationships" xmlns:c16r2="http://schemas.microsoft.com/office/drawing/2015/06/chart">
   <c:date1904 val="0"/>
+  <c:lang val="en-US"/>
   <c:roundedCorners val="1"/>
+  <c:style val="2"/>
   <c:chart>
     <c:autoTitleDeleted val="1"/>
     <c:plotArea>
@@ -1219,18 +1280,26 @@
           <c:invertIfNegative val="0"/>
           <c:dLbls>
             <c:numFmt formatCode="0.000" sourceLinked="0"/>
+            <c:spPr>
+              <a:noFill/>
+              <a:ln>
+                <a:noFill/>
+              </a:ln>
+              <a:effectLst/>
+            </c:spPr>
             <c:txPr>
               <a:bodyPr/>
               <a:lstStyle/>
               <a:p>
                 <a:pPr>
-                  <a:defRPr b="0" i="0" strike="noStrike" sz="1000" u="none">
+                  <a:defRPr sz="1000" b="0" i="0" u="none" strike="noStrike">
                     <a:solidFill>
                       <a:srgbClr val="0B0B0B"/>
                     </a:solidFill>
                     <a:latin typeface="Calibri"/>
                   </a:defRPr>
                 </a:pPr>
+                <a:endParaRPr lang="en-US"/>
               </a:p>
             </c:txPr>
             <c:showLegendKey val="0"/>
@@ -1240,28 +1309,31 @@
             <c:showPercent val="0"/>
             <c:showBubbleSize val="0"/>
             <c:showLeaderLines val="0"/>
+            <c:extLst>
+              <c:ext xmlns:c15="http://schemas.microsoft.com/office/drawing/2012/chart" uri="{CE6537A1-D6FC-4f65-9D91-7224C49458BB}">
+                <c15:showLeaderLines val="0"/>
+              </c:ext>
+            </c:extLst>
           </c:dLbls>
           <c:cat>
-            <c:multiLvlStrRef>
+            <c:strRef>
               <c:f>Sheet1!$A$2:$A$5</c:f>
-              <c:multiLvlStrCache>
+              <c:strCache>
                 <c:ptCount val="4"/>
-                <c:lvl>
-                  <c:pt idx="0">
-                    <c:v>DoS</c:v>
-                  </c:pt>
-                  <c:pt idx="1">
-                    <c:v>Probe</c:v>
-                  </c:pt>
-                  <c:pt idx="2">
-                    <c:v>R2L</c:v>
-                  </c:pt>
-                  <c:pt idx="3">
-                    <c:v>U2R</c:v>
-                  </c:pt>
-                </c:lvl>
-              </c:multiLvlStrCache>
-            </c:multiLvlStrRef>
+                <c:pt idx="0">
+                  <c:v>DoS</c:v>
+                </c:pt>
+                <c:pt idx="1">
+                  <c:v>Probe</c:v>
+                </c:pt>
+                <c:pt idx="2">
+                  <c:v>R2L</c:v>
+                </c:pt>
+                <c:pt idx="3">
+                  <c:v>U2R</c:v>
+                </c:pt>
+              </c:strCache>
+            </c:strRef>
           </c:cat>
           <c:val>
             <c:numRef>
@@ -1270,13 +1342,13 @@
                 <c:formatCode>General</c:formatCode>
                 <c:ptCount val="4"/>
                 <c:pt idx="0">
-                  <c:v>0.788</c:v>
+                  <c:v>0.78800000000000003</c:v>
                 </c:pt>
                 <c:pt idx="1">
-                  <c:v>0.7485</c:v>
+                  <c:v>0.74850000000000005</c:v>
                 </c:pt>
                 <c:pt idx="2">
-                  <c:v>0.0534</c:v>
+                  <c:v>5.3400000000000003E-2</c:v>
                 </c:pt>
                 <c:pt idx="3">
                   <c:v>0.11</c:v>
@@ -1284,6 +1356,11 @@
               </c:numCache>
             </c:numRef>
           </c:val>
+          <c:extLst>
+            <c:ext xmlns:c16="http://schemas.microsoft.com/office/drawing/2014/chart" uri="{C3380CC4-5D6E-409C-BE32-E72D297353CC}">
+              <c16:uniqueId val="{00000000-CD6B-405B-B149-CCAC898E5217}"/>
+            </c:ext>
+          </c:extLst>
         </c:ser>
         <c:ser>
           <c:idx val="1"/>
@@ -1308,18 +1385,26 @@
           <c:invertIfNegative val="0"/>
           <c:dLbls>
             <c:numFmt formatCode="0.000" sourceLinked="0"/>
+            <c:spPr>
+              <a:noFill/>
+              <a:ln>
+                <a:noFill/>
+              </a:ln>
+              <a:effectLst/>
+            </c:spPr>
             <c:txPr>
               <a:bodyPr/>
               <a:lstStyle/>
               <a:p>
                 <a:pPr>
-                  <a:defRPr b="0" i="0" strike="noStrike" sz="1000" u="none">
+                  <a:defRPr sz="1000" b="0" i="0" u="none" strike="noStrike">
                     <a:solidFill>
                       <a:srgbClr val="0B0B0B"/>
                     </a:solidFill>
                     <a:latin typeface="Calibri"/>
                   </a:defRPr>
                 </a:pPr>
+                <a:endParaRPr lang="en-US"/>
               </a:p>
             </c:txPr>
             <c:showLegendKey val="0"/>
@@ -1329,28 +1414,31 @@
             <c:showPercent val="0"/>
             <c:showBubbleSize val="0"/>
             <c:showLeaderLines val="0"/>
+            <c:extLst>
+              <c:ext xmlns:c15="http://schemas.microsoft.com/office/drawing/2012/chart" uri="{CE6537A1-D6FC-4f65-9D91-7224C49458BB}">
+                <c15:showLeaderLines val="0"/>
+              </c:ext>
+            </c:extLst>
           </c:dLbls>
           <c:cat>
-            <c:multiLvlStrRef>
+            <c:strRef>
               <c:f>Sheet1!$A$2:$A$5</c:f>
-              <c:multiLvlStrCache>
+              <c:strCache>
                 <c:ptCount val="4"/>
-                <c:lvl>
-                  <c:pt idx="0">
-                    <c:v>DoS</c:v>
-                  </c:pt>
-                  <c:pt idx="1">
-                    <c:v>Probe</c:v>
-                  </c:pt>
-                  <c:pt idx="2">
-                    <c:v>R2L</c:v>
-                  </c:pt>
-                  <c:pt idx="3">
-                    <c:v>U2R</c:v>
-                  </c:pt>
-                </c:lvl>
-              </c:multiLvlStrCache>
-            </c:multiLvlStrRef>
+                <c:pt idx="0">
+                  <c:v>DoS</c:v>
+                </c:pt>
+                <c:pt idx="1">
+                  <c:v>Probe</c:v>
+                </c:pt>
+                <c:pt idx="2">
+                  <c:v>R2L</c:v>
+                </c:pt>
+                <c:pt idx="3">
+                  <c:v>U2R</c:v>
+                </c:pt>
+              </c:strCache>
+            </c:strRef>
           </c:cat>
           <c:val>
             <c:numRef>
@@ -1359,13 +1447,13 @@
                 <c:formatCode>General</c:formatCode>
                 <c:ptCount val="4"/>
                 <c:pt idx="0">
-                  <c:v>0.5417</c:v>
+                  <c:v>0.54169999999999996</c:v>
                 </c:pt>
                 <c:pt idx="1">
-                  <c:v>0.3689</c:v>
+                  <c:v>0.36890000000000001</c:v>
                 </c:pt>
                 <c:pt idx="2">
-                  <c:v>0.0007</c:v>
+                  <c:v>6.9999999999999999E-4</c:v>
                 </c:pt>
                 <c:pt idx="3">
                   <c:v>0.02</c:v>
@@ -1373,36 +1461,23 @@
               </c:numCache>
             </c:numRef>
           </c:val>
+          <c:extLst>
+            <c:ext xmlns:c16="http://schemas.microsoft.com/office/drawing/2014/chart" uri="{C3380CC4-5D6E-409C-BE32-E72D297353CC}">
+              <c16:uniqueId val="{00000001-CD6B-405B-B149-CCAC898E5217}"/>
+            </c:ext>
+          </c:extLst>
         </c:ser>
         <c:dLbls>
-          <c:numFmt formatCode="0.000" sourceLinked="0"/>
-          <c:txPr>
-            <a:bodyPr/>
-            <a:lstStyle/>
-            <a:p>
-              <a:pPr>
-                <a:defRPr b="0" i="0" strike="noStrike" sz="1000" u="none">
-                  <a:solidFill>
-                    <a:srgbClr val="0B0B0B"/>
-                  </a:solidFill>
-                  <a:latin typeface="Calibri"/>
-                </a:defRPr>
-              </a:pPr>
-            </a:p>
-          </c:txPr>
           <c:showLegendKey val="0"/>
           <c:showVal val="1"/>
           <c:showCatName val="0"/>
           <c:showSerName val="0"/>
           <c:showPercent val="0"/>
           <c:showBubbleSize val="0"/>
-          <c:showLeaderLines val="0"/>
         </c:dLbls>
         <c:gapWidth val="45"/>
-        <c:overlap val="0"/>
         <c:axId val="2094734554"/>
         <c:axId val="2094734552"/>
-        <c:axId val="2094734556"/>
       </c:barChart>
       <c:catAx>
         <c:axId val="2094734554"/>
@@ -1441,6 +1516,7 @@
         <c:crosses val="autoZero"/>
         <c:auto val="1"/>
         <c:lblAlgn val="ctr"/>
+        <c:lblOffset val="100"/>
         <c:noMultiLvlLbl val="1"/>
       </c:catAx>
       <c:valAx>
@@ -1520,6 +1596,7 @@
     </c:legend>
     <c:plotVisOnly val="1"/>
     <c:dispBlanksAs val="span"/>
+    <c:showDLblsOverMax val="1"/>
   </c:chart>
   <c:spPr>
     <a:noFill/>
@@ -1535,9 +1612,11 @@
 </file>
 
 <file path=ppt/charts/chart5.xml><?xml version="1.0" encoding="utf-8"?>
-<c:chartSpace xmlns:c="http://schemas.openxmlformats.org/drawingml/2006/chart" xmlns:a="http://schemas.openxmlformats.org/drawingml/2006/main" xmlns:r="http://schemas.openxmlformats.org/officeDocument/2006/relationships">
+<c:chartSpace xmlns:c="http://schemas.openxmlformats.org/drawingml/2006/chart" xmlns:a="http://schemas.openxmlformats.org/drawingml/2006/main" xmlns:r="http://schemas.openxmlformats.org/officeDocument/2006/relationships" xmlns:c16r2="http://schemas.microsoft.com/office/drawing/2015/06/chart">
   <c:date1904 val="0"/>
+  <c:lang val="en-US"/>
   <c:roundedCorners val="1"/>
+  <c:style val="2"/>
   <c:chart>
     <c:autoTitleDeleted val="1"/>
     <c:plotArea>
@@ -1569,18 +1648,26 @@
           <c:invertIfNegative val="0"/>
           <c:dLbls>
             <c:numFmt formatCode="0.000" sourceLinked="0"/>
+            <c:spPr>
+              <a:noFill/>
+              <a:ln>
+                <a:noFill/>
+              </a:ln>
+              <a:effectLst/>
+            </c:spPr>
             <c:txPr>
               <a:bodyPr/>
               <a:lstStyle/>
               <a:p>
                 <a:pPr>
-                  <a:defRPr b="0" i="0" strike="noStrike" sz="1000" u="none">
+                  <a:defRPr sz="1000" b="0" i="0" u="none" strike="noStrike">
                     <a:solidFill>
                       <a:srgbClr val="0B0B0B"/>
                     </a:solidFill>
                     <a:latin typeface="Calibri"/>
                   </a:defRPr>
                 </a:pPr>
+                <a:endParaRPr lang="en-US"/>
               </a:p>
             </c:txPr>
             <c:showLegendKey val="0"/>
@@ -1590,37 +1677,40 @@
             <c:showPercent val="0"/>
             <c:showBubbleSize val="0"/>
             <c:showLeaderLines val="0"/>
+            <c:extLst>
+              <c:ext xmlns:c15="http://schemas.microsoft.com/office/drawing/2012/chart" uri="{CE6537A1-D6FC-4f65-9D91-7224C49458BB}">
+                <c15:showLeaderLines val="0"/>
+              </c:ext>
+            </c:extLst>
           </c:dLbls>
           <c:cat>
-            <c:multiLvlStrRef>
+            <c:strRef>
               <c:f>Sheet1!$A$2:$A$8</c:f>
-              <c:multiLvlStrCache>
+              <c:strCache>
                 <c:ptCount val="7"/>
-                <c:lvl>
-                  <c:pt idx="0">
-                    <c:v>Random forest</c:v>
-                  </c:pt>
-                  <c:pt idx="1">
-                    <c:v>LightGBM</c:v>
-                  </c:pt>
-                  <c:pt idx="2">
-                    <c:v>XGBoost</c:v>
-                  </c:pt>
-                  <c:pt idx="3">
-                    <c:v>MLP (128,64)</c:v>
-                  </c:pt>
-                  <c:pt idx="4">
-                    <c:v>Logistic regression</c:v>
-                  </c:pt>
-                  <c:pt idx="5">
-                    <c:v>Decision tree</c:v>
-                  </c:pt>
-                  <c:pt idx="6">
-                    <c:v>ONNX (logreg)</c:v>
-                  </c:pt>
-                </c:lvl>
-              </c:multiLvlStrCache>
-            </c:multiLvlStrRef>
+                <c:pt idx="0">
+                  <c:v>Random forest</c:v>
+                </c:pt>
+                <c:pt idx="1">
+                  <c:v>LightGBM</c:v>
+                </c:pt>
+                <c:pt idx="2">
+                  <c:v>XGBoost</c:v>
+                </c:pt>
+                <c:pt idx="3">
+                  <c:v>MLP (128,64)</c:v>
+                </c:pt>
+                <c:pt idx="4">
+                  <c:v>Logistic regression</c:v>
+                </c:pt>
+                <c:pt idx="5">
+                  <c:v>Decision tree</c:v>
+                </c:pt>
+                <c:pt idx="6">
+                  <c:v>ONNX (logreg)</c:v>
+                </c:pt>
+              </c:strCache>
+            </c:strRef>
           </c:cat>
           <c:val>
             <c:numRef>
@@ -1629,13 +1719,13 @@
                 <c:formatCode>General</c:formatCode>
                 <c:ptCount val="7"/>
                 <c:pt idx="0">
-                  <c:v>65.2055</c:v>
+                  <c:v>65.205500000000001</c:v>
                 </c:pt>
                 <c:pt idx="1">
-                  <c:v>1.0455</c:v>
+                  <c:v>1.0455000000000001</c:v>
                 </c:pt>
                 <c:pt idx="2">
-                  <c:v>0.9683</c:v>
+                  <c:v>0.96830000000000005</c:v>
                 </c:pt>
                 <c:pt idx="3">
                   <c:v>0.3624</c:v>
@@ -1644,44 +1734,31 @@
                   <c:v>0.215</c:v>
                 </c:pt>
                 <c:pt idx="5">
-                  <c:v>0.0794</c:v>
+                  <c:v>7.9399999999999998E-2</c:v>
                 </c:pt>
                 <c:pt idx="6">
-                  <c:v>0.0129</c:v>
+                  <c:v>1.29E-2</c:v>
                 </c:pt>
               </c:numCache>
             </c:numRef>
           </c:val>
+          <c:extLst>
+            <c:ext xmlns:c16="http://schemas.microsoft.com/office/drawing/2014/chart" uri="{C3380CC4-5D6E-409C-BE32-E72D297353CC}">
+              <c16:uniqueId val="{00000000-B22C-4A90-8D17-A86361303777}"/>
+            </c:ext>
+          </c:extLst>
         </c:ser>
         <c:dLbls>
-          <c:numFmt formatCode="0.000" sourceLinked="0"/>
-          <c:txPr>
-            <a:bodyPr/>
-            <a:lstStyle/>
-            <a:p>
-              <a:pPr>
-                <a:defRPr b="0" i="0" strike="noStrike" sz="1000" u="none">
-                  <a:solidFill>
-                    <a:srgbClr val="0B0B0B"/>
-                  </a:solidFill>
-                  <a:latin typeface="Calibri"/>
-                </a:defRPr>
-              </a:pPr>
-            </a:p>
-          </c:txPr>
           <c:showLegendKey val="0"/>
           <c:showVal val="1"/>
           <c:showCatName val="0"/>
           <c:showSerName val="0"/>
           <c:showPercent val="0"/>
           <c:showBubbleSize val="0"/>
-          <c:showLeaderLines val="0"/>
         </c:dLbls>
         <c:gapWidth val="45"/>
-        <c:overlap val="0"/>
         <c:axId val="2094734554"/>
         <c:axId val="2094734552"/>
-        <c:axId val="2094734556"/>
       </c:barChart>
       <c:catAx>
         <c:axId val="2094734554"/>
@@ -1720,6 +1797,7 @@
         <c:crosses val="autoZero"/>
         <c:auto val="1"/>
         <c:lblAlgn val="ctr"/>
+        <c:lblOffset val="100"/>
         <c:noMultiLvlLbl val="1"/>
       </c:catAx>
       <c:valAx>
@@ -1781,6 +1859,7 @@
     </c:plotArea>
     <c:plotVisOnly val="1"/>
     <c:dispBlanksAs val="span"/>
+    <c:showDLblsOverMax val="1"/>
   </c:chart>
   <c:spPr>
     <a:noFill/>
@@ -1817,234 +1896,10 @@
           <a:chExt cx="0" cy="0"/>
         </a:xfrm>
       </p:grpSpPr>
-      <p:sp>
-        <p:nvSpPr>
-          <p:cNvPr id="2" name="Header Placeholder 1"/>
-          <p:cNvSpPr>
-            <a:spLocks noGrp="1"/>
-          </p:cNvSpPr>
-          <p:nvPr>
-            <p:ph type="hdr" sz="quarter"/>
-          </p:nvPr>
-        </p:nvSpPr>
-        <p:spPr>
-          <a:xfrm>
-            <a:off x="0" y="0"/>
-            <a:ext cx="2971800" cy="458788"/>
-          </a:xfrm>
-          <a:prstGeom prst="rect">
-            <a:avLst/>
-          </a:prstGeom>
-        </p:spPr>
-        <p:txBody>
-          <a:bodyPr vert="horz" lIns="91440" tIns="45720" rIns="91440" bIns="45720" rtlCol="0"/>
-          <a:lstStyle>
-            <a:lvl1pPr algn="l">
-              <a:defRPr sz="1200"/>
-            </a:lvl1pPr>
-          </a:lstStyle>
-          <a:p>
-            <a:endParaRPr lang="en-US"/>
-          </a:p>
-        </p:txBody>
-      </p:sp>
-      <p:sp>
-        <p:nvSpPr>
-          <p:cNvPr id="3" name="Date Placeholder 2"/>
-          <p:cNvSpPr>
-            <a:spLocks noGrp="1"/>
-          </p:cNvSpPr>
-          <p:nvPr>
-            <p:ph type="dt" idx="1"/>
-          </p:nvPr>
-        </p:nvSpPr>
-        <p:spPr>
-          <a:xfrm>
-            <a:off x="3884613" y="0"/>
-            <a:ext cx="2971800" cy="458788"/>
-          </a:xfrm>
-          <a:prstGeom prst="rect">
-            <a:avLst/>
-          </a:prstGeom>
-        </p:spPr>
-        <p:txBody>
-          <a:bodyPr vert="horz" lIns="91440" tIns="45720" rIns="91440" bIns="45720" rtlCol="0"/>
-          <a:lstStyle>
-            <a:lvl1pPr algn="r">
-              <a:defRPr sz="1200"/>
-            </a:lvl1pPr>
-          </a:lstStyle>
-          <a:p>
-            <a:fld id="{5282F153-3F37-0F45-9E97-73ACFA13230C}" type="datetimeFigureOut">
-              <a:rPr lang="en-US"/>
-              <a:t>7/23/19</a:t>
-            </a:fld>
-            <a:endParaRPr lang="en-US"/>
-          </a:p>
-        </p:txBody>
-      </p:sp>
-      <p:sp>
-        <p:nvSpPr>
-          <p:cNvPr id="4" name="Slide Image Placeholder 3"/>
-          <p:cNvSpPr>
-            <a:spLocks noGrp="1" noRot="1" noChangeAspect="1"/>
-          </p:cNvSpPr>
-          <p:nvPr>
-            <p:ph type="sldImg" idx="2"/>
-          </p:nvPr>
-        </p:nvSpPr>
-        <p:spPr>
-          <a:xfrm>
-            <a:off x="685800" y="1143000"/>
-            <a:ext cx="5486400" cy="3086100"/>
-          </a:xfrm>
-          <a:prstGeom prst="rect">
-            <a:avLst/>
-          </a:prstGeom>
-          <a:noFill/>
-          <a:ln w="12700">
-            <a:solidFill>
-              <a:prstClr val="black"/>
-            </a:solidFill>
-          </a:ln>
-        </p:spPr>
-        <p:txBody>
-          <a:bodyPr vert="horz" lIns="91440" tIns="45720" rIns="91440" bIns="45720" rtlCol="0" anchor="ctr"/>
-          <a:lstStyle/>
-          <a:p>
-            <a:endParaRPr lang="en-US"/>
-          </a:p>
-        </p:txBody>
-      </p:sp>
-      <p:sp>
-        <p:nvSpPr>
-          <p:cNvPr id="5" name="Notes Placeholder 4"/>
-          <p:cNvSpPr>
-            <a:spLocks noGrp="1"/>
-          </p:cNvSpPr>
-          <p:nvPr>
-            <p:ph type="body" sz="quarter" idx="3"/>
-          </p:nvPr>
-        </p:nvSpPr>
-        <p:spPr>
-          <a:xfrm>
-            <a:off x="685800" y="4400550"/>
-            <a:ext cx="5486400" cy="3600450"/>
-          </a:xfrm>
-          <a:prstGeom prst="rect">
-            <a:avLst/>
-          </a:prstGeom>
-        </p:spPr>
-        <p:txBody>
-          <a:bodyPr vert="horz" lIns="91440" tIns="45720" rIns="91440" bIns="45720" rtlCol="0"/>
-          <a:lstStyle/>
-          <a:p>
-            <a:pPr lvl="0"/>
-            <a:r>
-              <a:rPr lang="en-US"/>
-              <a:t>Click to edit Master text styles</a:t>
-            </a:r>
-          </a:p>
-          <a:p>
-            <a:pPr lvl="1"/>
-            <a:r>
-              <a:rPr lang="en-US"/>
-              <a:t>Second level</a:t>
-            </a:r>
-          </a:p>
-          <a:p>
-            <a:pPr lvl="2"/>
-            <a:r>
-              <a:rPr lang="en-US"/>
-              <a:t>Third level</a:t>
-            </a:r>
-          </a:p>
-          <a:p>
-            <a:pPr lvl="3"/>
-            <a:r>
-              <a:rPr lang="en-US"/>
-              <a:t>Fourth level</a:t>
-            </a:r>
-          </a:p>
-          <a:p>
-            <a:pPr lvl="4"/>
-            <a:r>
-              <a:rPr lang="en-US"/>
-              <a:t>Fifth level</a:t>
-            </a:r>
-          </a:p>
-        </p:txBody>
-      </p:sp>
-      <p:sp>
-        <p:nvSpPr>
-          <p:cNvPr id="6" name="Footer Placeholder 5"/>
-          <p:cNvSpPr>
-            <a:spLocks noGrp="1"/>
-          </p:cNvSpPr>
-          <p:nvPr>
-            <p:ph type="ftr" sz="quarter" idx="4"/>
-          </p:nvPr>
-        </p:nvSpPr>
-        <p:spPr>
-          <a:xfrm>
-            <a:off x="0" y="8685213"/>
-            <a:ext cx="2971800" cy="458787"/>
-          </a:xfrm>
-          <a:prstGeom prst="rect">
-            <a:avLst/>
-          </a:prstGeom>
-        </p:spPr>
-        <p:txBody>
-          <a:bodyPr vert="horz" lIns="91440" tIns="45720" rIns="91440" bIns="45720" rtlCol="0" anchor="b"/>
-          <a:lstStyle>
-            <a:lvl1pPr algn="l">
-              <a:defRPr sz="1200"/>
-            </a:lvl1pPr>
-          </a:lstStyle>
-          <a:p>
-            <a:endParaRPr lang="en-US"/>
-          </a:p>
-        </p:txBody>
-      </p:sp>
-      <p:sp>
-        <p:nvSpPr>
-          <p:cNvPr id="7" name="Slide Number Placeholder 6"/>
-          <p:cNvSpPr>
-            <a:spLocks noGrp="1"/>
-          </p:cNvSpPr>
-          <p:nvPr>
-            <p:ph type="sldNum" sz="quarter" idx="5"/>
-          </p:nvPr>
-        </p:nvSpPr>
-        <p:spPr>
-          <a:xfrm>
-            <a:off x="3884613" y="8685213"/>
-            <a:ext cx="2971800" cy="458787"/>
-          </a:xfrm>
-          <a:prstGeom prst="rect">
-            <a:avLst/>
-          </a:prstGeom>
-        </p:spPr>
-        <p:txBody>
-          <a:bodyPr vert="horz" lIns="91440" tIns="45720" rIns="91440" bIns="45720" rtlCol="0" anchor="b"/>
-          <a:lstStyle>
-            <a:lvl1pPr algn="r">
-              <a:defRPr sz="1200"/>
-            </a:lvl1pPr>
-          </a:lstStyle>
-          <a:p>
-            <a:fld id="{CE5E9CC1-C706-0F49-92D6-E571CC5EEA8F}" type="slidenum">
-              <a:rPr lang="en-US"/>
-              <a:t>‹#›</a:t>
-            </a:fld>
-            <a:endParaRPr lang="en-US"/>
-          </a:p>
-        </p:txBody>
-      </p:sp>
     </p:spTree>
     <p:extLst>
       <p:ext uri="{BB962C8B-B14F-4D97-AF65-F5344CB8AC3E}">
-        <p14:creationId xmlns:p14="http://schemas.microsoft.com/office/powerpoint/2010/main" val="1024086991"/>
+        <p14:creationId xmlns:p14="http://schemas.microsoft.com/office/powerpoint/2010/main" val="3918743802"/>
       </p:ext>
     </p:extLst>
   </p:cSld>
@@ -2192,7 +2047,6 @@
               <a:rPr lang="en-US" dirty="0"/>
               <a:t>Opening: state the claim in the first 20 seconds. One model, one pipeline, one seed; only the split differs; 99.51% becomes 75.28%.</a:t>
             </a:r>
-            <a:endParaRPr lang="en-US" dirty="0"/>
           </a:p>
         </p:txBody>
       </p:sp>
@@ -2280,7 +2134,6 @@
               <a:rPr lang="en-US" dirty="0"/>
               <a:t>LightGBM's negative shift penalty is an artefact of collapse on rare classes inside small CV folds — reported as measured.</a:t>
             </a:r>
-            <a:endParaRPr lang="en-US" dirty="0"/>
           </a:p>
         </p:txBody>
       </p:sp>
@@ -2364,10 +2217,6 @@
           <a:bodyPr/>
           <a:lstStyle/>
           <a:p>
-            <a:r>
-              <a:rPr lang="en-US" dirty="0"/>
-              <a:t/>
-            </a:r>
             <a:endParaRPr lang="en-US" dirty="0"/>
           </a:p>
         </p:txBody>
@@ -2456,7 +2305,6 @@
               <a:rPr lang="en-US" dirty="0"/>
               <a:t>Channel B alone beats Channel A on unseen attacks at a third of the false-alarm rate. That is the most informative row.</a:t>
             </a:r>
-            <a:endParaRPr lang="en-US" dirty="0"/>
           </a:p>
         </p:txBody>
       </p:sp>
@@ -2544,7 +2392,6 @@
               <a:rPr lang="en-US" dirty="0"/>
               <a:t>τ is a staffing decision, not a hyperparameter. Report the curve, don't pick for the operator.</a:t>
             </a:r>
-            <a:endParaRPr lang="en-US" dirty="0"/>
           </a:p>
         </p:txBody>
       </p:sp>
@@ -2632,7 +2479,6 @@
               <a:rPr lang="en-US" dirty="0"/>
               <a:t>Round 2 is a Model Explanation round — this slide is the one to expand if they push.</a:t>
             </a:r>
-            <a:endParaRPr lang="en-US" dirty="0"/>
           </a:p>
         </p:txBody>
       </p:sp>
@@ -2720,7 +2566,6 @@
               <a:rPr lang="en-US" dirty="0"/>
               <a:t>Caveat to volunteer: this measures inference on pre-computed features. Feature extraction from a live packet stream is the harder problem and is out of scope.</a:t>
             </a:r>
-            <a:endParaRPr lang="en-US" dirty="0"/>
           </a:p>
         </p:txBody>
       </p:sp>
@@ -2804,10 +2649,6 @@
           <a:bodyPr/>
           <a:lstStyle/>
           <a:p>
-            <a:r>
-              <a:rPr lang="en-US" dirty="0"/>
-              <a:t/>
-            </a:r>
             <a:endParaRPr lang="en-US" dirty="0"/>
           </a:p>
         </p:txBody>
@@ -2892,10 +2733,6 @@
           <a:bodyPr/>
           <a:lstStyle/>
           <a:p>
-            <a:r>
-              <a:rPr lang="en-US" dirty="0"/>
-              <a:t/>
-            </a:r>
             <a:endParaRPr lang="en-US" dirty="0"/>
           </a:p>
         </p:txBody>
@@ -2984,7 +2821,6 @@
               <a:rPr lang="en-US" dirty="0"/>
               <a:t>Frame ML as necessary but the evaluation as broken. Do not oversell ML here.</a:t>
             </a:r>
-            <a:endParaRPr lang="en-US" dirty="0"/>
           </a:p>
         </p:txBody>
       </p:sp>
@@ -3072,7 +2908,6 @@
               <a:rPr lang="en-US" dirty="0"/>
               <a:t>Say the hypothesis out loud. Emphasise that it could have come out the other way.</a:t>
             </a:r>
-            <a:endParaRPr lang="en-US" dirty="0"/>
           </a:p>
         </p:txBody>
       </p:sp>
@@ -3160,7 +2995,6 @@
               <a:rPr lang="en-US" dirty="0"/>
               <a:t>If asked why not a modern dataset, lead with the merit argument, not the availability one.</a:t>
             </a:r>
-            <a:endParaRPr lang="en-US" dirty="0"/>
           </a:p>
         </p:txBody>
       </p:sp>
@@ -3248,7 +3082,6 @@
               <a:rPr lang="en-US" dirty="0"/>
               <a:t>The controlled-experiment framing is what makes this more than a caveat.</a:t>
             </a:r>
-            <a:endParaRPr lang="en-US" dirty="0"/>
           </a:p>
         </p:txBody>
       </p:sp>
@@ -3336,7 +3169,6 @@
               <a:rPr lang="en-US" dirty="0"/>
               <a:t>Gap: 24.23 accuracy points, 46.79 macro-F1 points.</a:t>
             </a:r>
-            <a:endParaRPr lang="en-US" dirty="0"/>
           </a:p>
         </p:txBody>
       </p:sp>
@@ -3424,7 +3256,6 @@
               <a:rPr lang="en-US" dirty="0"/>
               <a:t>These two families signify actual compromise rather than disruption. Accuracy cannot see this.</a:t>
             </a:r>
-            <a:endParaRPr lang="en-US" dirty="0"/>
           </a:p>
         </p:txBody>
       </p:sp>
@@ -3508,10 +3339,6 @@
           <a:bodyPr/>
           <a:lstStyle/>
           <a:p>
-            <a:r>
-              <a:rPr lang="en-US" dirty="0"/>
-              <a:t/>
-            </a:r>
             <a:endParaRPr lang="en-US" dirty="0"/>
           </a:p>
         </p:txBody>
@@ -3596,10 +3423,6 @@
           <a:bodyPr/>
           <a:lstStyle/>
           <a:p>
-            <a:r>
-              <a:rPr lang="en-US" dirty="0"/>
-              <a:t/>
-            </a:r>
             <a:endParaRPr lang="en-US" dirty="0"/>
           </a:p>
         </p:txBody>
@@ -3673,6 +3496,11 @@
 <file path=ppt/slideMasters/slideMaster1.xml><?xml version="1.0" encoding="utf-8"?>
 <p:sldMaster xmlns:a="http://schemas.openxmlformats.org/drawingml/2006/main" xmlns:r="http://schemas.openxmlformats.org/officeDocument/2006/relationships" xmlns:p="http://schemas.openxmlformats.org/presentationml/2006/main">
   <p:cSld>
+    <p:bg>
+      <p:bgRef idx="1001">
+        <a:schemeClr val="bg1"/>
+      </p:bgRef>
+    </p:bg>
     <p:spTree>
       <p:nvGrpSpPr>
         <p:cNvPr id="1" name=""/>
@@ -3955,6 +3783,7 @@
         <a:solidFill>
           <a:srgbClr val="0D1B2A"/>
         </a:solidFill>
+        <a:effectLst/>
       </p:bgPr>
     </p:bg>
     <p:spTree>
@@ -3992,11 +3821,11 @@
           <a:bodyPr wrap="square" lIns="0" tIns="0" rIns="0" bIns="0" rtlCol="0" anchor="ctr"/>
           <a:lstStyle/>
           <a:p>
-            <a:pPr indent="0" marL="0">
-              <a:buNone/>
-            </a:pPr>
-            <a:r>
-              <a:rPr lang="en-US" sz="5400" b="1" spc="50" kern="0" dirty="0">
+            <a:pPr marL="0" indent="0">
+              <a:buNone/>
+            </a:pPr>
+            <a:r>
+              <a:rPr lang="en-US" sz="5400" b="1" kern="0" spc="50" dirty="0">
                 <a:solidFill>
                   <a:srgbClr val="FFFFFF"/>
                 </a:solidFill>
@@ -4031,7 +3860,7 @@
           <a:bodyPr wrap="square" lIns="0" tIns="0" rIns="0" bIns="0" rtlCol="0" anchor="ctr"/>
           <a:lstStyle/>
           <a:p>
-            <a:pPr indent="0" marL="0">
+            <a:pPr marL="0" indent="0">
               <a:buNone/>
             </a:pPr>
             <a:r>
@@ -4097,7 +3926,7 @@
           <a:bodyPr wrap="square" lIns="0" tIns="0" rIns="0" bIns="0" rtlCol="0" anchor="ctr"/>
           <a:lstStyle/>
           <a:p>
-            <a:pPr indent="0" marL="0">
+            <a:pPr marL="0" indent="0">
               <a:lnSpc>
                 <a:spcPts val="2200"/>
               </a:lnSpc>
@@ -4113,89 +3942,71 @@
                 <a:cs typeface="Calibri" pitchFamily="34" charset="-120"/>
               </a:rPr>
               <a:t>Machine-learning intrusion detectors report 97–99% accuracy.
-</a:t>
-            </a:r>
-            <a:pPr indent="0" marL="0">
-              <a:lnSpc>
-                <a:spcPts val="2200"/>
-              </a:lnSpc>
-              <a:buNone/>
-            </a:pPr>
-            <a:r>
-              <a:rPr lang="en-US" sz="1400" dirty="0">
-                <a:solidFill>
-                  <a:srgbClr val="C9D6E2"/>
+I changed only the train/test split. Accuracy fell to </a:t>
+            </a:r>
+            <a:r>
+              <a:rPr lang="en-US" sz="1400" b="1" dirty="0">
+                <a:solidFill>
+                  <a:srgbClr val="FFFFFF"/>
                 </a:solidFill>
                 <a:latin typeface="Calibri" pitchFamily="34" charset="0"/>
                 <a:ea typeface="Calibri" pitchFamily="34" charset="-122"/>
                 <a:cs typeface="Calibri" pitchFamily="34" charset="-120"/>
               </a:rPr>
-              <a:t>I changed only the train/test split. Accuracy fell to </a:t>
-            </a:r>
-            <a:pPr indent="0" marL="0">
-              <a:lnSpc>
-                <a:spcPts val="2200"/>
-              </a:lnSpc>
-              <a:buNone/>
-            </a:pPr>
-            <a:r>
-              <a:rPr lang="en-US" sz="1400" b="1" dirty="0">
-                <a:solidFill>
-                  <a:srgbClr val="FFFFFF"/>
+              <a:t>75.28%</a:t>
+            </a:r>
+            <a:r>
+              <a:rPr lang="en-US" sz="1400" dirty="0">
+                <a:solidFill>
+                  <a:srgbClr val="C9D6E2"/>
                 </a:solidFill>
                 <a:latin typeface="Calibri" pitchFamily="34" charset="0"/>
                 <a:ea typeface="Calibri" pitchFamily="34" charset="-122"/>
                 <a:cs typeface="Calibri" pitchFamily="34" charset="-120"/>
               </a:rPr>
-              <a:t>75.28%</a:t>
-            </a:r>
-            <a:pPr indent="0" marL="0">
-              <a:lnSpc>
-                <a:spcPts val="2200"/>
-              </a:lnSpc>
-              <a:buNone/>
-            </a:pPr>
-            <a:r>
-              <a:rPr lang="en-US" sz="1400" dirty="0">
-                <a:solidFill>
-                  <a:srgbClr val="C9D6E2"/>
+              <a:t>.</a:t>
+            </a:r>
+            <a:endParaRPr lang="en-US" sz="1400" dirty="0"/>
+          </a:p>
+        </p:txBody>
+      </p:sp>
+      <p:sp>
+        <p:nvSpPr>
+          <p:cNvPr id="6" name="Text 4"/>
+          <p:cNvSpPr/>
+          <p:nvPr/>
+        </p:nvSpPr>
+        <p:spPr>
+          <a:xfrm>
+            <a:off x="566928" y="4800600"/>
+            <a:ext cx="7315200" cy="292608"/>
+          </a:xfrm>
+          <a:prstGeom prst="rect">
+            <a:avLst/>
+          </a:prstGeom>
+          <a:noFill/>
+          <a:ln/>
+        </p:spPr>
+        <p:txBody>
+          <a:bodyPr wrap="square" lIns="0" tIns="0" rIns="0" bIns="0" rtlCol="0" anchor="ctr"/>
+          <a:lstStyle/>
+          <a:p>
+            <a:pPr marL="0" indent="0">
+              <a:buNone/>
+            </a:pPr>
+            <a:r>
+              <a:rPr lang="en-US" sz="1400" b="1" dirty="0">
+                <a:solidFill>
+                  <a:srgbClr val="FFFFFF"/>
                 </a:solidFill>
                 <a:latin typeface="Calibri" pitchFamily="34" charset="0"/>
                 <a:ea typeface="Calibri" pitchFamily="34" charset="-122"/>
                 <a:cs typeface="Calibri" pitchFamily="34" charset="-120"/>
               </a:rPr>
-              <a:t>.</a:t>
-            </a:r>
-            <a:endParaRPr lang="en-US" sz="1400" dirty="0"/>
-          </a:p>
-        </p:txBody>
-      </p:sp>
-      <p:sp>
-        <p:nvSpPr>
-          <p:cNvPr id="6" name="Text 4"/>
-          <p:cNvSpPr/>
-          <p:nvPr/>
-        </p:nvSpPr>
-        <p:spPr>
-          <a:xfrm>
-            <a:off x="566928" y="4800600"/>
-            <a:ext cx="7315200" cy="292608"/>
-          </a:xfrm>
-          <a:prstGeom prst="rect">
-            <a:avLst/>
-          </a:prstGeom>
-          <a:noFill/>
-          <a:ln/>
-        </p:spPr>
-        <p:txBody>
-          <a:bodyPr wrap="square" lIns="0" tIns="0" rIns="0" bIns="0" rtlCol="0" anchor="ctr"/>
-          <a:lstStyle/>
-          <a:p>
-            <a:pPr indent="0" marL="0">
-              <a:buNone/>
-            </a:pPr>
-            <a:r>
-              <a:rPr lang="en-US" sz="1400" b="1" dirty="0">
+              <a:t>Manoj </a:t>
+            </a:r>
+            <a:r>
+              <a:rPr lang="en-US" sz="1400" b="1" dirty="0" err="1">
                 <a:solidFill>
                   <a:srgbClr val="FFFFFF"/>
                 </a:solidFill>
@@ -4203,11 +4014,8 @@
                 <a:ea typeface="Calibri" pitchFamily="34" charset="-122"/>
                 <a:cs typeface="Calibri" pitchFamily="34" charset="-120"/>
               </a:rPr>
-              <a:t>Manoj Kharkar</a:t>
-            </a:r>
-            <a:pPr indent="0" marL="0">
-              <a:buNone/>
-            </a:pPr>
+              <a:t>Kharkar</a:t>
+            </a:r>
             <a:r>
               <a:rPr lang="en-US" sz="1400" dirty="0">
                 <a:solidFill>
@@ -4217,7 +4025,7 @@
                 <a:ea typeface="Calibri" pitchFamily="34" charset="-122"/>
                 <a:cs typeface="Calibri" pitchFamily="34" charset="-120"/>
               </a:rPr>
-              <a:t>  ·  solo submission</a:t>
+              <a:t> </a:t>
             </a:r>
             <a:endParaRPr lang="en-US" sz="1400" dirty="0"/>
           </a:p>
@@ -4244,7 +4052,7 @@
           <a:bodyPr wrap="square" lIns="0" tIns="0" rIns="0" bIns="0" rtlCol="0" anchor="ctr"/>
           <a:lstStyle/>
           <a:p>
-            <a:pPr indent="0" marL="0">
+            <a:pPr marL="0" indent="0">
               <a:buNone/>
             </a:pPr>
             <a:r>
@@ -4283,7 +4091,7 @@
           <a:bodyPr wrap="square" lIns="0" tIns="0" rIns="0" bIns="0" rtlCol="0" anchor="ctr"/>
           <a:lstStyle/>
           <a:p>
-            <a:pPr indent="0" marL="0">
+            <a:pPr marL="0" indent="0">
               <a:buNone/>
             </a:pPr>
             <a:r>
@@ -4295,7 +4103,7 @@
                 <a:ea typeface="Calibri" pitchFamily="34" charset="-122"/>
                 <a:cs typeface="Calibri" pitchFamily="34" charset="-120"/>
               </a:rPr>
-              <a:t>Round 1 — Idea Submission  ·  08 August 2026</a:t>
+              <a:t>Round 1</a:t>
             </a:r>
             <a:endParaRPr lang="en-US" sz="1200" dirty="0"/>
           </a:p>
@@ -4322,7 +4130,7 @@
           <a:bodyPr wrap="square" lIns="0" tIns="0" rIns="0" bIns="0" rtlCol="0" anchor="ctr"/>
           <a:lstStyle/>
           <a:p>
-            <a:pPr indent="0" marL="0">
+            <a:pPr marL="0" indent="0">
               <a:buNone/>
             </a:pPr>
             <a:r>
@@ -4361,7 +4169,7 @@
           <a:bodyPr wrap="square" lIns="0" tIns="0" rIns="0" bIns="0" rtlCol="0" anchor="ctr"/>
           <a:lstStyle/>
           <a:p>
-            <a:pPr algn="r" indent="0" marL="0">
+            <a:pPr marL="0" indent="0" algn="r">
               <a:buNone/>
             </a:pPr>
             <a:r>
@@ -4395,6 +4203,7 @@
         <a:solidFill>
           <a:srgbClr val="F7F8FA"/>
         </a:solidFill>
+        <a:effectLst/>
       </p:bgPr>
     </p:bg>
     <p:spTree>
@@ -4432,11 +4241,11 @@
           <a:bodyPr wrap="square" lIns="0" tIns="0" rIns="0" bIns="0" rtlCol="0" anchor="ctr"/>
           <a:lstStyle/>
           <a:p>
-            <a:pPr indent="0" marL="0">
-              <a:buNone/>
-            </a:pPr>
-            <a:r>
-              <a:rPr lang="en-US" sz="1050" b="1" spc="160" kern="0" dirty="0">
+            <a:pPr marL="0" indent="0">
+              <a:buNone/>
+            </a:pPr>
+            <a:r>
+              <a:rPr lang="en-US" sz="1050" b="1" kern="0" spc="160" dirty="0">
                 <a:solidFill>
                   <a:srgbClr val="D03B3B"/>
                 </a:solidFill>
@@ -4471,7 +4280,7 @@
           <a:bodyPr wrap="square" lIns="0" tIns="0" rIns="0" bIns="0" rtlCol="0" anchor="t"/>
           <a:lstStyle/>
           <a:p>
-            <a:pPr indent="0" marL="0">
+            <a:pPr marL="0" indent="0">
               <a:buNone/>
             </a:pPr>
             <a:r>
@@ -4505,19 +4314,55 @@
         </p:nvGraphicFramePr>
         <p:xfrm>
           <a:off x="566928" y="1371600"/>
-          <a:ext cx="6766560" cy="914400"/>
+          <a:ext cx="6766560" cy="2621280"/>
         </p:xfrm>
         <a:graphic>
           <a:graphicData uri="http://schemas.openxmlformats.org/drawingml/2006/table">
             <a:tbl>
               <a:tblPr/>
               <a:tblGrid>
-                <a:gridCol w="2148840"/>
-                <a:gridCol w="960120"/>
-                <a:gridCol w="914400"/>
-                <a:gridCol w="868680"/>
-                <a:gridCol w="914400"/>
-                <a:gridCol w="960120"/>
+                <a:gridCol w="2148840">
+                  <a:extLst>
+                    <a:ext uri="{9D8B030D-6E8A-4147-A177-3AD203B41FA5}">
+                      <a16:colId xmlns:a16="http://schemas.microsoft.com/office/drawing/2014/main" val="20000"/>
+                    </a:ext>
+                  </a:extLst>
+                </a:gridCol>
+                <a:gridCol w="960120">
+                  <a:extLst>
+                    <a:ext uri="{9D8B030D-6E8A-4147-A177-3AD203B41FA5}">
+                      <a16:colId xmlns:a16="http://schemas.microsoft.com/office/drawing/2014/main" val="20001"/>
+                    </a:ext>
+                  </a:extLst>
+                </a:gridCol>
+                <a:gridCol w="914400">
+                  <a:extLst>
+                    <a:ext uri="{9D8B030D-6E8A-4147-A177-3AD203B41FA5}">
+                      <a16:colId xmlns:a16="http://schemas.microsoft.com/office/drawing/2014/main" val="20002"/>
+                    </a:ext>
+                  </a:extLst>
+                </a:gridCol>
+                <a:gridCol w="868680">
+                  <a:extLst>
+                    <a:ext uri="{9D8B030D-6E8A-4147-A177-3AD203B41FA5}">
+                      <a16:colId xmlns:a16="http://schemas.microsoft.com/office/drawing/2014/main" val="20003"/>
+                    </a:ext>
+                  </a:extLst>
+                </a:gridCol>
+                <a:gridCol w="914400">
+                  <a:extLst>
+                    <a:ext uri="{9D8B030D-6E8A-4147-A177-3AD203B41FA5}">
+                      <a16:colId xmlns:a16="http://schemas.microsoft.com/office/drawing/2014/main" val="20004"/>
+                    </a:ext>
+                  </a:extLst>
+                </a:gridCol>
+                <a:gridCol w="960120">
+                  <a:extLst>
+                    <a:ext uri="{9D8B030D-6E8A-4147-A177-3AD203B41FA5}">
+                      <a16:colId xmlns:a16="http://schemas.microsoft.com/office/drawing/2014/main" val="20005"/>
+                    </a:ext>
+                  </a:extLst>
+                </a:gridCol>
               </a:tblGrid>
               <a:tr h="274320">
                 <a:tc>
@@ -4525,7 +4370,7 @@
                     <a:bodyPr/>
                     <a:lstStyle/>
                     <a:p>
-                      <a:pPr indent="0" marL="0">
+                      <a:pPr marL="0" indent="0">
                         <a:buNone/>
                       </a:pPr>
                       <a:r>
@@ -4546,7 +4391,7 @@
                       </a:endParaRPr>
                     </a:p>
                   </a:txBody>
-                  <a:tcPr marL="91440" marR="91440" marT="45720" marB="45720" anchor="ctr">
+                  <a:tcPr anchor="ctr">
                     <a:lnL w="12700" cap="flat" cmpd="sng" algn="ctr">
                       <a:solidFill>
                         <a:srgbClr val="DDE3E8"/>
@@ -4593,7 +4438,7 @@
                     <a:bodyPr/>
                     <a:lstStyle/>
                     <a:p>
-                      <a:pPr algn="ctr" indent="0" marL="0">
+                      <a:pPr marL="0" indent="0" algn="ctr">
                         <a:buNone/>
                       </a:pPr>
                       <a:r>
@@ -4614,7 +4459,7 @@
                       </a:endParaRPr>
                     </a:p>
                     <a:p>
-                      <a:pPr algn="ctr" indent="0" marL="0">
+                      <a:pPr marL="0" indent="0" algn="ctr">
                         <a:buNone/>
                       </a:pPr>
                       <a:r>
@@ -4635,7 +4480,7 @@
                       </a:endParaRPr>
                     </a:p>
                   </a:txBody>
-                  <a:tcPr marL="91440" marR="91440" marT="45720" marB="45720" anchor="ctr">
+                  <a:tcPr anchor="ctr">
                     <a:lnL w="12700" cap="flat" cmpd="sng" algn="ctr">
                       <a:solidFill>
                         <a:srgbClr val="DDE3E8"/>
@@ -4682,7 +4527,7 @@
                     <a:bodyPr/>
                     <a:lstStyle/>
                     <a:p>
-                      <a:pPr algn="ctr" indent="0" marL="0">
+                      <a:pPr marL="0" indent="0" algn="ctr">
                         <a:buNone/>
                       </a:pPr>
                       <a:r>
@@ -4703,7 +4548,7 @@
                       </a:endParaRPr>
                     </a:p>
                     <a:p>
-                      <a:pPr algn="ctr" indent="0" marL="0">
+                      <a:pPr marL="0" indent="0" algn="ctr">
                         <a:buNone/>
                       </a:pPr>
                       <a:r>
@@ -4724,7 +4569,7 @@
                       </a:endParaRPr>
                     </a:p>
                   </a:txBody>
-                  <a:tcPr marL="91440" marR="91440" marT="45720" marB="45720" anchor="ctr">
+                  <a:tcPr anchor="ctr">
                     <a:lnL w="12700" cap="flat" cmpd="sng" algn="ctr">
                       <a:solidFill>
                         <a:srgbClr val="DDE3E8"/>
@@ -4771,7 +4616,7 @@
                     <a:bodyPr/>
                     <a:lstStyle/>
                     <a:p>
-                      <a:pPr algn="ctr" indent="0" marL="0">
+                      <a:pPr marL="0" indent="0" algn="ctr">
                         <a:buNone/>
                       </a:pPr>
                       <a:r>
@@ -4792,7 +4637,7 @@
                       </a:endParaRPr>
                     </a:p>
                     <a:p>
-                      <a:pPr algn="ctr" indent="0" marL="0">
+                      <a:pPr marL="0" indent="0" algn="ctr">
                         <a:buNone/>
                       </a:pPr>
                       <a:r>
@@ -4813,7 +4658,7 @@
                       </a:endParaRPr>
                     </a:p>
                   </a:txBody>
-                  <a:tcPr marL="91440" marR="91440" marT="45720" marB="45720" anchor="ctr">
+                  <a:tcPr anchor="ctr">
                     <a:lnL w="12700" cap="flat" cmpd="sng" algn="ctr">
                       <a:solidFill>
                         <a:srgbClr val="DDE3E8"/>
@@ -4860,7 +4705,7 @@
                     <a:bodyPr/>
                     <a:lstStyle/>
                     <a:p>
-                      <a:pPr algn="ctr" indent="0" marL="0">
+                      <a:pPr marL="0" indent="0" algn="ctr">
                         <a:buNone/>
                       </a:pPr>
                       <a:r>
@@ -4881,7 +4726,7 @@
                       </a:endParaRPr>
                     </a:p>
                     <a:p>
-                      <a:pPr algn="ctr" indent="0" marL="0">
+                      <a:pPr marL="0" indent="0" algn="ctr">
                         <a:buNone/>
                       </a:pPr>
                       <a:r>
@@ -4902,7 +4747,7 @@
                       </a:endParaRPr>
                     </a:p>
                   </a:txBody>
-                  <a:tcPr marL="91440" marR="91440" marT="45720" marB="45720" anchor="ctr">
+                  <a:tcPr anchor="ctr">
                     <a:lnL w="12700" cap="flat" cmpd="sng" algn="ctr">
                       <a:solidFill>
                         <a:srgbClr val="DDE3E8"/>
@@ -4949,7 +4794,7 @@
                     <a:bodyPr/>
                     <a:lstStyle/>
                     <a:p>
-                      <a:pPr algn="ctr" indent="0" marL="0">
+                      <a:pPr marL="0" indent="0" algn="ctr">
                         <a:buNone/>
                       </a:pPr>
                       <a:r>
@@ -4970,7 +4815,7 @@
                       </a:endParaRPr>
                     </a:p>
                     <a:p>
-                      <a:pPr algn="ctr" indent="0" marL="0">
+                      <a:pPr marL="0" indent="0" algn="ctr">
                         <a:buNone/>
                       </a:pPr>
                       <a:r>
@@ -4991,7 +4836,7 @@
                       </a:endParaRPr>
                     </a:p>
                   </a:txBody>
-                  <a:tcPr marL="91440" marR="91440" marT="45720" marB="45720" anchor="ctr">
+                  <a:tcPr anchor="ctr">
                     <a:lnL w="12700" cap="flat" cmpd="sng" algn="ctr">
                       <a:solidFill>
                         <a:srgbClr val="DDE3E8"/>
@@ -5033,6 +4878,11 @@
                     </a:solidFill>
                   </a:tcPr>
                 </a:tc>
+                <a:extLst>
+                  <a:ext uri="{0D108BD9-81ED-4DB2-BD59-A6C34878D82A}">
+                    <a16:rowId xmlns:a16="http://schemas.microsoft.com/office/drawing/2014/main" val="10000"/>
+                  </a:ext>
+                </a:extLst>
               </a:tr>
               <a:tr h="274320">
                 <a:tc>
@@ -5040,7 +4890,7 @@
                     <a:bodyPr/>
                     <a:lstStyle/>
                     <a:p>
-                      <a:pPr indent="0" marL="0">
+                      <a:pPr marL="0" indent="0">
                         <a:buNone/>
                       </a:pPr>
                       <a:r>
@@ -5061,7 +4911,7 @@
                       </a:endParaRPr>
                     </a:p>
                   </a:txBody>
-                  <a:tcPr marL="91440" marR="91440" marT="45720" marB="45720" anchor="ctr">
+                  <a:tcPr anchor="ctr">
                     <a:lnL w="12700" cap="flat" cmpd="sng" algn="ctr">
                       <a:solidFill>
                         <a:srgbClr val="DDE3E8"/>
@@ -5108,7 +4958,7 @@
                     <a:bodyPr/>
                     <a:lstStyle/>
                     <a:p>
-                      <a:pPr algn="ctr" indent="0" marL="0">
+                      <a:pPr marL="0" indent="0" algn="ctr">
                         <a:buNone/>
                       </a:pPr>
                       <a:r>
@@ -5129,7 +4979,7 @@
                       </a:endParaRPr>
                     </a:p>
                   </a:txBody>
-                  <a:tcPr marL="91440" marR="91440" marT="45720" marB="45720" anchor="ctr">
+                  <a:tcPr anchor="ctr">
                     <a:lnL w="12700" cap="flat" cmpd="sng" algn="ctr">
                       <a:solidFill>
                         <a:srgbClr val="DDE3E8"/>
@@ -5176,7 +5026,7 @@
                     <a:bodyPr/>
                     <a:lstStyle/>
                     <a:p>
-                      <a:pPr algn="ctr" indent="0" marL="0">
+                      <a:pPr marL="0" indent="0" algn="ctr">
                         <a:buNone/>
                       </a:pPr>
                       <a:r>
@@ -5197,7 +5047,7 @@
                       </a:endParaRPr>
                     </a:p>
                   </a:txBody>
-                  <a:tcPr marL="91440" marR="91440" marT="45720" marB="45720" anchor="ctr">
+                  <a:tcPr anchor="ctr">
                     <a:lnL w="12700" cap="flat" cmpd="sng" algn="ctr">
                       <a:solidFill>
                         <a:srgbClr val="DDE3E8"/>
@@ -5244,7 +5094,7 @@
                     <a:bodyPr/>
                     <a:lstStyle/>
                     <a:p>
-                      <a:pPr algn="ctr" indent="0" marL="0">
+                      <a:pPr marL="0" indent="0" algn="ctr">
                         <a:buNone/>
                       </a:pPr>
                       <a:r>
@@ -5265,7 +5115,7 @@
                       </a:endParaRPr>
                     </a:p>
                   </a:txBody>
-                  <a:tcPr marL="91440" marR="91440" marT="45720" marB="45720" anchor="ctr">
+                  <a:tcPr anchor="ctr">
                     <a:lnL w="12700" cap="flat" cmpd="sng" algn="ctr">
                       <a:solidFill>
                         <a:srgbClr val="DDE3E8"/>
@@ -5312,7 +5162,7 @@
                     <a:bodyPr/>
                     <a:lstStyle/>
                     <a:p>
-                      <a:pPr algn="ctr" indent="0" marL="0">
+                      <a:pPr marL="0" indent="0" algn="ctr">
                         <a:buNone/>
                       </a:pPr>
                       <a:r>
@@ -5333,7 +5183,7 @@
                       </a:endParaRPr>
                     </a:p>
                   </a:txBody>
-                  <a:tcPr marL="91440" marR="91440" marT="45720" marB="45720" anchor="ctr">
+                  <a:tcPr anchor="ctr">
                     <a:lnL w="12700" cap="flat" cmpd="sng" algn="ctr">
                       <a:solidFill>
                         <a:srgbClr val="DDE3E8"/>
@@ -5380,7 +5230,7 @@
                     <a:bodyPr/>
                     <a:lstStyle/>
                     <a:p>
-                      <a:pPr algn="ctr" indent="0" marL="0">
+                      <a:pPr marL="0" indent="0" algn="ctr">
                         <a:buNone/>
                       </a:pPr>
                       <a:r>
@@ -5401,7 +5251,7 @@
                       </a:endParaRPr>
                     </a:p>
                   </a:txBody>
-                  <a:tcPr marL="91440" marR="91440" marT="45720" marB="45720" anchor="ctr">
+                  <a:tcPr anchor="ctr">
                     <a:lnL w="12700" cap="flat" cmpd="sng" algn="ctr">
                       <a:solidFill>
                         <a:srgbClr val="DDE3E8"/>
@@ -5443,6 +5293,11 @@
                     </a:solidFill>
                   </a:tcPr>
                 </a:tc>
+                <a:extLst>
+                  <a:ext uri="{0D108BD9-81ED-4DB2-BD59-A6C34878D82A}">
+                    <a16:rowId xmlns:a16="http://schemas.microsoft.com/office/drawing/2014/main" val="10001"/>
+                  </a:ext>
+                </a:extLst>
               </a:tr>
               <a:tr h="274320">
                 <a:tc>
@@ -5450,7 +5305,7 @@
                     <a:bodyPr/>
                     <a:lstStyle/>
                     <a:p>
-                      <a:pPr indent="0" marL="0">
+                      <a:pPr marL="0" indent="0">
                         <a:buNone/>
                       </a:pPr>
                       <a:r>
@@ -5471,7 +5326,7 @@
                       </a:endParaRPr>
                     </a:p>
                   </a:txBody>
-                  <a:tcPr marL="91440" marR="91440" marT="45720" marB="45720" anchor="ctr">
+                  <a:tcPr anchor="ctr">
                     <a:lnL w="12700" cap="flat" cmpd="sng" algn="ctr">
                       <a:solidFill>
                         <a:srgbClr val="DDE3E8"/>
@@ -5518,7 +5373,7 @@
                     <a:bodyPr/>
                     <a:lstStyle/>
                     <a:p>
-                      <a:pPr algn="ctr" indent="0" marL="0">
+                      <a:pPr marL="0" indent="0" algn="ctr">
                         <a:buNone/>
                       </a:pPr>
                       <a:r>
@@ -5539,7 +5394,7 @@
                       </a:endParaRPr>
                     </a:p>
                   </a:txBody>
-                  <a:tcPr marL="91440" marR="91440" marT="45720" marB="45720" anchor="ctr">
+                  <a:tcPr anchor="ctr">
                     <a:lnL w="12700" cap="flat" cmpd="sng" algn="ctr">
                       <a:solidFill>
                         <a:srgbClr val="DDE3E8"/>
@@ -5586,7 +5441,7 @@
                     <a:bodyPr/>
                     <a:lstStyle/>
                     <a:p>
-                      <a:pPr algn="ctr" indent="0" marL="0">
+                      <a:pPr marL="0" indent="0" algn="ctr">
                         <a:buNone/>
                       </a:pPr>
                       <a:r>
@@ -5607,7 +5462,7 @@
                       </a:endParaRPr>
                     </a:p>
                   </a:txBody>
-                  <a:tcPr marL="91440" marR="91440" marT="45720" marB="45720" anchor="ctr">
+                  <a:tcPr anchor="ctr">
                     <a:lnL w="12700" cap="flat" cmpd="sng" algn="ctr">
                       <a:solidFill>
                         <a:srgbClr val="DDE3E8"/>
@@ -5654,7 +5509,7 @@
                     <a:bodyPr/>
                     <a:lstStyle/>
                     <a:p>
-                      <a:pPr algn="ctr" indent="0" marL="0">
+                      <a:pPr marL="0" indent="0" algn="ctr">
                         <a:buNone/>
                       </a:pPr>
                       <a:r>
@@ -5675,7 +5530,7 @@
                       </a:endParaRPr>
                     </a:p>
                   </a:txBody>
-                  <a:tcPr marL="91440" marR="91440" marT="45720" marB="45720" anchor="ctr">
+                  <a:tcPr anchor="ctr">
                     <a:lnL w="12700" cap="flat" cmpd="sng" algn="ctr">
                       <a:solidFill>
                         <a:srgbClr val="DDE3E8"/>
@@ -5722,7 +5577,7 @@
                     <a:bodyPr/>
                     <a:lstStyle/>
                     <a:p>
-                      <a:pPr algn="ctr" indent="0" marL="0">
+                      <a:pPr marL="0" indent="0" algn="ctr">
                         <a:buNone/>
                       </a:pPr>
                       <a:r>
@@ -5743,7 +5598,7 @@
                       </a:endParaRPr>
                     </a:p>
                   </a:txBody>
-                  <a:tcPr marL="91440" marR="91440" marT="45720" marB="45720" anchor="ctr">
+                  <a:tcPr anchor="ctr">
                     <a:lnL w="12700" cap="flat" cmpd="sng" algn="ctr">
                       <a:solidFill>
                         <a:srgbClr val="DDE3E8"/>
@@ -5790,7 +5645,7 @@
                     <a:bodyPr/>
                     <a:lstStyle/>
                     <a:p>
-                      <a:pPr algn="ctr" indent="0" marL="0">
+                      <a:pPr marL="0" indent="0" algn="ctr">
                         <a:buNone/>
                       </a:pPr>
                       <a:r>
@@ -5811,7 +5666,7 @@
                       </a:endParaRPr>
                     </a:p>
                   </a:txBody>
-                  <a:tcPr marL="91440" marR="91440" marT="45720" marB="45720" anchor="ctr">
+                  <a:tcPr anchor="ctr">
                     <a:lnL w="12700" cap="flat" cmpd="sng" algn="ctr">
                       <a:solidFill>
                         <a:srgbClr val="DDE3E8"/>
@@ -5853,6 +5708,11 @@
                     </a:solidFill>
                   </a:tcPr>
                 </a:tc>
+                <a:extLst>
+                  <a:ext uri="{0D108BD9-81ED-4DB2-BD59-A6C34878D82A}">
+                    <a16:rowId xmlns:a16="http://schemas.microsoft.com/office/drawing/2014/main" val="10002"/>
+                  </a:ext>
+                </a:extLst>
               </a:tr>
               <a:tr h="274320">
                 <a:tc>
@@ -5860,7 +5720,7 @@
                     <a:bodyPr/>
                     <a:lstStyle/>
                     <a:p>
-                      <a:pPr indent="0" marL="0">
+                      <a:pPr marL="0" indent="0">
                         <a:buNone/>
                       </a:pPr>
                       <a:r>
@@ -5881,7 +5741,7 @@
                       </a:endParaRPr>
                     </a:p>
                   </a:txBody>
-                  <a:tcPr marL="91440" marR="91440" marT="45720" marB="45720" anchor="ctr">
+                  <a:tcPr anchor="ctr">
                     <a:lnL w="12700" cap="flat" cmpd="sng" algn="ctr">
                       <a:solidFill>
                         <a:srgbClr val="DDE3E8"/>
@@ -5928,7 +5788,7 @@
                     <a:bodyPr/>
                     <a:lstStyle/>
                     <a:p>
-                      <a:pPr algn="ctr" indent="0" marL="0">
+                      <a:pPr marL="0" indent="0" algn="ctr">
                         <a:buNone/>
                       </a:pPr>
                       <a:r>
@@ -5949,7 +5809,7 @@
                       </a:endParaRPr>
                     </a:p>
                   </a:txBody>
-                  <a:tcPr marL="91440" marR="91440" marT="45720" marB="45720" anchor="ctr">
+                  <a:tcPr anchor="ctr">
                     <a:lnL w="12700" cap="flat" cmpd="sng" algn="ctr">
                       <a:solidFill>
                         <a:srgbClr val="DDE3E8"/>
@@ -5996,7 +5856,7 @@
                     <a:bodyPr/>
                     <a:lstStyle/>
                     <a:p>
-                      <a:pPr algn="ctr" indent="0" marL="0">
+                      <a:pPr marL="0" indent="0" algn="ctr">
                         <a:buNone/>
                       </a:pPr>
                       <a:r>
@@ -6017,7 +5877,7 @@
                       </a:endParaRPr>
                     </a:p>
                   </a:txBody>
-                  <a:tcPr marL="91440" marR="91440" marT="45720" marB="45720" anchor="ctr">
+                  <a:tcPr anchor="ctr">
                     <a:lnL w="12700" cap="flat" cmpd="sng" algn="ctr">
                       <a:solidFill>
                         <a:srgbClr val="DDE3E8"/>
@@ -6064,7 +5924,7 @@
                     <a:bodyPr/>
                     <a:lstStyle/>
                     <a:p>
-                      <a:pPr algn="ctr" indent="0" marL="0">
+                      <a:pPr marL="0" indent="0" algn="ctr">
                         <a:buNone/>
                       </a:pPr>
                       <a:r>
@@ -6085,7 +5945,7 @@
                       </a:endParaRPr>
                     </a:p>
                   </a:txBody>
-                  <a:tcPr marL="91440" marR="91440" marT="45720" marB="45720" anchor="ctr">
+                  <a:tcPr anchor="ctr">
                     <a:lnL w="12700" cap="flat" cmpd="sng" algn="ctr">
                       <a:solidFill>
                         <a:srgbClr val="DDE3E8"/>
@@ -6132,7 +5992,7 @@
                     <a:bodyPr/>
                     <a:lstStyle/>
                     <a:p>
-                      <a:pPr algn="ctr" indent="0" marL="0">
+                      <a:pPr marL="0" indent="0" algn="ctr">
                         <a:buNone/>
                       </a:pPr>
                       <a:r>
@@ -6153,7 +6013,7 @@
                       </a:endParaRPr>
                     </a:p>
                   </a:txBody>
-                  <a:tcPr marL="91440" marR="91440" marT="45720" marB="45720" anchor="ctr">
+                  <a:tcPr anchor="ctr">
                     <a:lnL w="12700" cap="flat" cmpd="sng" algn="ctr">
                       <a:solidFill>
                         <a:srgbClr val="DDE3E8"/>
@@ -6200,7 +6060,7 @@
                     <a:bodyPr/>
                     <a:lstStyle/>
                     <a:p>
-                      <a:pPr algn="ctr" indent="0" marL="0">
+                      <a:pPr marL="0" indent="0" algn="ctr">
                         <a:buNone/>
                       </a:pPr>
                       <a:r>
@@ -6221,7 +6081,7 @@
                       </a:endParaRPr>
                     </a:p>
                   </a:txBody>
-                  <a:tcPr marL="91440" marR="91440" marT="45720" marB="45720" anchor="ctr">
+                  <a:tcPr anchor="ctr">
                     <a:lnL w="12700" cap="flat" cmpd="sng" algn="ctr">
                       <a:solidFill>
                         <a:srgbClr val="DDE3E8"/>
@@ -6263,6 +6123,11 @@
                     </a:solidFill>
                   </a:tcPr>
                 </a:tc>
+                <a:extLst>
+                  <a:ext uri="{0D108BD9-81ED-4DB2-BD59-A6C34878D82A}">
+                    <a16:rowId xmlns:a16="http://schemas.microsoft.com/office/drawing/2014/main" val="10003"/>
+                  </a:ext>
+                </a:extLst>
               </a:tr>
               <a:tr h="274320">
                 <a:tc>
@@ -6270,7 +6135,7 @@
                     <a:bodyPr/>
                     <a:lstStyle/>
                     <a:p>
-                      <a:pPr indent="0" marL="0">
+                      <a:pPr marL="0" indent="0">
                         <a:buNone/>
                       </a:pPr>
                       <a:r>
@@ -6291,7 +6156,7 @@
                       </a:endParaRPr>
                     </a:p>
                   </a:txBody>
-                  <a:tcPr marL="91440" marR="91440" marT="45720" marB="45720" anchor="ctr">
+                  <a:tcPr anchor="ctr">
                     <a:lnL w="12700" cap="flat" cmpd="sng" algn="ctr">
                       <a:solidFill>
                         <a:srgbClr val="DDE3E8"/>
@@ -6338,7 +6203,7 @@
                     <a:bodyPr/>
                     <a:lstStyle/>
                     <a:p>
-                      <a:pPr algn="ctr" indent="0" marL="0">
+                      <a:pPr marL="0" indent="0" algn="ctr">
                         <a:buNone/>
                       </a:pPr>
                       <a:r>
@@ -6359,7 +6224,7 @@
                       </a:endParaRPr>
                     </a:p>
                   </a:txBody>
-                  <a:tcPr marL="91440" marR="91440" marT="45720" marB="45720" anchor="ctr">
+                  <a:tcPr anchor="ctr">
                     <a:lnL w="12700" cap="flat" cmpd="sng" algn="ctr">
                       <a:solidFill>
                         <a:srgbClr val="DDE3E8"/>
@@ -6406,7 +6271,7 @@
                     <a:bodyPr/>
                     <a:lstStyle/>
                     <a:p>
-                      <a:pPr algn="ctr" indent="0" marL="0">
+                      <a:pPr marL="0" indent="0" algn="ctr">
                         <a:buNone/>
                       </a:pPr>
                       <a:r>
@@ -6427,7 +6292,7 @@
                       </a:endParaRPr>
                     </a:p>
                   </a:txBody>
-                  <a:tcPr marL="91440" marR="91440" marT="45720" marB="45720" anchor="ctr">
+                  <a:tcPr anchor="ctr">
                     <a:lnL w="12700" cap="flat" cmpd="sng" algn="ctr">
                       <a:solidFill>
                         <a:srgbClr val="DDE3E8"/>
@@ -6474,7 +6339,7 @@
                     <a:bodyPr/>
                     <a:lstStyle/>
                     <a:p>
-                      <a:pPr algn="ctr" indent="0" marL="0">
+                      <a:pPr marL="0" indent="0" algn="ctr">
                         <a:buNone/>
                       </a:pPr>
                       <a:r>
@@ -6495,7 +6360,7 @@
                       </a:endParaRPr>
                     </a:p>
                   </a:txBody>
-                  <a:tcPr marL="91440" marR="91440" marT="45720" marB="45720" anchor="ctr">
+                  <a:tcPr anchor="ctr">
                     <a:lnL w="12700" cap="flat" cmpd="sng" algn="ctr">
                       <a:solidFill>
                         <a:srgbClr val="DDE3E8"/>
@@ -6542,7 +6407,7 @@
                     <a:bodyPr/>
                     <a:lstStyle/>
                     <a:p>
-                      <a:pPr algn="ctr" indent="0" marL="0">
+                      <a:pPr marL="0" indent="0" algn="ctr">
                         <a:buNone/>
                       </a:pPr>
                       <a:r>
@@ -6563,7 +6428,7 @@
                       </a:endParaRPr>
                     </a:p>
                   </a:txBody>
-                  <a:tcPr marL="91440" marR="91440" marT="45720" marB="45720" anchor="ctr">
+                  <a:tcPr anchor="ctr">
                     <a:lnL w="12700" cap="flat" cmpd="sng" algn="ctr">
                       <a:solidFill>
                         <a:srgbClr val="DDE3E8"/>
@@ -6610,7 +6475,7 @@
                     <a:bodyPr/>
                     <a:lstStyle/>
                     <a:p>
-                      <a:pPr algn="ctr" indent="0" marL="0">
+                      <a:pPr marL="0" indent="0" algn="ctr">
                         <a:buNone/>
                       </a:pPr>
                       <a:r>
@@ -6631,7 +6496,7 @@
                       </a:endParaRPr>
                     </a:p>
                   </a:txBody>
-                  <a:tcPr marL="91440" marR="91440" marT="45720" marB="45720" anchor="ctr">
+                  <a:tcPr anchor="ctr">
                     <a:lnL w="12700" cap="flat" cmpd="sng" algn="ctr">
                       <a:solidFill>
                         <a:srgbClr val="DDE3E8"/>
@@ -6673,6 +6538,11 @@
                     </a:solidFill>
                   </a:tcPr>
                 </a:tc>
+                <a:extLst>
+                  <a:ext uri="{0D108BD9-81ED-4DB2-BD59-A6C34878D82A}">
+                    <a16:rowId xmlns:a16="http://schemas.microsoft.com/office/drawing/2014/main" val="10004"/>
+                  </a:ext>
+                </a:extLst>
               </a:tr>
               <a:tr h="274320">
                 <a:tc>
@@ -6680,7 +6550,7 @@
                     <a:bodyPr/>
                     <a:lstStyle/>
                     <a:p>
-                      <a:pPr indent="0" marL="0">
+                      <a:pPr marL="0" indent="0">
                         <a:buNone/>
                       </a:pPr>
                       <a:r>
@@ -6701,7 +6571,7 @@
                       </a:endParaRPr>
                     </a:p>
                   </a:txBody>
-                  <a:tcPr marL="91440" marR="91440" marT="45720" marB="45720" anchor="ctr">
+                  <a:tcPr anchor="ctr">
                     <a:lnL w="12700" cap="flat" cmpd="sng" algn="ctr">
                       <a:solidFill>
                         <a:srgbClr val="DDE3E8"/>
@@ -6748,7 +6618,7 @@
                     <a:bodyPr/>
                     <a:lstStyle/>
                     <a:p>
-                      <a:pPr algn="ctr" indent="0" marL="0">
+                      <a:pPr marL="0" indent="0" algn="ctr">
                         <a:buNone/>
                       </a:pPr>
                       <a:r>
@@ -6769,7 +6639,7 @@
                       </a:endParaRPr>
                     </a:p>
                   </a:txBody>
-                  <a:tcPr marL="91440" marR="91440" marT="45720" marB="45720" anchor="ctr">
+                  <a:tcPr anchor="ctr">
                     <a:lnL w="12700" cap="flat" cmpd="sng" algn="ctr">
                       <a:solidFill>
                         <a:srgbClr val="DDE3E8"/>
@@ -6816,7 +6686,7 @@
                     <a:bodyPr/>
                     <a:lstStyle/>
                     <a:p>
-                      <a:pPr algn="ctr" indent="0" marL="0">
+                      <a:pPr marL="0" indent="0" algn="ctr">
                         <a:buNone/>
                       </a:pPr>
                       <a:r>
@@ -6837,7 +6707,7 @@
                       </a:endParaRPr>
                     </a:p>
                   </a:txBody>
-                  <a:tcPr marL="91440" marR="91440" marT="45720" marB="45720" anchor="ctr">
+                  <a:tcPr anchor="ctr">
                     <a:lnL w="12700" cap="flat" cmpd="sng" algn="ctr">
                       <a:solidFill>
                         <a:srgbClr val="DDE3E8"/>
@@ -6884,7 +6754,7 @@
                     <a:bodyPr/>
                     <a:lstStyle/>
                     <a:p>
-                      <a:pPr algn="ctr" indent="0" marL="0">
+                      <a:pPr marL="0" indent="0" algn="ctr">
                         <a:buNone/>
                       </a:pPr>
                       <a:r>
@@ -6905,7 +6775,7 @@
                       </a:endParaRPr>
                     </a:p>
                   </a:txBody>
-                  <a:tcPr marL="91440" marR="91440" marT="45720" marB="45720" anchor="ctr">
+                  <a:tcPr anchor="ctr">
                     <a:lnL w="12700" cap="flat" cmpd="sng" algn="ctr">
                       <a:solidFill>
                         <a:srgbClr val="DDE3E8"/>
@@ -6952,7 +6822,7 @@
                     <a:bodyPr/>
                     <a:lstStyle/>
                     <a:p>
-                      <a:pPr algn="ctr" indent="0" marL="0">
+                      <a:pPr marL="0" indent="0" algn="ctr">
                         <a:buNone/>
                       </a:pPr>
                       <a:r>
@@ -6973,7 +6843,7 @@
                       </a:endParaRPr>
                     </a:p>
                   </a:txBody>
-                  <a:tcPr marL="91440" marR="91440" marT="45720" marB="45720" anchor="ctr">
+                  <a:tcPr anchor="ctr">
                     <a:lnL w="12700" cap="flat" cmpd="sng" algn="ctr">
                       <a:solidFill>
                         <a:srgbClr val="DDE3E8"/>
@@ -7020,7 +6890,7 @@
                     <a:bodyPr/>
                     <a:lstStyle/>
                     <a:p>
-                      <a:pPr algn="ctr" indent="0" marL="0">
+                      <a:pPr marL="0" indent="0" algn="ctr">
                         <a:buNone/>
                       </a:pPr>
                       <a:r>
@@ -7041,7 +6911,7 @@
                       </a:endParaRPr>
                     </a:p>
                   </a:txBody>
-                  <a:tcPr marL="91440" marR="91440" marT="45720" marB="45720" anchor="ctr">
+                  <a:tcPr anchor="ctr">
                     <a:lnL w="12700" cap="flat" cmpd="sng" algn="ctr">
                       <a:solidFill>
                         <a:srgbClr val="DDE3E8"/>
@@ -7083,6 +6953,11 @@
                     </a:solidFill>
                   </a:tcPr>
                 </a:tc>
+                <a:extLst>
+                  <a:ext uri="{0D108BD9-81ED-4DB2-BD59-A6C34878D82A}">
+                    <a16:rowId xmlns:a16="http://schemas.microsoft.com/office/drawing/2014/main" val="10005"/>
+                  </a:ext>
+                </a:extLst>
               </a:tr>
               <a:tr h="274320">
                 <a:tc>
@@ -7090,7 +6965,7 @@
                     <a:bodyPr/>
                     <a:lstStyle/>
                     <a:p>
-                      <a:pPr indent="0" marL="0">
+                      <a:pPr marL="0" indent="0">
                         <a:buNone/>
                       </a:pPr>
                       <a:r>
@@ -7111,7 +6986,7 @@
                       </a:endParaRPr>
                     </a:p>
                   </a:txBody>
-                  <a:tcPr marL="91440" marR="91440" marT="45720" marB="45720" anchor="ctr">
+                  <a:tcPr anchor="ctr">
                     <a:lnL w="12700" cap="flat" cmpd="sng" algn="ctr">
                       <a:solidFill>
                         <a:srgbClr val="DDE3E8"/>
@@ -7158,7 +7033,7 @@
                     <a:bodyPr/>
                     <a:lstStyle/>
                     <a:p>
-                      <a:pPr algn="ctr" indent="0" marL="0">
+                      <a:pPr marL="0" indent="0" algn="ctr">
                         <a:buNone/>
                       </a:pPr>
                       <a:r>
@@ -7179,7 +7054,7 @@
                       </a:endParaRPr>
                     </a:p>
                   </a:txBody>
-                  <a:tcPr marL="91440" marR="91440" marT="45720" marB="45720" anchor="ctr">
+                  <a:tcPr anchor="ctr">
                     <a:lnL w="12700" cap="flat" cmpd="sng" algn="ctr">
                       <a:solidFill>
                         <a:srgbClr val="DDE3E8"/>
@@ -7226,7 +7101,7 @@
                     <a:bodyPr/>
                     <a:lstStyle/>
                     <a:p>
-                      <a:pPr algn="ctr" indent="0" marL="0">
+                      <a:pPr marL="0" indent="0" algn="ctr">
                         <a:buNone/>
                       </a:pPr>
                       <a:r>
@@ -7247,7 +7122,7 @@
                       </a:endParaRPr>
                     </a:p>
                   </a:txBody>
-                  <a:tcPr marL="91440" marR="91440" marT="45720" marB="45720" anchor="ctr">
+                  <a:tcPr anchor="ctr">
                     <a:lnL w="12700" cap="flat" cmpd="sng" algn="ctr">
                       <a:solidFill>
                         <a:srgbClr val="DDE3E8"/>
@@ -7294,7 +7169,7 @@
                     <a:bodyPr/>
                     <a:lstStyle/>
                     <a:p>
-                      <a:pPr algn="ctr" indent="0" marL="0">
+                      <a:pPr marL="0" indent="0" algn="ctr">
                         <a:buNone/>
                       </a:pPr>
                       <a:r>
@@ -7315,7 +7190,7 @@
                       </a:endParaRPr>
                     </a:p>
                   </a:txBody>
-                  <a:tcPr marL="91440" marR="91440" marT="45720" marB="45720" anchor="ctr">
+                  <a:tcPr anchor="ctr">
                     <a:lnL w="12700" cap="flat" cmpd="sng" algn="ctr">
                       <a:solidFill>
                         <a:srgbClr val="DDE3E8"/>
@@ -7362,7 +7237,7 @@
                     <a:bodyPr/>
                     <a:lstStyle/>
                     <a:p>
-                      <a:pPr algn="ctr" indent="0" marL="0">
+                      <a:pPr marL="0" indent="0" algn="ctr">
                         <a:buNone/>
                       </a:pPr>
                       <a:r>
@@ -7383,7 +7258,7 @@
                       </a:endParaRPr>
                     </a:p>
                   </a:txBody>
-                  <a:tcPr marL="91440" marR="91440" marT="45720" marB="45720" anchor="ctr">
+                  <a:tcPr anchor="ctr">
                     <a:lnL w="12700" cap="flat" cmpd="sng" algn="ctr">
                       <a:solidFill>
                         <a:srgbClr val="DDE3E8"/>
@@ -7430,7 +7305,7 @@
                     <a:bodyPr/>
                     <a:lstStyle/>
                     <a:p>
-                      <a:pPr algn="ctr" indent="0" marL="0">
+                      <a:pPr marL="0" indent="0" algn="ctr">
                         <a:buNone/>
                       </a:pPr>
                       <a:r>
@@ -7451,7 +7326,7 @@
                       </a:endParaRPr>
                     </a:p>
                   </a:txBody>
-                  <a:tcPr marL="91440" marR="91440" marT="45720" marB="45720" anchor="ctr">
+                  <a:tcPr anchor="ctr">
                     <a:lnL w="12700" cap="flat" cmpd="sng" algn="ctr">
                       <a:solidFill>
                         <a:srgbClr val="DDE3E8"/>
@@ -7493,6 +7368,11 @@
                     </a:solidFill>
                   </a:tcPr>
                 </a:tc>
+                <a:extLst>
+                  <a:ext uri="{0D108BD9-81ED-4DB2-BD59-A6C34878D82A}">
+                    <a16:rowId xmlns:a16="http://schemas.microsoft.com/office/drawing/2014/main" val="10006"/>
+                  </a:ext>
+                </a:extLst>
               </a:tr>
               <a:tr h="274320">
                 <a:tc>
@@ -7500,7 +7380,7 @@
                     <a:bodyPr/>
                     <a:lstStyle/>
                     <a:p>
-                      <a:pPr indent="0" marL="0">
+                      <a:pPr marL="0" indent="0">
                         <a:buNone/>
                       </a:pPr>
                       <a:r>
@@ -7521,7 +7401,7 @@
                       </a:endParaRPr>
                     </a:p>
                   </a:txBody>
-                  <a:tcPr marL="91440" marR="91440" marT="45720" marB="45720" anchor="ctr">
+                  <a:tcPr anchor="ctr">
                     <a:lnL w="12700" cap="flat" cmpd="sng" algn="ctr">
                       <a:solidFill>
                         <a:srgbClr val="DDE3E8"/>
@@ -7568,7 +7448,7 @@
                     <a:bodyPr/>
                     <a:lstStyle/>
                     <a:p>
-                      <a:pPr algn="ctr" indent="0" marL="0">
+                      <a:pPr marL="0" indent="0" algn="ctr">
                         <a:buNone/>
                       </a:pPr>
                       <a:r>
@@ -7589,7 +7469,7 @@
                       </a:endParaRPr>
                     </a:p>
                   </a:txBody>
-                  <a:tcPr marL="91440" marR="91440" marT="45720" marB="45720" anchor="ctr">
+                  <a:tcPr anchor="ctr">
                     <a:lnL w="12700" cap="flat" cmpd="sng" algn="ctr">
                       <a:solidFill>
                         <a:srgbClr val="DDE3E8"/>
@@ -7636,7 +7516,7 @@
                     <a:bodyPr/>
                     <a:lstStyle/>
                     <a:p>
-                      <a:pPr algn="ctr" indent="0" marL="0">
+                      <a:pPr marL="0" indent="0" algn="ctr">
                         <a:buNone/>
                       </a:pPr>
                       <a:r>
@@ -7657,7 +7537,7 @@
                       </a:endParaRPr>
                     </a:p>
                   </a:txBody>
-                  <a:tcPr marL="91440" marR="91440" marT="45720" marB="45720" anchor="ctr">
+                  <a:tcPr anchor="ctr">
                     <a:lnL w="12700" cap="flat" cmpd="sng" algn="ctr">
                       <a:solidFill>
                         <a:srgbClr val="DDE3E8"/>
@@ -7704,7 +7584,7 @@
                     <a:bodyPr/>
                     <a:lstStyle/>
                     <a:p>
-                      <a:pPr algn="ctr" indent="0" marL="0">
+                      <a:pPr marL="0" indent="0" algn="ctr">
                         <a:buNone/>
                       </a:pPr>
                       <a:r>
@@ -7725,7 +7605,7 @@
                       </a:endParaRPr>
                     </a:p>
                   </a:txBody>
-                  <a:tcPr marL="91440" marR="91440" marT="45720" marB="45720" anchor="ctr">
+                  <a:tcPr anchor="ctr">
                     <a:lnL w="12700" cap="flat" cmpd="sng" algn="ctr">
                       <a:solidFill>
                         <a:srgbClr val="DDE3E8"/>
@@ -7772,7 +7652,7 @@
                     <a:bodyPr/>
                     <a:lstStyle/>
                     <a:p>
-                      <a:pPr algn="ctr" indent="0" marL="0">
+                      <a:pPr marL="0" indent="0" algn="ctr">
                         <a:buNone/>
                       </a:pPr>
                       <a:r>
@@ -7793,7 +7673,7 @@
                       </a:endParaRPr>
                     </a:p>
                   </a:txBody>
-                  <a:tcPr marL="91440" marR="91440" marT="45720" marB="45720" anchor="ctr">
+                  <a:tcPr anchor="ctr">
                     <a:lnL w="12700" cap="flat" cmpd="sng" algn="ctr">
                       <a:solidFill>
                         <a:srgbClr val="DDE3E8"/>
@@ -7840,7 +7720,7 @@
                     <a:bodyPr/>
                     <a:lstStyle/>
                     <a:p>
-                      <a:pPr algn="ctr" indent="0" marL="0">
+                      <a:pPr marL="0" indent="0" algn="ctr">
                         <a:buNone/>
                       </a:pPr>
                       <a:r>
@@ -7861,7 +7741,7 @@
                       </a:endParaRPr>
                     </a:p>
                   </a:txBody>
-                  <a:tcPr marL="91440" marR="91440" marT="45720" marB="45720" anchor="ctr">
+                  <a:tcPr anchor="ctr">
                     <a:lnL w="12700" cap="flat" cmpd="sng" algn="ctr">
                       <a:solidFill>
                         <a:srgbClr val="DDE3E8"/>
@@ -7903,6 +7783,11 @@
                     </a:solidFill>
                   </a:tcPr>
                 </a:tc>
+                <a:extLst>
+                  <a:ext uri="{0D108BD9-81ED-4DB2-BD59-A6C34878D82A}">
+                    <a16:rowId xmlns:a16="http://schemas.microsoft.com/office/drawing/2014/main" val="10007"/>
+                  </a:ext>
+                </a:extLst>
               </a:tr>
               <a:tr h="274320">
                 <a:tc>
@@ -7910,7 +7795,7 @@
                     <a:bodyPr/>
                     <a:lstStyle/>
                     <a:p>
-                      <a:pPr indent="0" marL="0">
+                      <a:pPr marL="0" indent="0">
                         <a:buNone/>
                       </a:pPr>
                       <a:r>
@@ -7931,7 +7816,7 @@
                       </a:endParaRPr>
                     </a:p>
                   </a:txBody>
-                  <a:tcPr marL="91440" marR="91440" marT="45720" marB="45720" anchor="ctr">
+                  <a:tcPr anchor="ctr">
                     <a:lnL w="12700" cap="flat" cmpd="sng" algn="ctr">
                       <a:solidFill>
                         <a:srgbClr val="DDE3E8"/>
@@ -7978,7 +7863,7 @@
                     <a:bodyPr/>
                     <a:lstStyle/>
                     <a:p>
-                      <a:pPr algn="ctr" indent="0" marL="0">
+                      <a:pPr marL="0" indent="0" algn="ctr">
                         <a:buNone/>
                       </a:pPr>
                       <a:r>
@@ -7999,7 +7884,7 @@
                       </a:endParaRPr>
                     </a:p>
                   </a:txBody>
-                  <a:tcPr marL="91440" marR="91440" marT="45720" marB="45720" anchor="ctr">
+                  <a:tcPr anchor="ctr">
                     <a:lnL w="12700" cap="flat" cmpd="sng" algn="ctr">
                       <a:solidFill>
                         <a:srgbClr val="DDE3E8"/>
@@ -8046,7 +7931,7 @@
                     <a:bodyPr/>
                     <a:lstStyle/>
                     <a:p>
-                      <a:pPr algn="ctr" indent="0" marL="0">
+                      <a:pPr marL="0" indent="0" algn="ctr">
                         <a:buNone/>
                       </a:pPr>
                       <a:r>
@@ -8067,7 +7952,7 @@
                       </a:endParaRPr>
                     </a:p>
                   </a:txBody>
-                  <a:tcPr marL="91440" marR="91440" marT="45720" marB="45720" anchor="ctr">
+                  <a:tcPr anchor="ctr">
                     <a:lnL w="12700" cap="flat" cmpd="sng" algn="ctr">
                       <a:solidFill>
                         <a:srgbClr val="DDE3E8"/>
@@ -8114,7 +7999,7 @@
                     <a:bodyPr/>
                     <a:lstStyle/>
                     <a:p>
-                      <a:pPr algn="ctr" indent="0" marL="0">
+                      <a:pPr marL="0" indent="0" algn="ctr">
                         <a:buNone/>
                       </a:pPr>
                       <a:r>
@@ -8135,7 +8020,7 @@
                       </a:endParaRPr>
                     </a:p>
                   </a:txBody>
-                  <a:tcPr marL="91440" marR="91440" marT="45720" marB="45720" anchor="ctr">
+                  <a:tcPr anchor="ctr">
                     <a:lnL w="12700" cap="flat" cmpd="sng" algn="ctr">
                       <a:solidFill>
                         <a:srgbClr val="DDE3E8"/>
@@ -8182,7 +8067,7 @@
                     <a:bodyPr/>
                     <a:lstStyle/>
                     <a:p>
-                      <a:pPr algn="ctr" indent="0" marL="0">
+                      <a:pPr marL="0" indent="0" algn="ctr">
                         <a:buNone/>
                       </a:pPr>
                       <a:r>
@@ -8203,7 +8088,7 @@
                       </a:endParaRPr>
                     </a:p>
                   </a:txBody>
-                  <a:tcPr marL="91440" marR="91440" marT="45720" marB="45720" anchor="ctr">
+                  <a:tcPr anchor="ctr">
                     <a:lnL w="12700" cap="flat" cmpd="sng" algn="ctr">
                       <a:solidFill>
                         <a:srgbClr val="DDE3E8"/>
@@ -8250,7 +8135,7 @@
                     <a:bodyPr/>
                     <a:lstStyle/>
                     <a:p>
-                      <a:pPr algn="ctr" indent="0" marL="0">
+                      <a:pPr marL="0" indent="0" algn="ctr">
                         <a:buNone/>
                       </a:pPr>
                       <a:r>
@@ -8271,7 +8156,7 @@
                       </a:endParaRPr>
                     </a:p>
                   </a:txBody>
-                  <a:tcPr marL="91440" marR="91440" marT="45720" marB="45720" anchor="ctr">
+                  <a:tcPr anchor="ctr">
                     <a:lnL w="12700" cap="flat" cmpd="sng" algn="ctr">
                       <a:solidFill>
                         <a:srgbClr val="DDE3E8"/>
@@ -8313,6 +8198,11 @@
                     </a:solidFill>
                   </a:tcPr>
                 </a:tc>
+                <a:extLst>
+                  <a:ext uri="{0D108BD9-81ED-4DB2-BD59-A6C34878D82A}">
+                    <a16:rowId xmlns:a16="http://schemas.microsoft.com/office/drawing/2014/main" val="10008"/>
+                  </a:ext>
+                </a:extLst>
               </a:tr>
             </a:tbl>
           </a:graphicData>
@@ -8339,7 +8229,7 @@
           <a:bodyPr wrap="square" lIns="0" tIns="0" rIns="0" bIns="0" rtlCol="0" anchor="ctr"/>
           <a:lstStyle/>
           <a:p>
-            <a:pPr indent="0" marL="0">
+            <a:pPr marL="0" indent="0">
               <a:buNone/>
             </a:pPr>
             <a:r>
@@ -8403,7 +8293,7 @@
           <a:bodyPr wrap="square" lIns="0" tIns="0" rIns="0" bIns="0" rtlCol="0" anchor="ctr"/>
           <a:lstStyle/>
           <a:p>
-            <a:pPr algn="ctr" indent="0" marL="0">
+            <a:pPr marL="0" indent="0" algn="ctr">
               <a:buNone/>
             </a:pPr>
             <a:r>
@@ -8442,7 +8332,7 @@
           <a:bodyPr wrap="square" lIns="0" tIns="0" rIns="0" bIns="0" rtlCol="0" anchor="ctr"/>
           <a:lstStyle/>
           <a:p>
-            <a:pPr indent="0" marL="0">
+            <a:pPr marL="0" indent="0">
               <a:buNone/>
             </a:pPr>
             <a:r>
@@ -8481,7 +8371,7 @@
           <a:bodyPr wrap="square" lIns="0" tIns="0" rIns="0" bIns="0" rtlCol="0" anchor="t"/>
           <a:lstStyle/>
           <a:p>
-            <a:pPr indent="0" marL="0">
+            <a:pPr marL="0" indent="0">
               <a:lnSpc>
                 <a:spcPts val="1400"/>
               </a:lnSpc>
@@ -8529,7 +8419,7 @@
       </p:sp>
       <p:sp>
         <p:nvSpPr>
-          <p:cNvPr id="11" name="Text 8"/>
+          <p:cNvPr id="4" name="Text 8"/>
           <p:cNvSpPr/>
           <p:nvPr/>
         </p:nvSpPr>
@@ -8548,7 +8438,7 @@
           <a:bodyPr wrap="square" lIns="0" tIns="0" rIns="0" bIns="0" rtlCol="0" anchor="ctr"/>
           <a:lstStyle/>
           <a:p>
-            <a:pPr algn="ctr" indent="0" marL="0">
+            <a:pPr marL="0" indent="0" algn="ctr">
               <a:buNone/>
             </a:pPr>
             <a:r>
@@ -8587,7 +8477,7 @@
           <a:bodyPr wrap="square" lIns="0" tIns="0" rIns="0" bIns="0" rtlCol="0" anchor="ctr"/>
           <a:lstStyle/>
           <a:p>
-            <a:pPr indent="0" marL="0">
+            <a:pPr marL="0" indent="0">
               <a:buNone/>
             </a:pPr>
             <a:r>
@@ -8626,7 +8516,7 @@
           <a:bodyPr wrap="square" lIns="0" tIns="0" rIns="0" bIns="0" rtlCol="0" anchor="t"/>
           <a:lstStyle/>
           <a:p>
-            <a:pPr indent="0" marL="0">
+            <a:pPr marL="0" indent="0">
               <a:lnSpc>
                 <a:spcPts val="1400"/>
               </a:lnSpc>
@@ -8693,7 +8583,7 @@
           <a:bodyPr wrap="square" lIns="0" tIns="0" rIns="0" bIns="0" rtlCol="0" anchor="ctr"/>
           <a:lstStyle/>
           <a:p>
-            <a:pPr algn="ctr" indent="0" marL="0">
+            <a:pPr marL="0" indent="0" algn="ctr">
               <a:buNone/>
             </a:pPr>
             <a:r>
@@ -8732,7 +8622,7 @@
           <a:bodyPr wrap="square" lIns="0" tIns="0" rIns="0" bIns="0" rtlCol="0" anchor="ctr"/>
           <a:lstStyle/>
           <a:p>
-            <a:pPr indent="0" marL="0">
+            <a:pPr marL="0" indent="0">
               <a:buNone/>
             </a:pPr>
             <a:r>
@@ -8771,7 +8661,7 @@
           <a:bodyPr wrap="square" lIns="0" tIns="0" rIns="0" bIns="0" rtlCol="0" anchor="t"/>
           <a:lstStyle/>
           <a:p>
-            <a:pPr indent="0" marL="0">
+            <a:pPr marL="0" indent="0">
               <a:lnSpc>
                 <a:spcPts val="1400"/>
               </a:lnSpc>
@@ -8813,7 +8703,7 @@
           <a:bodyPr wrap="square" lIns="0" tIns="0" rIns="0" bIns="0" rtlCol="0" anchor="ctr"/>
           <a:lstStyle/>
           <a:p>
-            <a:pPr indent="0" marL="0">
+            <a:pPr marL="0" indent="0">
               <a:buNone/>
             </a:pPr>
             <a:r>
@@ -8852,7 +8742,7 @@
           <a:bodyPr wrap="square" lIns="0" tIns="0" rIns="0" bIns="0" rtlCol="0" anchor="ctr"/>
           <a:lstStyle/>
           <a:p>
-            <a:pPr algn="r" indent="0" marL="0">
+            <a:pPr marL="0" indent="0" algn="r">
               <a:buNone/>
             </a:pPr>
             <a:r>
@@ -8886,6 +8776,7 @@
         <a:solidFill>
           <a:srgbClr val="F7F8FA"/>
         </a:solidFill>
+        <a:effectLst/>
       </p:bgPr>
     </p:bg>
     <p:spTree>
@@ -8923,11 +8814,11 @@
           <a:bodyPr wrap="square" lIns="0" tIns="0" rIns="0" bIns="0" rtlCol="0" anchor="ctr"/>
           <a:lstStyle/>
           <a:p>
-            <a:pPr indent="0" marL="0">
-              <a:buNone/>
-            </a:pPr>
-            <a:r>
-              <a:rPr lang="en-US" sz="1050" b="1" spc="160" kern="0" dirty="0">
+            <a:pPr marL="0" indent="0">
+              <a:buNone/>
+            </a:pPr>
+            <a:r>
+              <a:rPr lang="en-US" sz="1050" b="1" kern="0" spc="160" dirty="0">
                 <a:solidFill>
                   <a:srgbClr val="D03B3B"/>
                 </a:solidFill>
@@ -8962,7 +8853,7 @@
           <a:bodyPr wrap="square" lIns="0" tIns="0" rIns="0" bIns="0" rtlCol="0" anchor="t"/>
           <a:lstStyle/>
           <a:p>
-            <a:pPr indent="0" marL="0">
+            <a:pPr marL="0" indent="0">
               <a:buNone/>
             </a:pPr>
             <a:r>
@@ -8982,7 +8873,7 @@
       </p:sp>
       <p:graphicFrame>
         <p:nvGraphicFramePr>
-          <p:cNvPr id="4" name="Chart 0" descr=""/>
+          <p:cNvPr id="4" name="Chart 0"/>
           <p:cNvGraphicFramePr/>
           <p:nvPr/>
         </p:nvGraphicFramePr>
@@ -8990,9 +8881,9 @@
           <a:off x="475488" y="1371600"/>
           <a:ext cx="7040880" cy="3931920"/>
         </p:xfrm>
-        <a:graphic xmlns:a="http://schemas.openxmlformats.org/drawingml/2006/main">
+        <a:graphic>
           <a:graphicData uri="http://schemas.openxmlformats.org/drawingml/2006/chart">
-            <c:chart xmlns:c="http://schemas.openxmlformats.org/drawingml/2006/chart" r:id="rId1"/>
+            <c:chart xmlns:c="http://schemas.openxmlformats.org/drawingml/2006/chart" xmlns:r="http://schemas.openxmlformats.org/officeDocument/2006/relationships" r:id="rId3"/>
           </a:graphicData>
         </a:graphic>
       </p:graphicFrame>
@@ -9017,7 +8908,7 @@
           <a:bodyPr wrap="square" lIns="0" tIns="0" rIns="0" bIns="0" rtlCol="0" anchor="ctr"/>
           <a:lstStyle/>
           <a:p>
-            <a:pPr indent="0" marL="0">
+            <a:pPr marL="0" indent="0">
               <a:buNone/>
             </a:pPr>
             <a:r>
@@ -9056,7 +8947,7 @@
           <a:bodyPr wrap="square" lIns="0" tIns="0" rIns="0" bIns="0" rtlCol="0" anchor="ctr"/>
           <a:lstStyle/>
           <a:p>
-            <a:pPr indent="0" marL="0">
+            <a:pPr marL="0" indent="0">
               <a:buNone/>
             </a:pPr>
             <a:r>
@@ -9095,7 +8986,7 @@
           <a:bodyPr wrap="square" lIns="0" tIns="0" rIns="0" bIns="0" rtlCol="0" anchor="t"/>
           <a:lstStyle/>
           <a:p>
-            <a:pPr indent="0" marL="0">
+            <a:pPr marL="0" indent="0">
               <a:lnSpc>
                 <a:spcPts val="1700"/>
               </a:lnSpc>
@@ -9116,7 +9007,7 @@
             <a:endParaRPr lang="en-US" sz="1250" dirty="0"/>
           </a:p>
           <a:p>
-            <a:pPr indent="0" marL="0">
+            <a:pPr marL="0" indent="0">
               <a:lnSpc>
                 <a:spcPts val="1700"/>
               </a:lnSpc>
@@ -9137,7 +9028,7 @@
             <a:endParaRPr lang="en-US" sz="1250" dirty="0"/>
           </a:p>
           <a:p>
-            <a:pPr indent="0" marL="0">
+            <a:pPr marL="0" indent="0">
               <a:lnSpc>
                 <a:spcPts val="1700"/>
               </a:lnSpc>
@@ -9184,7 +9075,7 @@
             <a:prstDash val="solid"/>
           </a:ln>
           <a:effectLst>
-            <a:outerShdw sx="100000" sy="100000" kx="0" ky="0" algn="bl" rotWithShape="0" blurRad="101600" dist="12700" dir="5400000">
+            <a:outerShdw blurRad="101600" dist="12700" dir="5400000" algn="bl" rotWithShape="0">
               <a:srgbClr val="9AA5B1">
                 <a:alpha val="18000"/>
               </a:srgbClr>
@@ -9213,7 +9104,7 @@
           <a:bodyPr wrap="square" lIns="0" tIns="0" rIns="0" bIns="0" rtlCol="0" anchor="ctr"/>
           <a:lstStyle/>
           <a:p>
-            <a:pPr algn="ctr" indent="0" marL="0">
+            <a:pPr marL="0" indent="0" algn="ctr">
               <a:buNone/>
             </a:pPr>
             <a:r>
@@ -9252,7 +9143,7 @@
           <a:bodyPr wrap="square" lIns="0" tIns="0" rIns="0" bIns="0" rtlCol="0" anchor="t"/>
           <a:lstStyle/>
           <a:p>
-            <a:pPr algn="ctr" indent="0" marL="0">
+            <a:pPr marL="0" indent="0" algn="ctr">
               <a:buNone/>
             </a:pPr>
             <a:r>
@@ -9291,7 +9182,7 @@
           <a:bodyPr wrap="square" lIns="0" tIns="0" rIns="0" bIns="0" rtlCol="0" anchor="ctr"/>
           <a:lstStyle/>
           <a:p>
-            <a:pPr indent="0" marL="0">
+            <a:pPr marL="0" indent="0">
               <a:buNone/>
             </a:pPr>
             <a:r>
@@ -9330,7 +9221,7 @@
           <a:bodyPr wrap="square" lIns="0" tIns="0" rIns="0" bIns="0" rtlCol="0" anchor="ctr"/>
           <a:lstStyle/>
           <a:p>
-            <a:pPr algn="r" indent="0" marL="0">
+            <a:pPr marL="0" indent="0" algn="r">
               <a:buNone/>
             </a:pPr>
             <a:r>
@@ -9364,6 +9255,7 @@
         <a:solidFill>
           <a:srgbClr val="F7F8FA"/>
         </a:solidFill>
+        <a:effectLst/>
       </p:bgPr>
     </p:bg>
     <p:spTree>
@@ -9401,11 +9293,11 @@
           <a:bodyPr wrap="square" lIns="0" tIns="0" rIns="0" bIns="0" rtlCol="0" anchor="ctr"/>
           <a:lstStyle/>
           <a:p>
-            <a:pPr indent="0" marL="0">
-              <a:buNone/>
-            </a:pPr>
-            <a:r>
-              <a:rPr lang="en-US" sz="1050" b="1" spc="160" kern="0" dirty="0">
+            <a:pPr marL="0" indent="0">
+              <a:buNone/>
+            </a:pPr>
+            <a:r>
+              <a:rPr lang="en-US" sz="1050" b="1" kern="0" spc="160" dirty="0">
                 <a:solidFill>
                   <a:srgbClr val="D03B3B"/>
                 </a:solidFill>
@@ -9440,7 +9332,7 @@
           <a:bodyPr wrap="square" lIns="0" tIns="0" rIns="0" bIns="0" rtlCol="0" anchor="t"/>
           <a:lstStyle/>
           <a:p>
-            <a:pPr indent="0" marL="0">
+            <a:pPr marL="0" indent="0">
               <a:buNone/>
             </a:pPr>
             <a:r>
@@ -9479,7 +9371,7 @@
           <a:bodyPr wrap="square" lIns="0" tIns="0" rIns="0" bIns="0" rtlCol="0" anchor="t"/>
           <a:lstStyle/>
           <a:p>
-            <a:pPr indent="0" marL="0">
+            <a:pPr marL="0" indent="0">
               <a:lnSpc>
                 <a:spcPts val="1900"/>
               </a:lnSpc>
@@ -9526,7 +9418,7 @@
             <a:prstDash val="solid"/>
           </a:ln>
           <a:effectLst>
-            <a:outerShdw sx="100000" sy="100000" kx="0" ky="0" algn="bl" rotWithShape="0" blurRad="101600" dist="12700" dir="5400000">
+            <a:outerShdw blurRad="101600" dist="12700" dir="5400000" algn="bl" rotWithShape="0">
               <a:srgbClr val="9AA5B1">
                 <a:alpha val="16000"/>
               </a:srgbClr>
@@ -9580,7 +9472,7 @@
           <a:bodyPr wrap="square" lIns="0" tIns="0" rIns="0" bIns="0" rtlCol="0" anchor="ctr"/>
           <a:lstStyle/>
           <a:p>
-            <a:pPr algn="ctr" indent="0" marL="0">
+            <a:pPr marL="0" indent="0" algn="ctr">
               <a:buNone/>
             </a:pPr>
             <a:r>
@@ -9619,7 +9511,7 @@
           <a:bodyPr wrap="square" lIns="0" tIns="0" rIns="0" bIns="0" rtlCol="0" anchor="ctr"/>
           <a:lstStyle/>
           <a:p>
-            <a:pPr indent="0" marL="0">
+            <a:pPr marL="0" indent="0">
               <a:buNone/>
             </a:pPr>
             <a:r>
@@ -9658,7 +9550,7 @@
           <a:bodyPr wrap="square" lIns="0" tIns="0" rIns="0" bIns="0" rtlCol="0" anchor="t"/>
           <a:lstStyle/>
           <a:p>
-            <a:pPr indent="0" marL="0">
+            <a:pPr marL="0" indent="0">
               <a:lnSpc>
                 <a:spcPts val="1600"/>
               </a:lnSpc>
@@ -9678,7 +9570,7 @@
             <a:endParaRPr lang="en-US" sz="1200" dirty="0"/>
           </a:p>
           <a:p>
-            <a:pPr indent="0" marL="0">
+            <a:pPr marL="0" indent="0">
               <a:lnSpc>
                 <a:spcPts val="1600"/>
               </a:lnSpc>
@@ -9687,7 +9579,7 @@
             <a:endParaRPr lang="en-US" sz="1200" dirty="0"/>
           </a:p>
           <a:p>
-            <a:pPr indent="0" marL="0">
+            <a:pPr marL="0" indent="0">
               <a:lnSpc>
                 <a:spcPts val="1600"/>
               </a:lnSpc>
@@ -9734,7 +9626,7 @@
             <a:prstDash val="solid"/>
           </a:ln>
           <a:effectLst>
-            <a:outerShdw sx="100000" sy="100000" kx="0" ky="0" algn="bl" rotWithShape="0" blurRad="101600" dist="12700" dir="5400000">
+            <a:outerShdw blurRad="101600" dist="12700" dir="5400000" algn="bl" rotWithShape="0">
               <a:srgbClr val="9AA5B1">
                 <a:alpha val="16000"/>
               </a:srgbClr>
@@ -9788,7 +9680,7 @@
           <a:bodyPr wrap="square" lIns="0" tIns="0" rIns="0" bIns="0" rtlCol="0" anchor="ctr"/>
           <a:lstStyle/>
           <a:p>
-            <a:pPr algn="ctr" indent="0" marL="0">
+            <a:pPr marL="0" indent="0" algn="ctr">
               <a:buNone/>
             </a:pPr>
             <a:r>
@@ -9827,7 +9719,7 @@
           <a:bodyPr wrap="square" lIns="0" tIns="0" rIns="0" bIns="0" rtlCol="0" anchor="ctr"/>
           <a:lstStyle/>
           <a:p>
-            <a:pPr indent="0" marL="0">
+            <a:pPr marL="0" indent="0">
               <a:buNone/>
             </a:pPr>
             <a:r>
@@ -9866,7 +9758,7 @@
           <a:bodyPr wrap="square" lIns="0" tIns="0" rIns="0" bIns="0" rtlCol="0" anchor="t"/>
           <a:lstStyle/>
           <a:p>
-            <a:pPr indent="0" marL="0">
+            <a:pPr marL="0" indent="0">
               <a:lnSpc>
                 <a:spcPts val="1600"/>
               </a:lnSpc>
@@ -9886,7 +9778,7 @@
             <a:endParaRPr lang="en-US" sz="1200" dirty="0"/>
           </a:p>
           <a:p>
-            <a:pPr indent="0" marL="0">
+            <a:pPr marL="0" indent="0">
               <a:lnSpc>
                 <a:spcPts val="1600"/>
               </a:lnSpc>
@@ -9895,7 +9787,7 @@
             <a:endParaRPr lang="en-US" sz="1200" dirty="0"/>
           </a:p>
           <a:p>
-            <a:pPr indent="0" marL="0">
+            <a:pPr marL="0" indent="0">
               <a:lnSpc>
                 <a:spcPts val="1600"/>
               </a:lnSpc>
@@ -9964,7 +9856,7 @@
           <a:bodyPr wrap="square" lIns="0" tIns="0" rIns="0" bIns="0" rtlCol="0" anchor="ctr"/>
           <a:lstStyle/>
           <a:p>
-            <a:pPr indent="0" marL="0">
+            <a:pPr marL="0" indent="0">
               <a:buNone/>
             </a:pPr>
             <a:r>
@@ -10003,7 +9895,7 @@
           <a:bodyPr wrap="square" lIns="0" tIns="0" rIns="0" bIns="0" rtlCol="0" anchor="ctr"/>
           <a:lstStyle/>
           <a:p>
-            <a:pPr indent="0" marL="0">
+            <a:pPr marL="0" indent="0">
               <a:buNone/>
             </a:pPr>
             <a:r>
@@ -10023,7 +9915,7 @@
       </p:sp>
       <p:graphicFrame>
         <p:nvGraphicFramePr>
-          <p:cNvPr id="13" name="Table 0"/>
+          <p:cNvPr id="18" name="Table 0"/>
           <p:cNvGraphicFramePr>
             <a:graphicFrameLocks noGrp="1"/>
           </p:cNvGraphicFramePr>
@@ -10037,17 +9929,41 @@
         </p:nvGraphicFramePr>
         <p:xfrm>
           <a:off x="566928" y="4992624"/>
-          <a:ext cx="11057839" cy="914400"/>
+          <a:ext cx="11057839" cy="1325880"/>
         </p:xfrm>
         <a:graphic>
           <a:graphicData uri="http://schemas.openxmlformats.org/drawingml/2006/table">
             <a:tbl>
               <a:tblPr/>
               <a:tblGrid>
-                <a:gridCol w="5022799"/>
-                <a:gridCol w="2103120"/>
-                <a:gridCol w="2011680"/>
-                <a:gridCol w="1920240"/>
+                <a:gridCol w="5022799">
+                  <a:extLst>
+                    <a:ext uri="{9D8B030D-6E8A-4147-A177-3AD203B41FA5}">
+                      <a16:colId xmlns:a16="http://schemas.microsoft.com/office/drawing/2014/main" val="20000"/>
+                    </a:ext>
+                  </a:extLst>
+                </a:gridCol>
+                <a:gridCol w="2103120">
+                  <a:extLst>
+                    <a:ext uri="{9D8B030D-6E8A-4147-A177-3AD203B41FA5}">
+                      <a16:colId xmlns:a16="http://schemas.microsoft.com/office/drawing/2014/main" val="20001"/>
+                    </a:ext>
+                  </a:extLst>
+                </a:gridCol>
+                <a:gridCol w="2011680">
+                  <a:extLst>
+                    <a:ext uri="{9D8B030D-6E8A-4147-A177-3AD203B41FA5}">
+                      <a16:colId xmlns:a16="http://schemas.microsoft.com/office/drawing/2014/main" val="20002"/>
+                    </a:ext>
+                  </a:extLst>
+                </a:gridCol>
+                <a:gridCol w="1920240">
+                  <a:extLst>
+                    <a:ext uri="{9D8B030D-6E8A-4147-A177-3AD203B41FA5}">
+                      <a16:colId xmlns:a16="http://schemas.microsoft.com/office/drawing/2014/main" val="20003"/>
+                    </a:ext>
+                  </a:extLst>
+                </a:gridCol>
               </a:tblGrid>
               <a:tr h="237744">
                 <a:tc>
@@ -10055,7 +9971,7 @@
                     <a:bodyPr/>
                     <a:lstStyle/>
                     <a:p>
-                      <a:pPr indent="0" marL="0">
+                      <a:pPr marL="0" indent="0">
                         <a:buNone/>
                       </a:pPr>
                       <a:r>
@@ -10076,7 +9992,7 @@
                       </a:endParaRPr>
                     </a:p>
                   </a:txBody>
-                  <a:tcPr marL="91440" marR="91440" marT="45720" marB="45720" anchor="ctr">
+                  <a:tcPr anchor="ctr">
                     <a:lnL w="12700" cap="flat" cmpd="sng" algn="ctr">
                       <a:solidFill>
                         <a:srgbClr val="DDE3E8"/>
@@ -10123,7 +10039,7 @@
                     <a:bodyPr/>
                     <a:lstStyle/>
                     <a:p>
-                      <a:pPr algn="ctr" indent="0" marL="0">
+                      <a:pPr marL="0" indent="0" algn="ctr">
                         <a:buNone/>
                       </a:pPr>
                       <a:r>
@@ -10144,7 +10060,7 @@
                       </a:endParaRPr>
                     </a:p>
                   </a:txBody>
-                  <a:tcPr marL="91440" marR="91440" marT="45720" marB="45720" anchor="ctr">
+                  <a:tcPr anchor="ctr">
                     <a:lnL w="12700" cap="flat" cmpd="sng" algn="ctr">
                       <a:solidFill>
                         <a:srgbClr val="DDE3E8"/>
@@ -10191,7 +10107,7 @@
                     <a:bodyPr/>
                     <a:lstStyle/>
                     <a:p>
-                      <a:pPr algn="ctr" indent="0" marL="0">
+                      <a:pPr marL="0" indent="0" algn="ctr">
                         <a:buNone/>
                       </a:pPr>
                       <a:r>
@@ -10212,7 +10128,7 @@
                       </a:endParaRPr>
                     </a:p>
                   </a:txBody>
-                  <a:tcPr marL="91440" marR="91440" marT="45720" marB="45720" anchor="ctr">
+                  <a:tcPr anchor="ctr">
                     <a:lnL w="12700" cap="flat" cmpd="sng" algn="ctr">
                       <a:solidFill>
                         <a:srgbClr val="DDE3E8"/>
@@ -10259,7 +10175,7 @@
                     <a:bodyPr/>
                     <a:lstStyle/>
                     <a:p>
-                      <a:pPr algn="ctr" indent="0" marL="0">
+                      <a:pPr marL="0" indent="0" algn="ctr">
                         <a:buNone/>
                       </a:pPr>
                       <a:r>
@@ -10280,7 +10196,7 @@
                       </a:endParaRPr>
                     </a:p>
                   </a:txBody>
-                  <a:tcPr marL="91440" marR="91440" marT="45720" marB="45720" anchor="ctr">
+                  <a:tcPr anchor="ctr">
                     <a:lnL w="12700" cap="flat" cmpd="sng" algn="ctr">
                       <a:solidFill>
                         <a:srgbClr val="DDE3E8"/>
@@ -10322,6 +10238,11 @@
                     </a:solidFill>
                   </a:tcPr>
                 </a:tc>
+                <a:extLst>
+                  <a:ext uri="{0D108BD9-81ED-4DB2-BD59-A6C34878D82A}">
+                    <a16:rowId xmlns:a16="http://schemas.microsoft.com/office/drawing/2014/main" val="10000"/>
+                  </a:ext>
+                </a:extLst>
               </a:tr>
               <a:tr h="237744">
                 <a:tc>
@@ -10329,7 +10250,7 @@
                     <a:bodyPr/>
                     <a:lstStyle/>
                     <a:p>
-                      <a:pPr indent="0" marL="0">
+                      <a:pPr marL="0" indent="0">
                         <a:buNone/>
                       </a:pPr>
                       <a:r>
@@ -10350,7 +10271,7 @@
                       </a:endParaRPr>
                     </a:p>
                   </a:txBody>
-                  <a:tcPr marL="91440" marR="91440" marT="45720" marB="45720" anchor="ctr">
+                  <a:tcPr anchor="ctr">
                     <a:lnL w="12700" cap="flat" cmpd="sng" algn="ctr">
                       <a:solidFill>
                         <a:srgbClr val="DDE3E8"/>
@@ -10397,7 +10318,7 @@
                     <a:bodyPr/>
                     <a:lstStyle/>
                     <a:p>
-                      <a:pPr algn="ctr" indent="0" marL="0">
+                      <a:pPr marL="0" indent="0" algn="ctr">
                         <a:buNone/>
                       </a:pPr>
                       <a:r>
@@ -10418,7 +10339,7 @@
                       </a:endParaRPr>
                     </a:p>
                   </a:txBody>
-                  <a:tcPr marL="91440" marR="91440" marT="45720" marB="45720" anchor="ctr">
+                  <a:tcPr anchor="ctr">
                     <a:lnL w="12700" cap="flat" cmpd="sng" algn="ctr">
                       <a:solidFill>
                         <a:srgbClr val="DDE3E8"/>
@@ -10465,7 +10386,7 @@
                     <a:bodyPr/>
                     <a:lstStyle/>
                     <a:p>
-                      <a:pPr algn="ctr" indent="0" marL="0">
+                      <a:pPr marL="0" indent="0" algn="ctr">
                         <a:buNone/>
                       </a:pPr>
                       <a:r>
@@ -10486,7 +10407,7 @@
                       </a:endParaRPr>
                     </a:p>
                   </a:txBody>
-                  <a:tcPr marL="91440" marR="91440" marT="45720" marB="45720" anchor="ctr">
+                  <a:tcPr anchor="ctr">
                     <a:lnL w="12700" cap="flat" cmpd="sng" algn="ctr">
                       <a:solidFill>
                         <a:srgbClr val="DDE3E8"/>
@@ -10533,7 +10454,7 @@
                     <a:bodyPr/>
                     <a:lstStyle/>
                     <a:p>
-                      <a:pPr algn="ctr" indent="0" marL="0">
+                      <a:pPr marL="0" indent="0" algn="ctr">
                         <a:buNone/>
                       </a:pPr>
                       <a:r>
@@ -10554,7 +10475,7 @@
                       </a:endParaRPr>
                     </a:p>
                   </a:txBody>
-                  <a:tcPr marL="91440" marR="91440" marT="45720" marB="45720" anchor="ctr">
+                  <a:tcPr anchor="ctr">
                     <a:lnL w="12700" cap="flat" cmpd="sng" algn="ctr">
                       <a:solidFill>
                         <a:srgbClr val="DDE3E8"/>
@@ -10596,6 +10517,11 @@
                     </a:solidFill>
                   </a:tcPr>
                 </a:tc>
+                <a:extLst>
+                  <a:ext uri="{0D108BD9-81ED-4DB2-BD59-A6C34878D82A}">
+                    <a16:rowId xmlns:a16="http://schemas.microsoft.com/office/drawing/2014/main" val="10001"/>
+                  </a:ext>
+                </a:extLst>
               </a:tr>
               <a:tr h="237744">
                 <a:tc>
@@ -10603,7 +10529,7 @@
                     <a:bodyPr/>
                     <a:lstStyle/>
                     <a:p>
-                      <a:pPr indent="0" marL="0">
+                      <a:pPr marL="0" indent="0">
                         <a:buNone/>
                       </a:pPr>
                       <a:r>
@@ -10624,7 +10550,7 @@
                       </a:endParaRPr>
                     </a:p>
                   </a:txBody>
-                  <a:tcPr marL="91440" marR="91440" marT="45720" marB="45720" anchor="ctr">
+                  <a:tcPr anchor="ctr">
                     <a:lnL w="12700" cap="flat" cmpd="sng" algn="ctr">
                       <a:solidFill>
                         <a:srgbClr val="DDE3E8"/>
@@ -10671,7 +10597,7 @@
                     <a:bodyPr/>
                     <a:lstStyle/>
                     <a:p>
-                      <a:pPr algn="ctr" indent="0" marL="0">
+                      <a:pPr marL="0" indent="0" algn="ctr">
                         <a:buNone/>
                       </a:pPr>
                       <a:r>
@@ -10692,7 +10618,7 @@
                       </a:endParaRPr>
                     </a:p>
                   </a:txBody>
-                  <a:tcPr marL="91440" marR="91440" marT="45720" marB="45720" anchor="ctr">
+                  <a:tcPr anchor="ctr">
                     <a:lnL w="12700" cap="flat" cmpd="sng" algn="ctr">
                       <a:solidFill>
                         <a:srgbClr val="DDE3E8"/>
@@ -10739,7 +10665,7 @@
                     <a:bodyPr/>
                     <a:lstStyle/>
                     <a:p>
-                      <a:pPr algn="ctr" indent="0" marL="0">
+                      <a:pPr marL="0" indent="0" algn="ctr">
                         <a:buNone/>
                       </a:pPr>
                       <a:r>
@@ -10760,7 +10686,7 @@
                       </a:endParaRPr>
                     </a:p>
                   </a:txBody>
-                  <a:tcPr marL="91440" marR="91440" marT="45720" marB="45720" anchor="ctr">
+                  <a:tcPr anchor="ctr">
                     <a:lnL w="12700" cap="flat" cmpd="sng" algn="ctr">
                       <a:solidFill>
                         <a:srgbClr val="DDE3E8"/>
@@ -10807,7 +10733,7 @@
                     <a:bodyPr/>
                     <a:lstStyle/>
                     <a:p>
-                      <a:pPr algn="ctr" indent="0" marL="0">
+                      <a:pPr marL="0" indent="0" algn="ctr">
                         <a:buNone/>
                       </a:pPr>
                       <a:r>
@@ -10828,7 +10754,7 @@
                       </a:endParaRPr>
                     </a:p>
                   </a:txBody>
-                  <a:tcPr marL="91440" marR="91440" marT="45720" marB="45720" anchor="ctr">
+                  <a:tcPr anchor="ctr">
                     <a:lnL w="12700" cap="flat" cmpd="sng" algn="ctr">
                       <a:solidFill>
                         <a:srgbClr val="DDE3E8"/>
@@ -10870,6 +10796,11 @@
                     </a:solidFill>
                   </a:tcPr>
                 </a:tc>
+                <a:extLst>
+                  <a:ext uri="{0D108BD9-81ED-4DB2-BD59-A6C34878D82A}">
+                    <a16:rowId xmlns:a16="http://schemas.microsoft.com/office/drawing/2014/main" val="10002"/>
+                  </a:ext>
+                </a:extLst>
               </a:tr>
               <a:tr h="237744">
                 <a:tc>
@@ -10877,7 +10808,7 @@
                     <a:bodyPr/>
                     <a:lstStyle/>
                     <a:p>
-                      <a:pPr indent="0" marL="0">
+                      <a:pPr marL="0" indent="0">
                         <a:buNone/>
                       </a:pPr>
                       <a:r>
@@ -10898,7 +10829,7 @@
                       </a:endParaRPr>
                     </a:p>
                   </a:txBody>
-                  <a:tcPr marL="91440" marR="91440" marT="45720" marB="45720" anchor="ctr">
+                  <a:tcPr anchor="ctr">
                     <a:lnL w="12700" cap="flat" cmpd="sng" algn="ctr">
                       <a:solidFill>
                         <a:srgbClr val="DDE3E8"/>
@@ -10945,7 +10876,7 @@
                     <a:bodyPr/>
                     <a:lstStyle/>
                     <a:p>
-                      <a:pPr algn="ctr" indent="0" marL="0">
+                      <a:pPr marL="0" indent="0" algn="ctr">
                         <a:buNone/>
                       </a:pPr>
                       <a:r>
@@ -10966,7 +10897,7 @@
                       </a:endParaRPr>
                     </a:p>
                   </a:txBody>
-                  <a:tcPr marL="91440" marR="91440" marT="45720" marB="45720" anchor="ctr">
+                  <a:tcPr anchor="ctr">
                     <a:lnL w="12700" cap="flat" cmpd="sng" algn="ctr">
                       <a:solidFill>
                         <a:srgbClr val="DDE3E8"/>
@@ -11013,7 +10944,7 @@
                     <a:bodyPr/>
                     <a:lstStyle/>
                     <a:p>
-                      <a:pPr algn="ctr" indent="0" marL="0">
+                      <a:pPr marL="0" indent="0" algn="ctr">
                         <a:buNone/>
                       </a:pPr>
                       <a:r>
@@ -11034,7 +10965,7 @@
                       </a:endParaRPr>
                     </a:p>
                   </a:txBody>
-                  <a:tcPr marL="91440" marR="91440" marT="45720" marB="45720" anchor="ctr">
+                  <a:tcPr anchor="ctr">
                     <a:lnL w="12700" cap="flat" cmpd="sng" algn="ctr">
                       <a:solidFill>
                         <a:srgbClr val="DDE3E8"/>
@@ -11081,7 +11012,7 @@
                     <a:bodyPr/>
                     <a:lstStyle/>
                     <a:p>
-                      <a:pPr algn="ctr" indent="0" marL="0">
+                      <a:pPr marL="0" indent="0" algn="ctr">
                         <a:buNone/>
                       </a:pPr>
                       <a:r>
@@ -11102,7 +11033,7 @@
                       </a:endParaRPr>
                     </a:p>
                   </a:txBody>
-                  <a:tcPr marL="91440" marR="91440" marT="45720" marB="45720" anchor="ctr">
+                  <a:tcPr anchor="ctr">
                     <a:lnL w="12700" cap="flat" cmpd="sng" algn="ctr">
                       <a:solidFill>
                         <a:srgbClr val="DDE3E8"/>
@@ -11144,6 +11075,11 @@
                     </a:solidFill>
                   </a:tcPr>
                 </a:tc>
+                <a:extLst>
+                  <a:ext uri="{0D108BD9-81ED-4DB2-BD59-A6C34878D82A}">
+                    <a16:rowId xmlns:a16="http://schemas.microsoft.com/office/drawing/2014/main" val="10003"/>
+                  </a:ext>
+                </a:extLst>
               </a:tr>
               <a:tr h="237744">
                 <a:tc>
@@ -11151,7 +11087,7 @@
                     <a:bodyPr/>
                     <a:lstStyle/>
                     <a:p>
-                      <a:pPr indent="0" marL="0">
+                      <a:pPr marL="0" indent="0">
                         <a:buNone/>
                       </a:pPr>
                       <a:r>
@@ -11172,7 +11108,7 @@
                       </a:endParaRPr>
                     </a:p>
                   </a:txBody>
-                  <a:tcPr marL="91440" marR="91440" marT="45720" marB="45720" anchor="ctr">
+                  <a:tcPr anchor="ctr">
                     <a:lnL w="12700" cap="flat" cmpd="sng" algn="ctr">
                       <a:solidFill>
                         <a:srgbClr val="DDE3E8"/>
@@ -11219,7 +11155,7 @@
                     <a:bodyPr/>
                     <a:lstStyle/>
                     <a:p>
-                      <a:pPr algn="ctr" indent="0" marL="0">
+                      <a:pPr marL="0" indent="0" algn="ctr">
                         <a:buNone/>
                       </a:pPr>
                       <a:r>
@@ -11240,7 +11176,7 @@
                       </a:endParaRPr>
                     </a:p>
                   </a:txBody>
-                  <a:tcPr marL="91440" marR="91440" marT="45720" marB="45720" anchor="ctr">
+                  <a:tcPr anchor="ctr">
                     <a:lnL w="12700" cap="flat" cmpd="sng" algn="ctr">
                       <a:solidFill>
                         <a:srgbClr val="DDE3E8"/>
@@ -11287,7 +11223,7 @@
                     <a:bodyPr/>
                     <a:lstStyle/>
                     <a:p>
-                      <a:pPr algn="ctr" indent="0" marL="0">
+                      <a:pPr marL="0" indent="0" algn="ctr">
                         <a:buNone/>
                       </a:pPr>
                       <a:r>
@@ -11308,7 +11244,7 @@
                       </a:endParaRPr>
                     </a:p>
                   </a:txBody>
-                  <a:tcPr marL="91440" marR="91440" marT="45720" marB="45720" anchor="ctr">
+                  <a:tcPr anchor="ctr">
                     <a:lnL w="12700" cap="flat" cmpd="sng" algn="ctr">
                       <a:solidFill>
                         <a:srgbClr val="DDE3E8"/>
@@ -11355,7 +11291,7 @@
                     <a:bodyPr/>
                     <a:lstStyle/>
                     <a:p>
-                      <a:pPr algn="ctr" indent="0" marL="0">
+                      <a:pPr marL="0" indent="0" algn="ctr">
                         <a:buNone/>
                       </a:pPr>
                       <a:r>
@@ -11376,7 +11312,7 @@
                       </a:endParaRPr>
                     </a:p>
                   </a:txBody>
-                  <a:tcPr marL="91440" marR="91440" marT="45720" marB="45720" anchor="ctr">
+                  <a:tcPr anchor="ctr">
                     <a:lnL w="12700" cap="flat" cmpd="sng" algn="ctr">
                       <a:solidFill>
                         <a:srgbClr val="DDE3E8"/>
@@ -11418,6 +11354,11 @@
                     </a:solidFill>
                   </a:tcPr>
                 </a:tc>
+                <a:extLst>
+                  <a:ext uri="{0D108BD9-81ED-4DB2-BD59-A6C34878D82A}">
+                    <a16:rowId xmlns:a16="http://schemas.microsoft.com/office/drawing/2014/main" val="10004"/>
+                  </a:ext>
+                </a:extLst>
               </a:tr>
             </a:tbl>
           </a:graphicData>
@@ -11444,7 +11385,7 @@
           <a:bodyPr wrap="square" lIns="0" tIns="0" rIns="0" bIns="0" rtlCol="0" anchor="ctr"/>
           <a:lstStyle/>
           <a:p>
-            <a:pPr indent="0" marL="0">
+            <a:pPr marL="0" indent="0">
               <a:buNone/>
             </a:pPr>
             <a:r>
@@ -11483,7 +11424,7 @@
           <a:bodyPr wrap="square" lIns="0" tIns="0" rIns="0" bIns="0" rtlCol="0" anchor="ctr"/>
           <a:lstStyle/>
           <a:p>
-            <a:pPr algn="r" indent="0" marL="0">
+            <a:pPr marL="0" indent="0" algn="r">
               <a:buNone/>
             </a:pPr>
             <a:r>
@@ -11517,6 +11458,7 @@
         <a:solidFill>
           <a:srgbClr val="F7F8FA"/>
         </a:solidFill>
+        <a:effectLst/>
       </p:bgPr>
     </p:bg>
     <p:spTree>
@@ -11554,11 +11496,11 @@
           <a:bodyPr wrap="square" lIns="0" tIns="0" rIns="0" bIns="0" rtlCol="0" anchor="ctr"/>
           <a:lstStyle/>
           <a:p>
-            <a:pPr indent="0" marL="0">
-              <a:buNone/>
-            </a:pPr>
-            <a:r>
-              <a:rPr lang="en-US" sz="1050" b="1" spc="160" kern="0" dirty="0">
+            <a:pPr marL="0" indent="0">
+              <a:buNone/>
+            </a:pPr>
+            <a:r>
+              <a:rPr lang="en-US" sz="1050" b="1" kern="0" spc="160" dirty="0">
                 <a:solidFill>
                   <a:srgbClr val="D03B3B"/>
                 </a:solidFill>
@@ -11593,7 +11535,7 @@
           <a:bodyPr wrap="square" lIns="0" tIns="0" rIns="0" bIns="0" rtlCol="0" anchor="t"/>
           <a:lstStyle/>
           <a:p>
-            <a:pPr indent="0" marL="0">
+            <a:pPr marL="0" indent="0">
               <a:buNone/>
             </a:pPr>
             <a:r>
@@ -11613,14 +11555,14 @@
       </p:sp>
       <p:pic>
         <p:nvPicPr>
-          <p:cNvPr id="4" name="Image 0" descr="/home/claude/mlbubble/reports/figures/fig8_hybrid_operating_curve.png">    </p:cNvPr>
+          <p:cNvPr id="4" name="Image 0" descr="/home/claude/mlbubble/reports/figures/fig8_hybrid_operating_curve.png"/>
           <p:cNvPicPr>
             <a:picLocks noChangeAspect="1"/>
           </p:cNvPicPr>
           <p:nvPr/>
         </p:nvPicPr>
         <p:blipFill>
-          <a:blip r:embed="rId1"/>
+          <a:blip r:embed="rId3"/>
           <a:stretch>
             <a:fillRect/>
           </a:stretch>
@@ -11661,7 +11603,7 @@
             <a:prstDash val="solid"/>
           </a:ln>
           <a:effectLst>
-            <a:outerShdw sx="100000" sy="100000" kx="0" ky="0" algn="bl" rotWithShape="0" blurRad="101600" dist="12700" dir="5400000">
+            <a:outerShdw blurRad="101600" dist="12700" dir="5400000" algn="bl" rotWithShape="0">
               <a:srgbClr val="9AA5B1">
                 <a:alpha val="18000"/>
               </a:srgbClr>
@@ -11690,7 +11632,7 @@
           <a:bodyPr wrap="square" lIns="0" tIns="0" rIns="0" bIns="0" rtlCol="0" anchor="ctr"/>
           <a:lstStyle/>
           <a:p>
-            <a:pPr algn="ctr" indent="0" marL="0">
+            <a:pPr marL="0" indent="0" algn="ctr">
               <a:buNone/>
             </a:pPr>
             <a:r>
@@ -11729,7 +11671,7 @@
           <a:bodyPr wrap="square" lIns="0" tIns="0" rIns="0" bIns="0" rtlCol="0" anchor="t"/>
           <a:lstStyle/>
           <a:p>
-            <a:pPr algn="ctr" indent="0" marL="0">
+            <a:pPr marL="0" indent="0" algn="ctr">
               <a:buNone/>
             </a:pPr>
             <a:r>
@@ -11773,7 +11715,7 @@
             <a:prstDash val="solid"/>
           </a:ln>
           <a:effectLst>
-            <a:outerShdw sx="100000" sy="100000" kx="0" ky="0" algn="bl" rotWithShape="0" blurRad="101600" dist="12700" dir="5400000">
+            <a:outerShdw blurRad="101600" dist="12700" dir="5400000" algn="bl" rotWithShape="0">
               <a:srgbClr val="9AA5B1">
                 <a:alpha val="18000"/>
               </a:srgbClr>
@@ -11802,7 +11744,7 @@
           <a:bodyPr wrap="square" lIns="0" tIns="0" rIns="0" bIns="0" rtlCol="0" anchor="ctr"/>
           <a:lstStyle/>
           <a:p>
-            <a:pPr algn="ctr" indent="0" marL="0">
+            <a:pPr marL="0" indent="0" algn="ctr">
               <a:buNone/>
             </a:pPr>
             <a:r>
@@ -11841,7 +11783,7 @@
           <a:bodyPr wrap="square" lIns="0" tIns="0" rIns="0" bIns="0" rtlCol="0" anchor="t"/>
           <a:lstStyle/>
           <a:p>
-            <a:pPr algn="ctr" indent="0" marL="0">
+            <a:pPr marL="0" indent="0" algn="ctr">
               <a:buNone/>
             </a:pPr>
             <a:r>
@@ -11885,7 +11827,7 @@
             <a:prstDash val="solid"/>
           </a:ln>
           <a:effectLst>
-            <a:outerShdw sx="100000" sy="100000" kx="0" ky="0" algn="bl" rotWithShape="0" blurRad="101600" dist="12700" dir="5400000">
+            <a:outerShdw blurRad="101600" dist="12700" dir="5400000" algn="bl" rotWithShape="0">
               <a:srgbClr val="9AA5B1">
                 <a:alpha val="18000"/>
               </a:srgbClr>
@@ -11914,7 +11856,7 @@
           <a:bodyPr wrap="square" lIns="0" tIns="0" rIns="0" bIns="0" rtlCol="0" anchor="ctr"/>
           <a:lstStyle/>
           <a:p>
-            <a:pPr algn="ctr" indent="0" marL="0">
+            <a:pPr marL="0" indent="0" algn="ctr">
               <a:buNone/>
             </a:pPr>
             <a:r>
@@ -11953,7 +11895,7 @@
           <a:bodyPr wrap="square" lIns="0" tIns="0" rIns="0" bIns="0" rtlCol="0" anchor="t"/>
           <a:lstStyle/>
           <a:p>
-            <a:pPr algn="ctr" indent="0" marL="0">
+            <a:pPr marL="0" indent="0" algn="ctr">
               <a:buNone/>
             </a:pPr>
             <a:r>
@@ -12019,7 +11961,7 @@
           <a:bodyPr wrap="square" lIns="0" tIns="0" rIns="0" bIns="0" rtlCol="0" anchor="ctr"/>
           <a:lstStyle/>
           <a:p>
-            <a:pPr indent="0" marL="0">
+            <a:pPr marL="0" indent="0">
               <a:lnSpc>
                 <a:spcPts val="1700"/>
               </a:lnSpc>
@@ -12061,7 +12003,7 @@
           <a:bodyPr wrap="square" lIns="0" tIns="0" rIns="0" bIns="0" rtlCol="0" anchor="ctr"/>
           <a:lstStyle/>
           <a:p>
-            <a:pPr indent="0" marL="0">
+            <a:pPr marL="0" indent="0">
               <a:buNone/>
             </a:pPr>
             <a:r>
@@ -12100,7 +12042,7 @@
           <a:bodyPr wrap="square" lIns="0" tIns="0" rIns="0" bIns="0" rtlCol="0" anchor="ctr"/>
           <a:lstStyle/>
           <a:p>
-            <a:pPr algn="r" indent="0" marL="0">
+            <a:pPr marL="0" indent="0" algn="r">
               <a:buNone/>
             </a:pPr>
             <a:r>
@@ -12134,6 +12076,7 @@
         <a:solidFill>
           <a:srgbClr val="F7F8FA"/>
         </a:solidFill>
+        <a:effectLst/>
       </p:bgPr>
     </p:bg>
     <p:spTree>
@@ -12171,11 +12114,11 @@
           <a:bodyPr wrap="square" lIns="0" tIns="0" rIns="0" bIns="0" rtlCol="0" anchor="ctr"/>
           <a:lstStyle/>
           <a:p>
-            <a:pPr indent="0" marL="0">
-              <a:buNone/>
-            </a:pPr>
-            <a:r>
-              <a:rPr lang="en-US" sz="1050" b="1" spc="160" kern="0" dirty="0">
+            <a:pPr marL="0" indent="0">
+              <a:buNone/>
+            </a:pPr>
+            <a:r>
+              <a:rPr lang="en-US" sz="1050" b="1" kern="0" spc="160" dirty="0">
                 <a:solidFill>
                   <a:srgbClr val="D03B3B"/>
                 </a:solidFill>
@@ -12210,7 +12153,7 @@
           <a:bodyPr wrap="square" lIns="0" tIns="0" rIns="0" bIns="0" rtlCol="0" anchor="t"/>
           <a:lstStyle/>
           <a:p>
-            <a:pPr indent="0" marL="0">
+            <a:pPr marL="0" indent="0">
               <a:buNone/>
             </a:pPr>
             <a:r>
@@ -12230,14 +12173,14 @@
       </p:sp>
       <p:pic>
         <p:nvPicPr>
-          <p:cNvPr id="4" name="Image 0" descr="/home/claude/mlbubble/reports/figures/fig12_shap_r2l_u2r_deck.png">    </p:cNvPr>
+          <p:cNvPr id="4" name="Image 0" descr="/home/claude/mlbubble/reports/figures/fig12_shap_r2l_u2r_deck.png"/>
           <p:cNvPicPr>
             <a:picLocks noChangeAspect="1"/>
           </p:cNvPicPr>
           <p:nvPr/>
         </p:nvPicPr>
         <p:blipFill>
-          <a:blip r:embed="rId1"/>
+          <a:blip r:embed="rId3"/>
           <a:stretch>
             <a:fillRect/>
           </a:stretch>
@@ -12300,7 +12243,7 @@
           <a:bodyPr wrap="square" lIns="0" tIns="0" rIns="0" bIns="0" rtlCol="0" anchor="t"/>
           <a:lstStyle/>
           <a:p>
-            <a:pPr indent="0" marL="0">
+            <a:pPr marL="0" indent="0">
               <a:lnSpc>
                 <a:spcPts val="1700"/>
               </a:lnSpc>
@@ -12318,12 +12261,6 @@
               <a:t>1.23%
 </a:t>
             </a:r>
-            <a:pPr indent="0" marL="0">
-              <a:lnSpc>
-                <a:spcPts val="1700"/>
-              </a:lnSpc>
-              <a:buNone/>
-            </a:pPr>
             <a:r>
               <a:rPr lang="en-US" sz="1100" dirty="0">
                 <a:solidFill>
@@ -12387,7 +12324,7 @@
           <a:bodyPr wrap="square" lIns="0" tIns="0" rIns="0" bIns="0" rtlCol="0" anchor="t"/>
           <a:lstStyle/>
           <a:p>
-            <a:pPr indent="0" marL="0">
+            <a:pPr marL="0" indent="0">
               <a:lnSpc>
                 <a:spcPts val="1700"/>
               </a:lnSpc>
@@ -12405,12 +12342,6 @@
               <a:t>51.72%
 </a:t>
             </a:r>
-            <a:pPr indent="0" marL="0">
-              <a:lnSpc>
-                <a:spcPts val="1700"/>
-              </a:lnSpc>
-              <a:buNone/>
-            </a:pPr>
             <a:r>
               <a:rPr lang="en-US" sz="1100" dirty="0">
                 <a:solidFill>
@@ -12474,7 +12405,7 @@
           <a:bodyPr wrap="square" lIns="0" tIns="0" rIns="0" bIns="0" rtlCol="0" anchor="ctr"/>
           <a:lstStyle/>
           <a:p>
-            <a:pPr indent="0" marL="0">
+            <a:pPr marL="0" indent="0">
               <a:lnSpc>
                 <a:spcPts val="1600"/>
               </a:lnSpc>
@@ -12516,7 +12447,7 @@
           <a:bodyPr wrap="square" lIns="0" tIns="0" rIns="0" bIns="0" rtlCol="0" anchor="ctr"/>
           <a:lstStyle/>
           <a:p>
-            <a:pPr indent="0" marL="0">
+            <a:pPr marL="0" indent="0">
               <a:buNone/>
             </a:pPr>
             <a:r>
@@ -12555,7 +12486,7 @@
           <a:bodyPr wrap="square" lIns="0" tIns="0" rIns="0" bIns="0" rtlCol="0" anchor="ctr"/>
           <a:lstStyle/>
           <a:p>
-            <a:pPr algn="r" indent="0" marL="0">
+            <a:pPr marL="0" indent="0" algn="r">
               <a:buNone/>
             </a:pPr>
             <a:r>
@@ -12589,6 +12520,7 @@
         <a:solidFill>
           <a:srgbClr val="F7F8FA"/>
         </a:solidFill>
+        <a:effectLst/>
       </p:bgPr>
     </p:bg>
     <p:spTree>
@@ -12626,11 +12558,11 @@
           <a:bodyPr wrap="square" lIns="0" tIns="0" rIns="0" bIns="0" rtlCol="0" anchor="ctr"/>
           <a:lstStyle/>
           <a:p>
-            <a:pPr indent="0" marL="0">
-              <a:buNone/>
-            </a:pPr>
-            <a:r>
-              <a:rPr lang="en-US" sz="1050" b="1" spc="160" kern="0" dirty="0">
+            <a:pPr marL="0" indent="0">
+              <a:buNone/>
+            </a:pPr>
+            <a:r>
+              <a:rPr lang="en-US" sz="1050" b="1" kern="0" spc="160" dirty="0">
                 <a:solidFill>
                   <a:srgbClr val="D03B3B"/>
                 </a:solidFill>
@@ -12665,7 +12597,7 @@
           <a:bodyPr wrap="square" lIns="0" tIns="0" rIns="0" bIns="0" rtlCol="0" anchor="t"/>
           <a:lstStyle/>
           <a:p>
-            <a:pPr indent="0" marL="0">
+            <a:pPr marL="0" indent="0">
               <a:buNone/>
             </a:pPr>
             <a:r>
@@ -12685,7 +12617,7 @@
       </p:sp>
       <p:graphicFrame>
         <p:nvGraphicFramePr>
-          <p:cNvPr id="4" name="Chart 0" descr=""/>
+          <p:cNvPr id="4" name="Chart 0"/>
           <p:cNvGraphicFramePr/>
           <p:nvPr/>
         </p:nvGraphicFramePr>
@@ -12693,9 +12625,9 @@
           <a:off x="475488" y="1371600"/>
           <a:ext cx="6858000" cy="3931920"/>
         </p:xfrm>
-        <a:graphic xmlns:a="http://schemas.openxmlformats.org/drawingml/2006/main">
+        <a:graphic>
           <a:graphicData uri="http://schemas.openxmlformats.org/drawingml/2006/chart">
-            <c:chart xmlns:c="http://schemas.openxmlformats.org/drawingml/2006/chart" r:id="rId1"/>
+            <c:chart xmlns:c="http://schemas.openxmlformats.org/drawingml/2006/chart" xmlns:r="http://schemas.openxmlformats.org/officeDocument/2006/relationships" r:id="rId3"/>
           </a:graphicData>
         </a:graphic>
       </p:graphicFrame>
@@ -12720,7 +12652,7 @@
           <a:bodyPr wrap="square" lIns="0" tIns="0" rIns="0" bIns="0" rtlCol="0" anchor="ctr"/>
           <a:lstStyle/>
           <a:p>
-            <a:pPr indent="0" marL="0">
+            <a:pPr marL="0" indent="0">
               <a:buNone/>
             </a:pPr>
             <a:r>
@@ -12764,7 +12696,7 @@
             <a:prstDash val="solid"/>
           </a:ln>
           <a:effectLst>
-            <a:outerShdw sx="100000" sy="100000" kx="0" ky="0" algn="bl" rotWithShape="0" blurRad="101600" dist="12700" dir="5400000">
+            <a:outerShdw blurRad="101600" dist="12700" dir="5400000" algn="bl" rotWithShape="0">
               <a:srgbClr val="9AA5B1">
                 <a:alpha val="18000"/>
               </a:srgbClr>
@@ -12793,7 +12725,7 @@
           <a:bodyPr wrap="square" lIns="0" tIns="0" rIns="0" bIns="0" rtlCol="0" anchor="ctr"/>
           <a:lstStyle/>
           <a:p>
-            <a:pPr algn="ctr" indent="0" marL="0">
+            <a:pPr marL="0" indent="0" algn="ctr">
               <a:buNone/>
             </a:pPr>
             <a:r>
@@ -12832,7 +12764,7 @@
           <a:bodyPr wrap="square" lIns="0" tIns="0" rIns="0" bIns="0" rtlCol="0" anchor="t"/>
           <a:lstStyle/>
           <a:p>
-            <a:pPr algn="ctr" indent="0" marL="0">
+            <a:pPr marL="0" indent="0" algn="ctr">
               <a:buNone/>
             </a:pPr>
             <a:r>
@@ -12876,7 +12808,7 @@
             <a:prstDash val="solid"/>
           </a:ln>
           <a:effectLst>
-            <a:outerShdw sx="100000" sy="100000" kx="0" ky="0" algn="bl" rotWithShape="0" blurRad="101600" dist="12700" dir="5400000">
+            <a:outerShdw blurRad="101600" dist="12700" dir="5400000" algn="bl" rotWithShape="0">
               <a:srgbClr val="9AA5B1">
                 <a:alpha val="18000"/>
               </a:srgbClr>
@@ -12905,7 +12837,7 @@
           <a:bodyPr wrap="square" lIns="0" tIns="0" rIns="0" bIns="0" rtlCol="0" anchor="ctr"/>
           <a:lstStyle/>
           <a:p>
-            <a:pPr algn="ctr" indent="0" marL="0">
+            <a:pPr marL="0" indent="0" algn="ctr">
               <a:buNone/>
             </a:pPr>
             <a:r>
@@ -12944,7 +12876,7 @@
           <a:bodyPr wrap="square" lIns="0" tIns="0" rIns="0" bIns="0" rtlCol="0" anchor="t"/>
           <a:lstStyle/>
           <a:p>
-            <a:pPr algn="ctr" indent="0" marL="0">
+            <a:pPr marL="0" indent="0" algn="ctr">
               <a:buNone/>
             </a:pPr>
             <a:r>
@@ -12988,7 +12920,7 @@
             <a:prstDash val="solid"/>
           </a:ln>
           <a:effectLst>
-            <a:outerShdw sx="100000" sy="100000" kx="0" ky="0" algn="bl" rotWithShape="0" blurRad="101600" dist="12700" dir="5400000">
+            <a:outerShdw blurRad="101600" dist="12700" dir="5400000" algn="bl" rotWithShape="0">
               <a:srgbClr val="9AA5B1">
                 <a:alpha val="18000"/>
               </a:srgbClr>
@@ -13017,7 +12949,7 @@
           <a:bodyPr wrap="square" lIns="0" tIns="0" rIns="0" bIns="0" rtlCol="0" anchor="ctr"/>
           <a:lstStyle/>
           <a:p>
-            <a:pPr algn="ctr" indent="0" marL="0">
+            <a:pPr marL="0" indent="0" algn="ctr">
               <a:buNone/>
             </a:pPr>
             <a:r>
@@ -13056,7 +12988,7 @@
           <a:bodyPr wrap="square" lIns="0" tIns="0" rIns="0" bIns="0" rtlCol="0" anchor="t"/>
           <a:lstStyle/>
           <a:p>
-            <a:pPr algn="ctr" indent="0" marL="0">
+            <a:pPr marL="0" indent="0" algn="ctr">
               <a:buNone/>
             </a:pPr>
             <a:r>
@@ -13122,7 +13054,7 @@
           <a:bodyPr wrap="square" lIns="0" tIns="0" rIns="0" bIns="0" rtlCol="0" anchor="ctr"/>
           <a:lstStyle/>
           <a:p>
-            <a:pPr indent="0" marL="0">
+            <a:pPr marL="0" indent="0">
               <a:lnSpc>
                 <a:spcPts val="1700"/>
               </a:lnSpc>
@@ -13164,7 +13096,7 @@
           <a:bodyPr wrap="square" lIns="0" tIns="0" rIns="0" bIns="0" rtlCol="0" anchor="ctr"/>
           <a:lstStyle/>
           <a:p>
-            <a:pPr indent="0" marL="0">
+            <a:pPr marL="0" indent="0">
               <a:buNone/>
             </a:pPr>
             <a:r>
@@ -13203,7 +13135,7 @@
           <a:bodyPr wrap="square" lIns="0" tIns="0" rIns="0" bIns="0" rtlCol="0" anchor="ctr"/>
           <a:lstStyle/>
           <a:p>
-            <a:pPr algn="r" indent="0" marL="0">
+            <a:pPr marL="0" indent="0" algn="r">
               <a:buNone/>
             </a:pPr>
             <a:r>
@@ -13237,6 +13169,7 @@
         <a:solidFill>
           <a:srgbClr val="0D1B2A"/>
         </a:solidFill>
+        <a:effectLst/>
       </p:bgPr>
     </p:bg>
     <p:spTree>
@@ -13274,11 +13207,11 @@
           <a:bodyPr wrap="square" lIns="0" tIns="0" rIns="0" bIns="0" rtlCol="0" anchor="ctr"/>
           <a:lstStyle/>
           <a:p>
-            <a:pPr indent="0" marL="0">
-              <a:buNone/>
-            </a:pPr>
-            <a:r>
-              <a:rPr lang="en-US" sz="1100" b="1" spc="180" kern="0" dirty="0">
+            <a:pPr marL="0" indent="0">
+              <a:buNone/>
+            </a:pPr>
+            <a:r>
+              <a:rPr lang="en-US" sz="1100" b="1" kern="0" spc="180" dirty="0">
                 <a:solidFill>
                   <a:srgbClr val="D03B3B"/>
                 </a:solidFill>
@@ -13313,7 +13246,7 @@
           <a:bodyPr wrap="square" lIns="0" tIns="0" rIns="0" bIns="0" rtlCol="0" anchor="ctr"/>
           <a:lstStyle/>
           <a:p>
-            <a:pPr indent="0" marL="0">
+            <a:pPr marL="0" indent="0">
               <a:buNone/>
             </a:pPr>
             <a:r>
@@ -13379,7 +13312,7 @@
           <a:bodyPr wrap="square" lIns="0" tIns="0" rIns="0" bIns="0" rtlCol="0" anchor="ctr"/>
           <a:lstStyle/>
           <a:p>
-            <a:pPr indent="0" marL="0">
+            <a:pPr marL="0" indent="0">
               <a:buNone/>
             </a:pPr>
             <a:r>
@@ -13418,7 +13351,7 @@
           <a:bodyPr wrap="square" lIns="0" tIns="0" rIns="0" bIns="0" rtlCol="0" anchor="t"/>
           <a:lstStyle/>
           <a:p>
-            <a:pPr indent="0" marL="0">
+            <a:pPr marL="0" indent="0">
               <a:lnSpc>
                 <a:spcPts val="1400"/>
               </a:lnSpc>
@@ -13487,7 +13420,7 @@
           <a:bodyPr wrap="square" lIns="0" tIns="0" rIns="0" bIns="0" rtlCol="0" anchor="ctr"/>
           <a:lstStyle/>
           <a:p>
-            <a:pPr indent="0" marL="0">
+            <a:pPr marL="0" indent="0">
               <a:buNone/>
             </a:pPr>
             <a:r>
@@ -13526,7 +13459,7 @@
           <a:bodyPr wrap="square" lIns="0" tIns="0" rIns="0" bIns="0" rtlCol="0" anchor="t"/>
           <a:lstStyle/>
           <a:p>
-            <a:pPr indent="0" marL="0">
+            <a:pPr marL="0" indent="0">
               <a:lnSpc>
                 <a:spcPts val="1400"/>
               </a:lnSpc>
@@ -13595,7 +13528,7 @@
           <a:bodyPr wrap="square" lIns="0" tIns="0" rIns="0" bIns="0" rtlCol="0" anchor="ctr"/>
           <a:lstStyle/>
           <a:p>
-            <a:pPr indent="0" marL="0">
+            <a:pPr marL="0" indent="0">
               <a:buNone/>
             </a:pPr>
             <a:r>
@@ -13634,7 +13567,7 @@
           <a:bodyPr wrap="square" lIns="0" tIns="0" rIns="0" bIns="0" rtlCol="0" anchor="t"/>
           <a:lstStyle/>
           <a:p>
-            <a:pPr indent="0" marL="0">
+            <a:pPr marL="0" indent="0">
               <a:lnSpc>
                 <a:spcPts val="1400"/>
               </a:lnSpc>
@@ -13703,7 +13636,7 @@
           <a:bodyPr wrap="square" lIns="0" tIns="0" rIns="0" bIns="0" rtlCol="0" anchor="ctr"/>
           <a:lstStyle/>
           <a:p>
-            <a:pPr indent="0" marL="0">
+            <a:pPr marL="0" indent="0">
               <a:buNone/>
             </a:pPr>
             <a:r>
@@ -13742,7 +13675,7 @@
           <a:bodyPr wrap="square" lIns="0" tIns="0" rIns="0" bIns="0" rtlCol="0" anchor="t"/>
           <a:lstStyle/>
           <a:p>
-            <a:pPr indent="0" marL="0">
+            <a:pPr marL="0" indent="0">
               <a:lnSpc>
                 <a:spcPts val="1400"/>
               </a:lnSpc>
@@ -13811,7 +13744,7 @@
           <a:bodyPr wrap="square" lIns="0" tIns="0" rIns="0" bIns="0" rtlCol="0" anchor="ctr"/>
           <a:lstStyle/>
           <a:p>
-            <a:pPr indent="0" marL="0">
+            <a:pPr marL="0" indent="0">
               <a:buNone/>
             </a:pPr>
             <a:r>
@@ -13850,7 +13783,7 @@
           <a:bodyPr wrap="square" lIns="0" tIns="0" rIns="0" bIns="0" rtlCol="0" anchor="t"/>
           <a:lstStyle/>
           <a:p>
-            <a:pPr indent="0" marL="0">
+            <a:pPr marL="0" indent="0">
               <a:lnSpc>
                 <a:spcPts val="1400"/>
               </a:lnSpc>
@@ -13919,7 +13852,7 @@
           <a:bodyPr wrap="square" lIns="0" tIns="0" rIns="0" bIns="0" rtlCol="0" anchor="ctr"/>
           <a:lstStyle/>
           <a:p>
-            <a:pPr indent="0" marL="0">
+            <a:pPr marL="0" indent="0">
               <a:buNone/>
             </a:pPr>
             <a:r>
@@ -13958,7 +13891,7 @@
           <a:bodyPr wrap="square" lIns="0" tIns="0" rIns="0" bIns="0" rtlCol="0" anchor="t"/>
           <a:lstStyle/>
           <a:p>
-            <a:pPr indent="0" marL="0">
+            <a:pPr marL="0" indent="0">
               <a:lnSpc>
                 <a:spcPts val="1400"/>
               </a:lnSpc>
@@ -14000,7 +13933,7 @@
           <a:bodyPr wrap="square" lIns="0" tIns="0" rIns="0" bIns="0" rtlCol="0" anchor="t"/>
           <a:lstStyle/>
           <a:p>
-            <a:pPr indent="0" marL="0">
+            <a:pPr marL="0" indent="0">
               <a:buNone/>
             </a:pPr>
             <a:r>
@@ -14039,7 +13972,7 @@
           <a:bodyPr wrap="square" lIns="0" tIns="0" rIns="0" bIns="0" rtlCol="0" anchor="ctr"/>
           <a:lstStyle/>
           <a:p>
-            <a:pPr indent="0" marL="0">
+            <a:pPr marL="0" indent="0">
               <a:buNone/>
             </a:pPr>
             <a:r>
@@ -14078,7 +14011,7 @@
           <a:bodyPr wrap="square" lIns="0" tIns="0" rIns="0" bIns="0" rtlCol="0" anchor="ctr"/>
           <a:lstStyle/>
           <a:p>
-            <a:pPr algn="r" indent="0" marL="0">
+            <a:pPr marL="0" indent="0" algn="r">
               <a:buNone/>
             </a:pPr>
             <a:r>
@@ -14112,6 +14045,7 @@
         <a:solidFill>
           <a:srgbClr val="0D1B2A"/>
         </a:solidFill>
+        <a:effectLst/>
       </p:bgPr>
     </p:bg>
     <p:spTree>
@@ -14149,7 +14083,7 @@
           <a:bodyPr wrap="square" lIns="0" tIns="0" rIns="0" bIns="0" rtlCol="0" anchor="ctr"/>
           <a:lstStyle/>
           <a:p>
-            <a:pPr indent="0" marL="0">
+            <a:pPr marL="0" indent="0">
               <a:buNone/>
             </a:pPr>
             <a:r>
@@ -14188,7 +14122,7 @@
           <a:bodyPr wrap="square" lIns="0" tIns="0" rIns="0" bIns="0" rtlCol="0" anchor="ctr"/>
           <a:lstStyle/>
           <a:p>
-            <a:pPr indent="0" marL="0">
+            <a:pPr marL="0" indent="0">
               <a:buNone/>
             </a:pPr>
             <a:r>
@@ -14254,7 +14188,7 @@
           <a:bodyPr wrap="square" lIns="0" tIns="0" rIns="0" bIns="0" rtlCol="0" anchor="ctr"/>
           <a:lstStyle/>
           <a:p>
-            <a:pPr indent="0" marL="0">
+            <a:pPr marL="0" indent="0">
               <a:buNone/>
             </a:pPr>
             <a:r>
@@ -14293,7 +14227,7 @@
           <a:bodyPr wrap="square" lIns="0" tIns="0" rIns="0" bIns="0" rtlCol="0" anchor="t"/>
           <a:lstStyle/>
           <a:p>
-            <a:pPr indent="0" marL="0">
+            <a:pPr marL="0" indent="0">
               <a:lnSpc>
                 <a:spcPts val="2000"/>
               </a:lnSpc>
@@ -14313,7 +14247,7 @@
             <a:endParaRPr lang="en-US" sz="1250" dirty="0"/>
           </a:p>
           <a:p>
-            <a:pPr indent="0" marL="0">
+            <a:pPr marL="0" indent="0">
               <a:lnSpc>
                 <a:spcPts val="2000"/>
               </a:lnSpc>
@@ -14333,7 +14267,7 @@
             <a:endParaRPr lang="en-US" sz="1250" dirty="0"/>
           </a:p>
           <a:p>
-            <a:pPr indent="0" marL="0">
+            <a:pPr marL="0" indent="0">
               <a:lnSpc>
                 <a:spcPts val="2000"/>
               </a:lnSpc>
@@ -14402,7 +14336,7 @@
           <a:bodyPr wrap="square" lIns="0" tIns="0" rIns="0" bIns="0" rtlCol="0" anchor="ctr"/>
           <a:lstStyle/>
           <a:p>
-            <a:pPr indent="0" marL="0">
+            <a:pPr marL="0" indent="0">
               <a:buNone/>
             </a:pPr>
             <a:r>
@@ -14441,7 +14375,7 @@
           <a:bodyPr wrap="square" lIns="0" tIns="0" rIns="0" bIns="0" rtlCol="0" anchor="t"/>
           <a:lstStyle/>
           <a:p>
-            <a:pPr indent="0" marL="0">
+            <a:pPr marL="0" indent="0">
               <a:lnSpc>
                 <a:spcPts val="1800"/>
               </a:lnSpc>
@@ -14461,7 +14395,7 @@
             <a:endParaRPr lang="en-US" sz="1250" dirty="0"/>
           </a:p>
           <a:p>
-            <a:pPr indent="0" marL="0">
+            <a:pPr marL="0" indent="0">
               <a:lnSpc>
                 <a:spcPts val="1800"/>
               </a:lnSpc>
@@ -14470,7 +14404,7 @@
             <a:endParaRPr lang="en-US" sz="1250" dirty="0"/>
           </a:p>
           <a:p>
-            <a:pPr indent="0" marL="0">
+            <a:pPr marL="0" indent="0">
               <a:lnSpc>
                 <a:spcPts val="1800"/>
               </a:lnSpc>
@@ -14490,7 +14424,7 @@
             <a:endParaRPr lang="en-US" sz="1250" dirty="0"/>
           </a:p>
           <a:p>
-            <a:pPr indent="0" marL="0">
+            <a:pPr marL="0" indent="0">
               <a:lnSpc>
                 <a:spcPts val="1800"/>
               </a:lnSpc>
@@ -14532,7 +14466,7 @@
           <a:bodyPr wrap="square" lIns="0" tIns="0" rIns="0" bIns="0" rtlCol="0" anchor="ctr"/>
           <a:lstStyle/>
           <a:p>
-            <a:pPr indent="0" marL="0">
+            <a:pPr marL="0" indent="0">
               <a:buNone/>
             </a:pPr>
             <a:r>
@@ -14571,7 +14505,7 @@
           <a:bodyPr wrap="square" lIns="0" tIns="0" rIns="0" bIns="0" rtlCol="0" anchor="t"/>
           <a:lstStyle/>
           <a:p>
-            <a:pPr indent="0" marL="0">
+            <a:pPr marL="0" indent="0">
               <a:lnSpc>
                 <a:spcPts val="1800"/>
               </a:lnSpc>
@@ -14640,7 +14574,7 @@
           <a:bodyPr wrap="square" lIns="0" tIns="0" rIns="0" bIns="0" rtlCol="0" anchor="ctr"/>
           <a:lstStyle/>
           <a:p>
-            <a:pPr indent="0" marL="0">
+            <a:pPr marL="0" indent="0">
               <a:lnSpc>
                 <a:spcPts val="2200"/>
               </a:lnSpc>
@@ -14682,7 +14616,7 @@
           <a:bodyPr wrap="square" lIns="0" tIns="0" rIns="0" bIns="0" rtlCol="0" anchor="ctr"/>
           <a:lstStyle/>
           <a:p>
-            <a:pPr indent="0" marL="0">
+            <a:pPr marL="0" indent="0">
               <a:buNone/>
             </a:pPr>
             <a:r>
@@ -14721,7 +14655,7 @@
           <a:bodyPr wrap="square" lIns="0" tIns="0" rIns="0" bIns="0" rtlCol="0" anchor="ctr"/>
           <a:lstStyle/>
           <a:p>
-            <a:pPr algn="r" indent="0" marL="0">
+            <a:pPr marL="0" indent="0" algn="r">
               <a:buNone/>
             </a:pPr>
             <a:r>
@@ -14755,6 +14689,7 @@
         <a:solidFill>
           <a:srgbClr val="F7F8FA"/>
         </a:solidFill>
+        <a:effectLst/>
       </p:bgPr>
     </p:bg>
     <p:spTree>
@@ -14792,11 +14727,11 @@
           <a:bodyPr wrap="square" lIns="0" tIns="0" rIns="0" bIns="0" rtlCol="0" anchor="ctr"/>
           <a:lstStyle/>
           <a:p>
-            <a:pPr indent="0" marL="0">
-              <a:buNone/>
-            </a:pPr>
-            <a:r>
-              <a:rPr lang="en-US" sz="1050" b="1" spc="160" kern="0" dirty="0">
+            <a:pPr marL="0" indent="0">
+              <a:buNone/>
+            </a:pPr>
+            <a:r>
+              <a:rPr lang="en-US" sz="1050" b="1" kern="0" spc="160" dirty="0">
                 <a:solidFill>
                   <a:srgbClr val="D03B3B"/>
                 </a:solidFill>
@@ -14831,7 +14766,7 @@
           <a:bodyPr wrap="square" lIns="0" tIns="0" rIns="0" bIns="0" rtlCol="0" anchor="t"/>
           <a:lstStyle/>
           <a:p>
-            <a:pPr indent="0" marL="0">
+            <a:pPr marL="0" indent="0">
               <a:buNone/>
             </a:pPr>
             <a:r>
@@ -15039,7 +14974,7 @@
           <a:bodyPr wrap="square" lIns="0" tIns="0" rIns="0" bIns="0" rtlCol="0" anchor="ctr"/>
           <a:lstStyle/>
           <a:p>
-            <a:pPr indent="0" marL="0">
+            <a:pPr marL="0" indent="0">
               <a:buNone/>
             </a:pPr>
             <a:r>
@@ -15078,7 +15013,7 @@
           <a:bodyPr wrap="square" lIns="0" tIns="0" rIns="0" bIns="0" rtlCol="0" anchor="t"/>
           <a:lstStyle/>
           <a:p>
-            <a:pPr indent="0" marL="0">
+            <a:pPr marL="0" indent="0">
               <a:lnSpc>
                 <a:spcPts val="1900"/>
               </a:lnSpc>
@@ -15099,7 +15034,7 @@
             <a:endParaRPr lang="en-US" sz="1300" dirty="0"/>
           </a:p>
           <a:p>
-            <a:pPr indent="0" marL="0">
+            <a:pPr marL="0" indent="0">
               <a:lnSpc>
                 <a:spcPts val="1900"/>
               </a:lnSpc>
@@ -15120,7 +15055,7 @@
             <a:endParaRPr lang="en-US" sz="1300" dirty="0"/>
           </a:p>
           <a:p>
-            <a:pPr indent="0" marL="0">
+            <a:pPr marL="0" indent="0">
               <a:lnSpc>
                 <a:spcPts val="1900"/>
               </a:lnSpc>
@@ -15162,7 +15097,7 @@
           <a:bodyPr wrap="square" lIns="0" tIns="0" rIns="0" bIns="0" rtlCol="0" anchor="ctr"/>
           <a:lstStyle/>
           <a:p>
-            <a:pPr indent="0" marL="0">
+            <a:pPr marL="0" indent="0">
               <a:buNone/>
             </a:pPr>
             <a:r>
@@ -15201,7 +15136,7 @@
           <a:bodyPr wrap="square" lIns="0" tIns="0" rIns="0" bIns="0" rtlCol="0" anchor="ctr"/>
           <a:lstStyle/>
           <a:p>
-            <a:pPr algn="r" indent="0" marL="0">
+            <a:pPr marL="0" indent="0" algn="r">
               <a:buNone/>
             </a:pPr>
             <a:r>
@@ -15235,6 +15170,7 @@
         <a:solidFill>
           <a:srgbClr val="0D1B2A"/>
         </a:solidFill>
+        <a:effectLst/>
       </p:bgPr>
     </p:bg>
     <p:spTree>
@@ -15272,11 +15208,11 @@
           <a:bodyPr wrap="square" lIns="0" tIns="0" rIns="0" bIns="0" rtlCol="0" anchor="ctr"/>
           <a:lstStyle/>
           <a:p>
-            <a:pPr indent="0" marL="0">
-              <a:buNone/>
-            </a:pPr>
-            <a:r>
-              <a:rPr lang="en-US" sz="1100" b="1" spc="180" kern="0" dirty="0">
+            <a:pPr marL="0" indent="0">
+              <a:buNone/>
+            </a:pPr>
+            <a:r>
+              <a:rPr lang="en-US" sz="1100" b="1" kern="0" spc="180" dirty="0">
                 <a:solidFill>
                   <a:srgbClr val="D03B3B"/>
                 </a:solidFill>
@@ -15311,7 +15247,7 @@
           <a:bodyPr wrap="square" lIns="0" tIns="0" rIns="0" bIns="0" rtlCol="0" anchor="t"/>
           <a:lstStyle/>
           <a:p>
-            <a:pPr indent="0" marL="0">
+            <a:pPr marL="0" indent="0">
               <a:lnSpc>
                 <a:spcPts val="4000"/>
               </a:lnSpc>
@@ -15353,7 +15289,7 @@
           <a:bodyPr wrap="square" lIns="0" tIns="0" rIns="0" bIns="0" rtlCol="0" anchor="t"/>
           <a:lstStyle/>
           <a:p>
-            <a:pPr indent="0" marL="0">
+            <a:pPr marL="0" indent="0">
               <a:lnSpc>
                 <a:spcPts val="2600"/>
               </a:lnSpc>
@@ -15422,7 +15358,7 @@
           <a:bodyPr wrap="square" lIns="0" tIns="0" rIns="0" bIns="0" rtlCol="0" anchor="ctr"/>
           <a:lstStyle/>
           <a:p>
-            <a:pPr indent="0" marL="0">
+            <a:pPr marL="0" indent="0">
               <a:buNone/>
             </a:pPr>
             <a:r>
@@ -15461,7 +15397,7 @@
           <a:bodyPr wrap="square" lIns="0" tIns="0" rIns="0" bIns="0" rtlCol="0" anchor="ctr"/>
           <a:lstStyle/>
           <a:p>
-            <a:pPr indent="0" marL="0">
+            <a:pPr marL="0" indent="0">
               <a:buNone/>
             </a:pPr>
             <a:r>
@@ -15500,7 +15436,7 @@
           <a:bodyPr wrap="square" lIns="0" tIns="0" rIns="0" bIns="0" rtlCol="0" anchor="ctr"/>
           <a:lstStyle/>
           <a:p>
-            <a:pPr algn="r" indent="0" marL="0">
+            <a:pPr marL="0" indent="0" algn="r">
               <a:buNone/>
             </a:pPr>
             <a:r>
@@ -15534,6 +15470,7 @@
         <a:solidFill>
           <a:srgbClr val="F7F8FA"/>
         </a:solidFill>
+        <a:effectLst/>
       </p:bgPr>
     </p:bg>
     <p:spTree>
@@ -15571,11 +15508,11 @@
           <a:bodyPr wrap="square" lIns="0" tIns="0" rIns="0" bIns="0" rtlCol="0" anchor="ctr"/>
           <a:lstStyle/>
           <a:p>
-            <a:pPr indent="0" marL="0">
-              <a:buNone/>
-            </a:pPr>
-            <a:r>
-              <a:rPr lang="en-US" sz="1050" b="1" spc="160" kern="0" dirty="0">
+            <a:pPr marL="0" indent="0">
+              <a:buNone/>
+            </a:pPr>
+            <a:r>
+              <a:rPr lang="en-US" sz="1050" b="1" kern="0" spc="160" dirty="0">
                 <a:solidFill>
                   <a:srgbClr val="D03B3B"/>
                 </a:solidFill>
@@ -15610,7 +15547,7 @@
           <a:bodyPr wrap="square" lIns="0" tIns="0" rIns="0" bIns="0" rtlCol="0" anchor="t"/>
           <a:lstStyle/>
           <a:p>
-            <a:pPr indent="0" marL="0">
+            <a:pPr marL="0" indent="0">
               <a:buNone/>
             </a:pPr>
             <a:r>
@@ -15654,7 +15591,7 @@
             <a:prstDash val="solid"/>
           </a:ln>
           <a:effectLst>
-            <a:outerShdw sx="100000" sy="100000" kx="0" ky="0" algn="bl" rotWithShape="0" blurRad="101600" dist="12700" dir="5400000">
+            <a:outerShdw blurRad="101600" dist="12700" dir="5400000" algn="bl" rotWithShape="0">
               <a:srgbClr val="9AA5B1">
                 <a:alpha val="18000"/>
               </a:srgbClr>
@@ -15683,7 +15620,7 @@
           <a:bodyPr wrap="square" lIns="0" tIns="0" rIns="0" bIns="0" rtlCol="0" anchor="ctr"/>
           <a:lstStyle/>
           <a:p>
-            <a:pPr algn="ctr" indent="0" marL="0">
+            <a:pPr marL="0" indent="0" algn="ctr">
               <a:buNone/>
             </a:pPr>
             <a:r>
@@ -15722,7 +15659,7 @@
           <a:bodyPr wrap="square" lIns="0" tIns="0" rIns="0" bIns="0" rtlCol="0" anchor="t"/>
           <a:lstStyle/>
           <a:p>
-            <a:pPr algn="ctr" indent="0" marL="0">
+            <a:pPr marL="0" indent="0" algn="ctr">
               <a:buNone/>
             </a:pPr>
             <a:r>
@@ -15766,7 +15703,7 @@
             <a:prstDash val="solid"/>
           </a:ln>
           <a:effectLst>
-            <a:outerShdw sx="100000" sy="100000" kx="0" ky="0" algn="bl" rotWithShape="0" blurRad="101600" dist="12700" dir="5400000">
+            <a:outerShdw blurRad="101600" dist="12700" dir="5400000" algn="bl" rotWithShape="0">
               <a:srgbClr val="9AA5B1">
                 <a:alpha val="18000"/>
               </a:srgbClr>
@@ -15795,7 +15732,7 @@
           <a:bodyPr wrap="square" lIns="0" tIns="0" rIns="0" bIns="0" rtlCol="0" anchor="ctr"/>
           <a:lstStyle/>
           <a:p>
-            <a:pPr algn="ctr" indent="0" marL="0">
+            <a:pPr marL="0" indent="0" algn="ctr">
               <a:buNone/>
             </a:pPr>
             <a:r>
@@ -15834,7 +15771,7 @@
           <a:bodyPr wrap="square" lIns="0" tIns="0" rIns="0" bIns="0" rtlCol="0" anchor="t"/>
           <a:lstStyle/>
           <a:p>
-            <a:pPr algn="ctr" indent="0" marL="0">
+            <a:pPr marL="0" indent="0" algn="ctr">
               <a:buNone/>
             </a:pPr>
             <a:r>
@@ -15878,7 +15815,7 @@
             <a:prstDash val="solid"/>
           </a:ln>
           <a:effectLst>
-            <a:outerShdw sx="100000" sy="100000" kx="0" ky="0" algn="bl" rotWithShape="0" blurRad="101600" dist="12700" dir="5400000">
+            <a:outerShdw blurRad="101600" dist="12700" dir="5400000" algn="bl" rotWithShape="0">
               <a:srgbClr val="9AA5B1">
                 <a:alpha val="18000"/>
               </a:srgbClr>
@@ -15907,7 +15844,7 @@
           <a:bodyPr wrap="square" lIns="0" tIns="0" rIns="0" bIns="0" rtlCol="0" anchor="ctr"/>
           <a:lstStyle/>
           <a:p>
-            <a:pPr algn="ctr" indent="0" marL="0">
+            <a:pPr marL="0" indent="0" algn="ctr">
               <a:buNone/>
             </a:pPr>
             <a:r>
@@ -15946,7 +15883,7 @@
           <a:bodyPr wrap="square" lIns="0" tIns="0" rIns="0" bIns="0" rtlCol="0" anchor="t"/>
           <a:lstStyle/>
           <a:p>
-            <a:pPr algn="ctr" indent="0" marL="0">
+            <a:pPr marL="0" indent="0" algn="ctr">
               <a:buNone/>
             </a:pPr>
             <a:r>
@@ -15990,7 +15927,7 @@
             <a:prstDash val="solid"/>
           </a:ln>
           <a:effectLst>
-            <a:outerShdw sx="100000" sy="100000" kx="0" ky="0" algn="bl" rotWithShape="0" blurRad="101600" dist="12700" dir="5400000">
+            <a:outerShdw blurRad="101600" dist="12700" dir="5400000" algn="bl" rotWithShape="0">
               <a:srgbClr val="9AA5B1">
                 <a:alpha val="18000"/>
               </a:srgbClr>
@@ -16019,7 +15956,7 @@
           <a:bodyPr wrap="square" lIns="0" tIns="0" rIns="0" bIns="0" rtlCol="0" anchor="ctr"/>
           <a:lstStyle/>
           <a:p>
-            <a:pPr algn="ctr" indent="0" marL="0">
+            <a:pPr marL="0" indent="0" algn="ctr">
               <a:buNone/>
             </a:pPr>
             <a:r>
@@ -16058,7 +15995,7 @@
           <a:bodyPr wrap="square" lIns="0" tIns="0" rIns="0" bIns="0" rtlCol="0" anchor="t"/>
           <a:lstStyle/>
           <a:p>
-            <a:pPr algn="ctr" indent="0" marL="0">
+            <a:pPr marL="0" indent="0" algn="ctr">
               <a:buNone/>
             </a:pPr>
             <a:r>
@@ -16097,7 +16034,7 @@
           <a:bodyPr wrap="square" lIns="0" tIns="0" rIns="0" bIns="0" rtlCol="0" anchor="ctr"/>
           <a:lstStyle/>
           <a:p>
-            <a:pPr indent="0" marL="0">
+            <a:pPr marL="0" indent="0">
               <a:buNone/>
             </a:pPr>
             <a:r>
@@ -16230,7 +16167,7 @@
           <a:bodyPr wrap="square" lIns="0" tIns="0" rIns="0" bIns="0" rtlCol="0" anchor="ctr"/>
           <a:lstStyle/>
           <a:p>
-            <a:pPr indent="0" marL="0">
+            <a:pPr marL="0" indent="0">
               <a:buNone/>
             </a:pPr>
             <a:r>
@@ -16269,7 +16206,7 @@
           <a:bodyPr wrap="square" lIns="0" tIns="0" rIns="0" bIns="0" rtlCol="0" anchor="t"/>
           <a:lstStyle/>
           <a:p>
-            <a:pPr indent="0" marL="0">
+            <a:pPr marL="0" indent="0">
               <a:lnSpc>
                 <a:spcPts val="1700"/>
               </a:lnSpc>
@@ -16290,7 +16227,7 @@
             <a:endParaRPr lang="en-US" sz="1250" dirty="0"/>
           </a:p>
           <a:p>
-            <a:pPr indent="0" marL="0">
+            <a:pPr marL="0" indent="0">
               <a:lnSpc>
                 <a:spcPts val="1700"/>
               </a:lnSpc>
@@ -16311,7 +16248,7 @@
             <a:endParaRPr lang="en-US" sz="1250" dirty="0"/>
           </a:p>
           <a:p>
-            <a:pPr indent="0" marL="0">
+            <a:pPr marL="0" indent="0">
               <a:lnSpc>
                 <a:spcPts val="1700"/>
               </a:lnSpc>
@@ -16353,7 +16290,7 @@
           <a:bodyPr wrap="square" lIns="0" tIns="0" rIns="0" bIns="0" rtlCol="0" anchor="ctr"/>
           <a:lstStyle/>
           <a:p>
-            <a:pPr indent="0" marL="0">
+            <a:pPr marL="0" indent="0">
               <a:buNone/>
             </a:pPr>
             <a:r>
@@ -16392,7 +16329,7 @@
           <a:bodyPr wrap="square" lIns="0" tIns="0" rIns="0" bIns="0" rtlCol="0" anchor="ctr"/>
           <a:lstStyle/>
           <a:p>
-            <a:pPr algn="r" indent="0" marL="0">
+            <a:pPr marL="0" indent="0" algn="r">
               <a:buNone/>
             </a:pPr>
             <a:r>
@@ -16426,6 +16363,7 @@
         <a:solidFill>
           <a:srgbClr val="F7F8FA"/>
         </a:solidFill>
+        <a:effectLst/>
       </p:bgPr>
     </p:bg>
     <p:spTree>
@@ -16463,11 +16401,11 @@
           <a:bodyPr wrap="square" lIns="0" tIns="0" rIns="0" bIns="0" rtlCol="0" anchor="ctr"/>
           <a:lstStyle/>
           <a:p>
-            <a:pPr indent="0" marL="0">
-              <a:buNone/>
-            </a:pPr>
-            <a:r>
-              <a:rPr lang="en-US" sz="1050" b="1" spc="160" kern="0" dirty="0">
+            <a:pPr marL="0" indent="0">
+              <a:buNone/>
+            </a:pPr>
+            <a:r>
+              <a:rPr lang="en-US" sz="1050" b="1" kern="0" spc="160" dirty="0">
                 <a:solidFill>
                   <a:srgbClr val="D03B3B"/>
                 </a:solidFill>
@@ -16502,7 +16440,7 @@
           <a:bodyPr wrap="square" lIns="0" tIns="0" rIns="0" bIns="0" rtlCol="0" anchor="t"/>
           <a:lstStyle/>
           <a:p>
-            <a:pPr indent="0" marL="0">
+            <a:pPr marL="0" indent="0">
               <a:buNone/>
             </a:pPr>
             <a:r>
@@ -16546,7 +16484,7 @@
             <a:prstDash val="solid"/>
           </a:ln>
           <a:effectLst>
-            <a:outerShdw sx="100000" sy="100000" kx="0" ky="0" algn="bl" rotWithShape="0" blurRad="101600" dist="12700" dir="5400000">
+            <a:outerShdw blurRad="101600" dist="12700" dir="5400000" algn="bl" rotWithShape="0">
               <a:srgbClr val="9AA5B1">
                 <a:alpha val="16000"/>
               </a:srgbClr>
@@ -16600,7 +16538,7 @@
           <a:bodyPr wrap="square" lIns="0" tIns="0" rIns="0" bIns="0" rtlCol="0" anchor="ctr"/>
           <a:lstStyle/>
           <a:p>
-            <a:pPr algn="ctr" indent="0" marL="0">
+            <a:pPr marL="0" indent="0" algn="ctr">
               <a:buNone/>
             </a:pPr>
             <a:r>
@@ -16639,11 +16577,11 @@
           <a:bodyPr wrap="square" lIns="0" tIns="0" rIns="0" bIns="0" rtlCol="0" anchor="ctr"/>
           <a:lstStyle/>
           <a:p>
-            <a:pPr indent="0" marL="0">
-              <a:buNone/>
-            </a:pPr>
-            <a:r>
-              <a:rPr lang="en-US" sz="1200" b="1" spc="120" kern="0" dirty="0">
+            <a:pPr marL="0" indent="0">
+              <a:buNone/>
+            </a:pPr>
+            <a:r>
+              <a:rPr lang="en-US" sz="1200" b="1" kern="0" spc="120" dirty="0">
                 <a:solidFill>
                   <a:srgbClr val="2A78D6"/>
                 </a:solidFill>
@@ -16678,7 +16616,7 @@
           <a:bodyPr wrap="square" lIns="0" tIns="0" rIns="0" bIns="0" rtlCol="0" anchor="ctr"/>
           <a:lstStyle/>
           <a:p>
-            <a:pPr indent="0" marL="0">
+            <a:pPr marL="0" indent="0">
               <a:buNone/>
             </a:pPr>
             <a:r>
@@ -16717,7 +16655,7 @@
           <a:bodyPr wrap="square" lIns="0" tIns="0" rIns="0" bIns="0" rtlCol="0" anchor="t"/>
           <a:lstStyle/>
           <a:p>
-            <a:pPr indent="0" marL="0">
+            <a:pPr marL="0" indent="0">
               <a:lnSpc>
                 <a:spcPts val="1700"/>
               </a:lnSpc>
@@ -16737,7 +16675,7 @@
             <a:endParaRPr lang="en-US" sz="1250" dirty="0"/>
           </a:p>
           <a:p>
-            <a:pPr indent="0" marL="0">
+            <a:pPr marL="0" indent="0">
               <a:lnSpc>
                 <a:spcPts val="1700"/>
               </a:lnSpc>
@@ -16746,7 +16684,7 @@
             <a:endParaRPr lang="en-US" sz="1250" dirty="0"/>
           </a:p>
           <a:p>
-            <a:pPr indent="0" marL="0">
+            <a:pPr marL="0" indent="0">
               <a:lnSpc>
                 <a:spcPts val="1700"/>
               </a:lnSpc>
@@ -16788,7 +16726,7 @@
           <a:bodyPr wrap="square" lIns="0" tIns="0" rIns="0" bIns="0" rtlCol="0" anchor="t"/>
           <a:lstStyle/>
           <a:p>
-            <a:pPr indent="0" marL="0">
+            <a:pPr marL="0" indent="0">
               <a:lnSpc>
                 <a:spcPts val="1600"/>
               </a:lnSpc>
@@ -16835,7 +16773,7 @@
             <a:prstDash val="solid"/>
           </a:ln>
           <a:effectLst>
-            <a:outerShdw sx="100000" sy="100000" kx="0" ky="0" algn="bl" rotWithShape="0" blurRad="101600" dist="12700" dir="5400000">
+            <a:outerShdw blurRad="101600" dist="12700" dir="5400000" algn="bl" rotWithShape="0">
               <a:srgbClr val="9AA5B1">
                 <a:alpha val="16000"/>
               </a:srgbClr>
@@ -16889,7 +16827,7 @@
           <a:bodyPr wrap="square" lIns="0" tIns="0" rIns="0" bIns="0" rtlCol="0" anchor="ctr"/>
           <a:lstStyle/>
           <a:p>
-            <a:pPr algn="ctr" indent="0" marL="0">
+            <a:pPr marL="0" indent="0" algn="ctr">
               <a:buNone/>
             </a:pPr>
             <a:r>
@@ -16928,11 +16866,11 @@
           <a:bodyPr wrap="square" lIns="0" tIns="0" rIns="0" bIns="0" rtlCol="0" anchor="ctr"/>
           <a:lstStyle/>
           <a:p>
-            <a:pPr indent="0" marL="0">
-              <a:buNone/>
-            </a:pPr>
-            <a:r>
-              <a:rPr lang="en-US" sz="1200" b="1" spc="120" kern="0" dirty="0">
+            <a:pPr marL="0" indent="0">
+              <a:buNone/>
+            </a:pPr>
+            <a:r>
+              <a:rPr lang="en-US" sz="1200" b="1" kern="0" spc="120" dirty="0">
                 <a:solidFill>
                   <a:srgbClr val="EB6834"/>
                 </a:solidFill>
@@ -16967,7 +16905,7 @@
           <a:bodyPr wrap="square" lIns="0" tIns="0" rIns="0" bIns="0" rtlCol="0" anchor="ctr"/>
           <a:lstStyle/>
           <a:p>
-            <a:pPr indent="0" marL="0">
+            <a:pPr marL="0" indent="0">
               <a:buNone/>
             </a:pPr>
             <a:r>
@@ -17006,7 +16944,7 @@
           <a:bodyPr wrap="square" lIns="0" tIns="0" rIns="0" bIns="0" rtlCol="0" anchor="t"/>
           <a:lstStyle/>
           <a:p>
-            <a:pPr indent="0" marL="0">
+            <a:pPr marL="0" indent="0">
               <a:lnSpc>
                 <a:spcPts val="1700"/>
               </a:lnSpc>
@@ -17026,7 +16964,7 @@
             <a:endParaRPr lang="en-US" sz="1250" dirty="0"/>
           </a:p>
           <a:p>
-            <a:pPr indent="0" marL="0">
+            <a:pPr marL="0" indent="0">
               <a:lnSpc>
                 <a:spcPts val="1700"/>
               </a:lnSpc>
@@ -17035,7 +16973,7 @@
             <a:endParaRPr lang="en-US" sz="1250" dirty="0"/>
           </a:p>
           <a:p>
-            <a:pPr indent="0" marL="0">
+            <a:pPr marL="0" indent="0">
               <a:lnSpc>
                 <a:spcPts val="1700"/>
               </a:lnSpc>
@@ -17077,7 +17015,7 @@
           <a:bodyPr wrap="square" lIns="0" tIns="0" rIns="0" bIns="0" rtlCol="0" anchor="t"/>
           <a:lstStyle/>
           <a:p>
-            <a:pPr indent="0" marL="0">
+            <a:pPr marL="0" indent="0">
               <a:lnSpc>
                 <a:spcPts val="1600"/>
               </a:lnSpc>
@@ -17146,11 +17084,11 @@
           <a:bodyPr wrap="square" lIns="0" tIns="0" rIns="0" bIns="0" rtlCol="0" anchor="ctr"/>
           <a:lstStyle/>
           <a:p>
-            <a:pPr indent="0" marL="0">
-              <a:buNone/>
-            </a:pPr>
-            <a:r>
-              <a:rPr lang="en-US" sz="1200" b="1" spc="110" kern="0" dirty="0">
+            <a:pPr marL="0" indent="0">
+              <a:buNone/>
+            </a:pPr>
+            <a:r>
+              <a:rPr lang="en-US" sz="1200" b="1" kern="0" spc="110" dirty="0">
                 <a:solidFill>
                   <a:srgbClr val="D03B3B"/>
                 </a:solidFill>
@@ -17185,7 +17123,7 @@
           <a:bodyPr wrap="square" lIns="0" tIns="0" rIns="0" bIns="0" rtlCol="0" anchor="t"/>
           <a:lstStyle/>
           <a:p>
-            <a:pPr indent="0" marL="0">
+            <a:pPr marL="0" indent="0">
               <a:lnSpc>
                 <a:spcPts val="1900"/>
               </a:lnSpc>
@@ -17227,7 +17165,7 @@
           <a:bodyPr wrap="square" lIns="0" tIns="0" rIns="0" bIns="0" rtlCol="0" anchor="ctr"/>
           <a:lstStyle/>
           <a:p>
-            <a:pPr indent="0" marL="0">
+            <a:pPr marL="0" indent="0">
               <a:buNone/>
             </a:pPr>
             <a:r>
@@ -17266,7 +17204,7 @@
           <a:bodyPr wrap="square" lIns="0" tIns="0" rIns="0" bIns="0" rtlCol="0" anchor="ctr"/>
           <a:lstStyle/>
           <a:p>
-            <a:pPr algn="r" indent="0" marL="0">
+            <a:pPr marL="0" indent="0" algn="r">
               <a:buNone/>
             </a:pPr>
             <a:r>
@@ -17300,6 +17238,7 @@
         <a:solidFill>
           <a:srgbClr val="F7F8FA"/>
         </a:solidFill>
+        <a:effectLst/>
       </p:bgPr>
     </p:bg>
     <p:spTree>
@@ -17337,11 +17276,11 @@
           <a:bodyPr wrap="square" lIns="0" tIns="0" rIns="0" bIns="0" rtlCol="0" anchor="ctr"/>
           <a:lstStyle/>
           <a:p>
-            <a:pPr indent="0" marL="0">
-              <a:buNone/>
-            </a:pPr>
-            <a:r>
-              <a:rPr lang="en-US" sz="1050" b="1" spc="160" kern="0" dirty="0">
+            <a:pPr marL="0" indent="0">
+              <a:buNone/>
+            </a:pPr>
+            <a:r>
+              <a:rPr lang="en-US" sz="1050" b="1" kern="0" spc="160" dirty="0">
                 <a:solidFill>
                   <a:srgbClr val="D03B3B"/>
                 </a:solidFill>
@@ -17376,7 +17315,7 @@
           <a:bodyPr wrap="square" lIns="0" tIns="0" rIns="0" bIns="0" rtlCol="0" anchor="t"/>
           <a:lstStyle/>
           <a:p>
-            <a:pPr indent="0" marL="0">
+            <a:pPr marL="0" indent="0">
               <a:buNone/>
             </a:pPr>
             <a:r>
@@ -17396,7 +17335,7 @@
       </p:sp>
       <p:graphicFrame>
         <p:nvGraphicFramePr>
-          <p:cNvPr id="4" name="Chart 0" descr=""/>
+          <p:cNvPr id="4" name="Chart 0"/>
           <p:cNvGraphicFramePr/>
           <p:nvPr/>
         </p:nvGraphicFramePr>
@@ -17404,9 +17343,9 @@
           <a:off x="475488" y="1371600"/>
           <a:ext cx="6858000" cy="3931920"/>
         </p:xfrm>
-        <a:graphic xmlns:a="http://schemas.openxmlformats.org/drawingml/2006/main">
+        <a:graphic>
           <a:graphicData uri="http://schemas.openxmlformats.org/drawingml/2006/chart">
-            <c:chart xmlns:c="http://schemas.openxmlformats.org/drawingml/2006/chart" r:id="rId1"/>
+            <c:chart xmlns:c="http://schemas.openxmlformats.org/drawingml/2006/chart" xmlns:r="http://schemas.openxmlformats.org/officeDocument/2006/relationships" r:id="rId3"/>
           </a:graphicData>
         </a:graphic>
       </p:graphicFrame>
@@ -17436,7 +17375,7 @@
             <a:prstDash val="solid"/>
           </a:ln>
           <a:effectLst>
-            <a:outerShdw sx="100000" sy="100000" kx="0" ky="0" algn="bl" rotWithShape="0" blurRad="101600" dist="12700" dir="5400000">
+            <a:outerShdw blurRad="101600" dist="12700" dir="5400000" algn="bl" rotWithShape="0">
               <a:srgbClr val="9AA5B1">
                 <a:alpha val="18000"/>
               </a:srgbClr>
@@ -17465,7 +17404,7 @@
           <a:bodyPr wrap="square" lIns="0" tIns="0" rIns="0" bIns="0" rtlCol="0" anchor="ctr"/>
           <a:lstStyle/>
           <a:p>
-            <a:pPr algn="ctr" indent="0" marL="0">
+            <a:pPr marL="0" indent="0" algn="ctr">
               <a:buNone/>
             </a:pPr>
             <a:r>
@@ -17504,7 +17443,7 @@
           <a:bodyPr wrap="square" lIns="0" tIns="0" rIns="0" bIns="0" rtlCol="0" anchor="t"/>
           <a:lstStyle/>
           <a:p>
-            <a:pPr algn="ctr" indent="0" marL="0">
+            <a:pPr marL="0" indent="0" algn="ctr">
               <a:buNone/>
             </a:pPr>
             <a:r>
@@ -17548,7 +17487,7 @@
             <a:prstDash val="solid"/>
           </a:ln>
           <a:effectLst>
-            <a:outerShdw sx="100000" sy="100000" kx="0" ky="0" algn="bl" rotWithShape="0" blurRad="101600" dist="12700" dir="5400000">
+            <a:outerShdw blurRad="101600" dist="12700" dir="5400000" algn="bl" rotWithShape="0">
               <a:srgbClr val="9AA5B1">
                 <a:alpha val="18000"/>
               </a:srgbClr>
@@ -17577,7 +17516,7 @@
           <a:bodyPr wrap="square" lIns="0" tIns="0" rIns="0" bIns="0" rtlCol="0" anchor="ctr"/>
           <a:lstStyle/>
           <a:p>
-            <a:pPr algn="ctr" indent="0" marL="0">
+            <a:pPr marL="0" indent="0" algn="ctr">
               <a:buNone/>
             </a:pPr>
             <a:r>
@@ -17616,7 +17555,7 @@
           <a:bodyPr wrap="square" lIns="0" tIns="0" rIns="0" bIns="0" rtlCol="0" anchor="t"/>
           <a:lstStyle/>
           <a:p>
-            <a:pPr algn="ctr" indent="0" marL="0">
+            <a:pPr marL="0" indent="0" algn="ctr">
               <a:buNone/>
             </a:pPr>
             <a:r>
@@ -17660,7 +17599,7 @@
             <a:prstDash val="solid"/>
           </a:ln>
           <a:effectLst>
-            <a:outerShdw sx="100000" sy="100000" kx="0" ky="0" algn="bl" rotWithShape="0" blurRad="101600" dist="12700" dir="5400000">
+            <a:outerShdw blurRad="101600" dist="12700" dir="5400000" algn="bl" rotWithShape="0">
               <a:srgbClr val="9AA5B1">
                 <a:alpha val="18000"/>
               </a:srgbClr>
@@ -17689,7 +17628,7 @@
           <a:bodyPr wrap="square" lIns="0" tIns="0" rIns="0" bIns="0" rtlCol="0" anchor="ctr"/>
           <a:lstStyle/>
           <a:p>
-            <a:pPr algn="ctr" indent="0" marL="0">
+            <a:pPr marL="0" indent="0" algn="ctr">
               <a:buNone/>
             </a:pPr>
             <a:r>
@@ -17728,7 +17667,7 @@
           <a:bodyPr wrap="square" lIns="0" tIns="0" rIns="0" bIns="0" rtlCol="0" anchor="t"/>
           <a:lstStyle/>
           <a:p>
-            <a:pPr algn="ctr" indent="0" marL="0">
+            <a:pPr marL="0" indent="0" algn="ctr">
               <a:buNone/>
             </a:pPr>
             <a:r>
@@ -17794,7 +17733,7 @@
           <a:bodyPr wrap="square" lIns="0" tIns="0" rIns="0" bIns="0" rtlCol="0" anchor="ctr"/>
           <a:lstStyle/>
           <a:p>
-            <a:pPr indent="0" marL="0">
+            <a:pPr marL="0" indent="0">
               <a:lnSpc>
                 <a:spcPts val="2000"/>
               </a:lnSpc>
@@ -17836,7 +17775,7 @@
           <a:bodyPr wrap="square" lIns="0" tIns="0" rIns="0" bIns="0" rtlCol="0" anchor="ctr"/>
           <a:lstStyle/>
           <a:p>
-            <a:pPr indent="0" marL="0">
+            <a:pPr marL="0" indent="0">
               <a:buNone/>
             </a:pPr>
             <a:r>
@@ -17875,7 +17814,7 @@
           <a:bodyPr wrap="square" lIns="0" tIns="0" rIns="0" bIns="0" rtlCol="0" anchor="ctr"/>
           <a:lstStyle/>
           <a:p>
-            <a:pPr algn="r" indent="0" marL="0">
+            <a:pPr marL="0" indent="0" algn="r">
               <a:buNone/>
             </a:pPr>
             <a:r>
@@ -17909,6 +17848,7 @@
         <a:solidFill>
           <a:srgbClr val="F7F8FA"/>
         </a:solidFill>
+        <a:effectLst/>
       </p:bgPr>
     </p:bg>
     <p:spTree>
@@ -17946,11 +17886,11 @@
           <a:bodyPr wrap="square" lIns="0" tIns="0" rIns="0" bIns="0" rtlCol="0" anchor="ctr"/>
           <a:lstStyle/>
           <a:p>
-            <a:pPr indent="0" marL="0">
-              <a:buNone/>
-            </a:pPr>
-            <a:r>
-              <a:rPr lang="en-US" sz="1050" b="1" spc="160" kern="0" dirty="0">
+            <a:pPr marL="0" indent="0">
+              <a:buNone/>
+            </a:pPr>
+            <a:r>
+              <a:rPr lang="en-US" sz="1050" b="1" kern="0" spc="160" dirty="0">
                 <a:solidFill>
                   <a:srgbClr val="D03B3B"/>
                 </a:solidFill>
@@ -17985,7 +17925,7 @@
           <a:bodyPr wrap="square" lIns="0" tIns="0" rIns="0" bIns="0" rtlCol="0" anchor="t"/>
           <a:lstStyle/>
           <a:p>
-            <a:pPr indent="0" marL="0">
+            <a:pPr marL="0" indent="0">
               <a:buNone/>
             </a:pPr>
             <a:r>
@@ -18005,7 +17945,7 @@
       </p:sp>
       <p:graphicFrame>
         <p:nvGraphicFramePr>
-          <p:cNvPr id="4" name="Chart 0" descr=""/>
+          <p:cNvPr id="4" name="Chart 0"/>
           <p:cNvGraphicFramePr/>
           <p:nvPr/>
         </p:nvGraphicFramePr>
@@ -18013,9 +17953,9 @@
           <a:off x="475488" y="1371600"/>
           <a:ext cx="7040880" cy="3977640"/>
         </p:xfrm>
-        <a:graphic xmlns:a="http://schemas.openxmlformats.org/drawingml/2006/main">
+        <a:graphic>
           <a:graphicData uri="http://schemas.openxmlformats.org/drawingml/2006/chart">
-            <c:chart xmlns:c="http://schemas.openxmlformats.org/drawingml/2006/chart" r:id="rId1"/>
+            <c:chart xmlns:c="http://schemas.openxmlformats.org/drawingml/2006/chart" xmlns:r="http://schemas.openxmlformats.org/officeDocument/2006/relationships" r:id="rId3"/>
           </a:graphicData>
         </a:graphic>
       </p:graphicFrame>
@@ -18040,7 +17980,7 @@
           <a:bodyPr wrap="square" lIns="0" tIns="0" rIns="0" bIns="0" rtlCol="0" anchor="ctr"/>
           <a:lstStyle/>
           <a:p>
-            <a:pPr indent="0" marL="0">
+            <a:pPr marL="0" indent="0">
               <a:buNone/>
             </a:pPr>
             <a:r>
@@ -18106,7 +18046,7 @@
           <a:bodyPr wrap="square" lIns="0" tIns="0" rIns="0" bIns="0" rtlCol="0" anchor="ctr"/>
           <a:lstStyle/>
           <a:p>
-            <a:pPr indent="0" marL="0">
+            <a:pPr marL="0" indent="0">
               <a:buNone/>
             </a:pPr>
             <a:r>
@@ -18145,7 +18085,7 @@
           <a:bodyPr wrap="square" lIns="0" tIns="0" rIns="0" bIns="0" rtlCol="0" anchor="ctr"/>
           <a:lstStyle/>
           <a:p>
-            <a:pPr indent="0" marL="0">
+            <a:pPr marL="0" indent="0">
               <a:buNone/>
             </a:pPr>
             <a:r>
@@ -18159,9 +18099,6 @@
               </a:rPr>
               <a:t>0.915</a:t>
             </a:r>
-            <a:pPr indent="0" marL="0">
-              <a:buNone/>
-            </a:pPr>
             <a:r>
               <a:rPr lang="en-US" sz="1600" dirty="0">
                 <a:solidFill>
@@ -18170,9 +18107,6 @@
               </a:rPr>
               <a:t>   →   </a:t>
             </a:r>
-            <a:pPr indent="0" marL="0">
-              <a:buNone/>
-            </a:pPr>
             <a:r>
               <a:rPr lang="en-US" sz="3200" b="1" dirty="0">
                 <a:solidFill>
@@ -18209,7 +18143,7 @@
           <a:bodyPr wrap="square" lIns="0" tIns="0" rIns="0" bIns="0" rtlCol="0" anchor="t"/>
           <a:lstStyle/>
           <a:p>
-            <a:pPr indent="0" marL="0">
+            <a:pPr marL="0" indent="0">
               <a:lnSpc>
                 <a:spcPts val="1600"/>
               </a:lnSpc>
@@ -18278,7 +18212,7 @@
           <a:bodyPr wrap="square" lIns="0" tIns="0" rIns="0" bIns="0" rtlCol="0" anchor="ctr"/>
           <a:lstStyle/>
           <a:p>
-            <a:pPr indent="0" marL="0">
+            <a:pPr marL="0" indent="0">
               <a:buNone/>
             </a:pPr>
             <a:r>
@@ -18317,7 +18251,7 @@
           <a:bodyPr wrap="square" lIns="0" tIns="0" rIns="0" bIns="0" rtlCol="0" anchor="ctr"/>
           <a:lstStyle/>
           <a:p>
-            <a:pPr indent="0" marL="0">
+            <a:pPr marL="0" indent="0">
               <a:buNone/>
             </a:pPr>
             <a:r>
@@ -18331,9 +18265,6 @@
               </a:rPr>
               <a:t>0.780</a:t>
             </a:r>
-            <a:pPr indent="0" marL="0">
-              <a:buNone/>
-            </a:pPr>
             <a:r>
               <a:rPr lang="en-US" sz="1600" dirty="0">
                 <a:solidFill>
@@ -18342,9 +18273,6 @@
               </a:rPr>
               <a:t>   →   </a:t>
             </a:r>
-            <a:pPr indent="0" marL="0">
-              <a:buNone/>
-            </a:pPr>
             <a:r>
               <a:rPr lang="en-US" sz="3200" b="1" dirty="0">
                 <a:solidFill>
@@ -18381,7 +18309,7 @@
           <a:bodyPr wrap="square" lIns="0" tIns="0" rIns="0" bIns="0" rtlCol="0" anchor="t"/>
           <a:lstStyle/>
           <a:p>
-            <a:pPr indent="0" marL="0">
+            <a:pPr marL="0" indent="0">
               <a:lnSpc>
                 <a:spcPts val="1600"/>
               </a:lnSpc>
@@ -18423,7 +18351,7 @@
           <a:bodyPr wrap="square" lIns="0" tIns="0" rIns="0" bIns="0" rtlCol="0" anchor="ctr"/>
           <a:lstStyle/>
           <a:p>
-            <a:pPr indent="0" marL="0">
+            <a:pPr marL="0" indent="0">
               <a:buNone/>
             </a:pPr>
             <a:r>
@@ -18462,7 +18390,7 @@
           <a:bodyPr wrap="square" lIns="0" tIns="0" rIns="0" bIns="0" rtlCol="0" anchor="ctr"/>
           <a:lstStyle/>
           <a:p>
-            <a:pPr algn="r" indent="0" marL="0">
+            <a:pPr marL="0" indent="0" algn="r">
               <a:buNone/>
             </a:pPr>
             <a:r>
@@ -18496,6 +18424,7 @@
         <a:solidFill>
           <a:srgbClr val="F7F8FA"/>
         </a:solidFill>
+        <a:effectLst/>
       </p:bgPr>
     </p:bg>
     <p:spTree>
@@ -18533,11 +18462,11 @@
           <a:bodyPr wrap="square" lIns="0" tIns="0" rIns="0" bIns="0" rtlCol="0" anchor="ctr"/>
           <a:lstStyle/>
           <a:p>
-            <a:pPr indent="0" marL="0">
-              <a:buNone/>
-            </a:pPr>
-            <a:r>
-              <a:rPr lang="en-US" sz="1050" b="1" spc="160" kern="0" dirty="0">
+            <a:pPr marL="0" indent="0">
+              <a:buNone/>
+            </a:pPr>
+            <a:r>
+              <a:rPr lang="en-US" sz="1050" b="1" kern="0" spc="160" dirty="0">
                 <a:solidFill>
                   <a:srgbClr val="D03B3B"/>
                 </a:solidFill>
@@ -18572,7 +18501,7 @@
           <a:bodyPr wrap="square" lIns="0" tIns="0" rIns="0" bIns="0" rtlCol="0" anchor="t"/>
           <a:lstStyle/>
           <a:p>
-            <a:pPr indent="0" marL="0">
+            <a:pPr marL="0" indent="0">
               <a:buNone/>
             </a:pPr>
             <a:r>
@@ -18592,7 +18521,7 @@
       </p:sp>
       <p:graphicFrame>
         <p:nvGraphicFramePr>
-          <p:cNvPr id="4" name="Chart 0" descr=""/>
+          <p:cNvPr id="4" name="Chart 0"/>
           <p:cNvGraphicFramePr/>
           <p:nvPr/>
         </p:nvGraphicFramePr>
@@ -18600,9 +18529,9 @@
           <a:off x="475488" y="1371600"/>
           <a:ext cx="7040880" cy="3931920"/>
         </p:xfrm>
-        <a:graphic xmlns:a="http://schemas.openxmlformats.org/drawingml/2006/main">
+        <a:graphic>
           <a:graphicData uri="http://schemas.openxmlformats.org/drawingml/2006/chart">
-            <c:chart xmlns:c="http://schemas.openxmlformats.org/drawingml/2006/chart" r:id="rId1"/>
+            <c:chart xmlns:c="http://schemas.openxmlformats.org/drawingml/2006/chart" xmlns:r="http://schemas.openxmlformats.org/officeDocument/2006/relationships" r:id="rId3"/>
           </a:graphicData>
         </a:graphic>
       </p:graphicFrame>
@@ -18632,7 +18561,7 @@
             <a:prstDash val="solid"/>
           </a:ln>
           <a:effectLst>
-            <a:outerShdw sx="100000" sy="100000" kx="0" ky="0" algn="bl" rotWithShape="0" blurRad="101600" dist="12700" dir="5400000">
+            <a:outerShdw blurRad="101600" dist="12700" dir="5400000" algn="bl" rotWithShape="0">
               <a:srgbClr val="9AA5B1">
                 <a:alpha val="18000"/>
               </a:srgbClr>
@@ -18661,7 +18590,7 @@
           <a:bodyPr wrap="square" lIns="0" tIns="0" rIns="0" bIns="0" rtlCol="0" anchor="ctr"/>
           <a:lstStyle/>
           <a:p>
-            <a:pPr algn="ctr" indent="0" marL="0">
+            <a:pPr marL="0" indent="0" algn="ctr">
               <a:buNone/>
             </a:pPr>
             <a:r>
@@ -18700,7 +18629,7 @@
           <a:bodyPr wrap="square" lIns="0" tIns="0" rIns="0" bIns="0" rtlCol="0" anchor="t"/>
           <a:lstStyle/>
           <a:p>
-            <a:pPr algn="ctr" indent="0" marL="0">
+            <a:pPr marL="0" indent="0" algn="ctr">
               <a:buNone/>
             </a:pPr>
             <a:r>
@@ -18744,7 +18673,7 @@
             <a:prstDash val="solid"/>
           </a:ln>
           <a:effectLst>
-            <a:outerShdw sx="100000" sy="100000" kx="0" ky="0" algn="bl" rotWithShape="0" blurRad="101600" dist="12700" dir="5400000">
+            <a:outerShdw blurRad="101600" dist="12700" dir="5400000" algn="bl" rotWithShape="0">
               <a:srgbClr val="9AA5B1">
                 <a:alpha val="18000"/>
               </a:srgbClr>
@@ -18773,7 +18702,7 @@
           <a:bodyPr wrap="square" lIns="0" tIns="0" rIns="0" bIns="0" rtlCol="0" anchor="ctr"/>
           <a:lstStyle/>
           <a:p>
-            <a:pPr algn="ctr" indent="0" marL="0">
+            <a:pPr marL="0" indent="0" algn="ctr">
               <a:buNone/>
             </a:pPr>
             <a:r>
@@ -18812,7 +18741,7 @@
           <a:bodyPr wrap="square" lIns="0" tIns="0" rIns="0" bIns="0" rtlCol="0" anchor="t"/>
           <a:lstStyle/>
           <a:p>
-            <a:pPr algn="ctr" indent="0" marL="0">
+            <a:pPr marL="0" indent="0" algn="ctr">
               <a:buNone/>
             </a:pPr>
             <a:r>
@@ -18878,7 +18807,7 @@
           <a:bodyPr wrap="square" lIns="0" tIns="0" rIns="0" bIns="0" rtlCol="0" anchor="ctr"/>
           <a:lstStyle/>
           <a:p>
-            <a:pPr indent="0" marL="0">
+            <a:pPr marL="0" indent="0">
               <a:lnSpc>
                 <a:spcPts val="1900"/>
               </a:lnSpc>
@@ -18920,7 +18849,7 @@
           <a:bodyPr wrap="square" lIns="0" tIns="0" rIns="0" bIns="0" rtlCol="0" anchor="ctr"/>
           <a:lstStyle/>
           <a:p>
-            <a:pPr indent="0" marL="0">
+            <a:pPr marL="0" indent="0">
               <a:buNone/>
             </a:pPr>
             <a:r>
@@ -18959,7 +18888,7 @@
           <a:bodyPr wrap="square" lIns="0" tIns="0" rIns="0" bIns="0" rtlCol="0" anchor="ctr"/>
           <a:lstStyle/>
           <a:p>
-            <a:pPr algn="r" indent="0" marL="0">
+            <a:pPr marL="0" indent="0" algn="r">
               <a:buNone/>
             </a:pPr>
             <a:r>
@@ -18993,6 +18922,7 @@
         <a:solidFill>
           <a:srgbClr val="0D1B2A"/>
         </a:solidFill>
+        <a:effectLst/>
       </p:bgPr>
     </p:bg>
     <p:spTree>
@@ -19030,11 +18960,11 @@
           <a:bodyPr wrap="square" lIns="0" tIns="0" rIns="0" bIns="0" rtlCol="0" anchor="ctr"/>
           <a:lstStyle/>
           <a:p>
-            <a:pPr indent="0" marL="0">
-              <a:buNone/>
-            </a:pPr>
-            <a:r>
-              <a:rPr lang="en-US" sz="1100" b="1" spc="180" kern="0" dirty="0">
+            <a:pPr marL="0" indent="0">
+              <a:buNone/>
+            </a:pPr>
+            <a:r>
+              <a:rPr lang="en-US" sz="1100" b="1" kern="0" spc="180" dirty="0">
                 <a:solidFill>
                   <a:srgbClr val="D03B3B"/>
                 </a:solidFill>
@@ -19069,7 +18999,7 @@
           <a:bodyPr wrap="square" lIns="0" tIns="0" rIns="0" bIns="0" rtlCol="0" anchor="t"/>
           <a:lstStyle/>
           <a:p>
-            <a:pPr indent="0" marL="0">
+            <a:pPr marL="0" indent="0">
               <a:lnSpc>
                 <a:spcPts val="3600"/>
               </a:lnSpc>
@@ -19092,14 +19022,14 @@
       </p:sp>
       <p:pic>
         <p:nvPicPr>
-          <p:cNvPr id="4" name="Image 0" descr="/home/claude/mlbubble/reports/figures/fig4_novel_vs_seen.png">    </p:cNvPr>
+          <p:cNvPr id="4" name="Image 0" descr="/home/claude/mlbubble/reports/figures/fig4_novel_vs_seen.png"/>
           <p:cNvPicPr>
             <a:picLocks noChangeAspect="1"/>
           </p:cNvPicPr>
           <p:nvPr/>
         </p:nvPicPr>
         <p:blipFill>
-          <a:blip r:embed="rId1"/>
+          <a:blip r:embed="rId3"/>
           <a:stretch>
             <a:fillRect/>
           </a:stretch>
@@ -19162,7 +19092,7 @@
           <a:bodyPr wrap="square" lIns="0" tIns="0" rIns="0" bIns="0" rtlCol="0" anchor="t"/>
           <a:lstStyle/>
           <a:p>
-            <a:pPr indent="0" marL="0">
+            <a:pPr marL="0" indent="0">
               <a:lnSpc>
                 <a:spcPts val="2000"/>
               </a:lnSpc>
@@ -19180,12 +19110,6 @@
               <a:t>76.7%
 </a:t>
             </a:r>
-            <a:pPr indent="0" marL="0">
-              <a:lnSpc>
-                <a:spcPts val="2000"/>
-              </a:lnSpc>
-              <a:buNone/>
-            </a:pPr>
             <a:r>
               <a:rPr lang="en-US" sz="1200" dirty="0">
                 <a:solidFill>
@@ -19249,7 +19173,7 @@
           <a:bodyPr wrap="square" lIns="0" tIns="0" rIns="0" bIns="0" rtlCol="0" anchor="t"/>
           <a:lstStyle/>
           <a:p>
-            <a:pPr indent="0" marL="0">
+            <a:pPr marL="0" indent="0">
               <a:lnSpc>
                 <a:spcPts val="2000"/>
               </a:lnSpc>
@@ -19267,12 +19191,6 @@
               <a:t>18.6%
 </a:t>
             </a:r>
-            <a:pPr indent="0" marL="0">
-              <a:lnSpc>
-                <a:spcPts val="2000"/>
-              </a:lnSpc>
-              <a:buNone/>
-            </a:pPr>
             <a:r>
               <a:rPr lang="en-US" sz="1200" dirty="0">
                 <a:solidFill>
@@ -19309,7 +19227,7 @@
           <a:bodyPr wrap="square" lIns="0" tIns="0" rIns="0" bIns="0" rtlCol="0" anchor="t"/>
           <a:lstStyle/>
           <a:p>
-            <a:pPr indent="0" marL="0">
+            <a:pPr marL="0" indent="0">
               <a:lnSpc>
                 <a:spcPts val="2100"/>
               </a:lnSpc>
@@ -19351,7 +19269,7 @@
           <a:bodyPr wrap="square" lIns="0" tIns="0" rIns="0" bIns="0" rtlCol="0" anchor="ctr"/>
           <a:lstStyle/>
           <a:p>
-            <a:pPr indent="0" marL="0">
+            <a:pPr marL="0" indent="0">
               <a:buNone/>
             </a:pPr>
             <a:r>
@@ -19390,7 +19308,7 @@
           <a:bodyPr wrap="square" lIns="0" tIns="0" rIns="0" bIns="0" rtlCol="0" anchor="ctr"/>
           <a:lstStyle/>
           <a:p>
-            <a:pPr algn="r" indent="0" marL="0">
+            <a:pPr marL="0" indent="0" algn="r">
               <a:buNone/>
             </a:pPr>
             <a:r>
@@ -19709,4 +19627,321 @@
     </a:ext>
   </a:extLst>
 </a:theme>
+</file>
+
+<file path=ppt/theme/theme2.xml><?xml version="1.0" encoding="utf-8"?>
+<a:theme xmlns:a="http://schemas.openxmlformats.org/drawingml/2006/main" name="Office Theme">
+  <a:themeElements>
+    <a:clrScheme name="Office">
+      <a:dk1>
+        <a:sysClr val="windowText" lastClr="000000"/>
+      </a:dk1>
+      <a:lt1>
+        <a:sysClr val="window" lastClr="FFFFFF"/>
+      </a:lt1>
+      <a:dk2>
+        <a:srgbClr val="44546A"/>
+      </a:dk2>
+      <a:lt2>
+        <a:srgbClr val="E7E6E6"/>
+      </a:lt2>
+      <a:accent1>
+        <a:srgbClr val="4472C4"/>
+      </a:accent1>
+      <a:accent2>
+        <a:srgbClr val="ED7D31"/>
+      </a:accent2>
+      <a:accent3>
+        <a:srgbClr val="A5A5A5"/>
+      </a:accent3>
+      <a:accent4>
+        <a:srgbClr val="FFC000"/>
+      </a:accent4>
+      <a:accent5>
+        <a:srgbClr val="5B9BD5"/>
+      </a:accent5>
+      <a:accent6>
+        <a:srgbClr val="70AD47"/>
+      </a:accent6>
+      <a:hlink>
+        <a:srgbClr val="0563C1"/>
+      </a:hlink>
+      <a:folHlink>
+        <a:srgbClr val="954F72"/>
+      </a:folHlink>
+    </a:clrScheme>
+    <a:fontScheme name="Office">
+      <a:majorFont>
+        <a:latin typeface="Calibri Light" panose="020F0302020204030204"/>
+        <a:ea typeface=""/>
+        <a:cs typeface=""/>
+        <a:font script="Jpan" typeface="游ゴシック Light"/>
+        <a:font script="Hang" typeface="맑은 고딕"/>
+        <a:font script="Hans" typeface="等线 Light"/>
+        <a:font script="Hant" typeface="新細明體"/>
+        <a:font script="Arab" typeface="Times New Roman"/>
+        <a:font script="Hebr" typeface="Times New Roman"/>
+        <a:font script="Thai" typeface="Angsana New"/>
+        <a:font script="Ethi" typeface="Nyala"/>
+        <a:font script="Beng" typeface="Vrinda"/>
+        <a:font script="Gujr" typeface="Shruti"/>
+        <a:font script="Khmr" typeface="MoolBoran"/>
+        <a:font script="Knda" typeface="Tunga"/>
+        <a:font script="Guru" typeface="Raavi"/>
+        <a:font script="Cans" typeface="Euphemia"/>
+        <a:font script="Cher" typeface="Plantagenet Cherokee"/>
+        <a:font script="Yiii" typeface="Microsoft Yi Baiti"/>
+        <a:font script="Tibt" typeface="Microsoft Himalaya"/>
+        <a:font script="Thaa" typeface="MV Boli"/>
+        <a:font script="Deva" typeface="Mangal"/>
+        <a:font script="Telu" typeface="Gautami"/>
+        <a:font script="Taml" typeface="Latha"/>
+        <a:font script="Syrc" typeface="Estrangelo Edessa"/>
+        <a:font script="Orya" typeface="Kalinga"/>
+        <a:font script="Mlym" typeface="Kartika"/>
+        <a:font script="Laoo" typeface="DokChampa"/>
+        <a:font script="Sinh" typeface="Iskoola Pota"/>
+        <a:font script="Mong" typeface="Mongolian Baiti"/>
+        <a:font script="Viet" typeface="Times New Roman"/>
+        <a:font script="Uigh" typeface="Microsoft Uighur"/>
+        <a:font script="Geor" typeface="Sylfaen"/>
+        <a:font script="Armn" typeface="Arial"/>
+        <a:font script="Bugi" typeface="Leelawadee UI"/>
+        <a:font script="Bopo" typeface="Microsoft JhengHei"/>
+        <a:font script="Java" typeface="Javanese Text"/>
+        <a:font script="Lisu" typeface="Segoe UI"/>
+        <a:font script="Mymr" typeface="Myanmar Text"/>
+        <a:font script="Nkoo" typeface="Ebrima"/>
+        <a:font script="Olck" typeface="Nirmala UI"/>
+        <a:font script="Osma" typeface="Ebrima"/>
+        <a:font script="Phag" typeface="Phagspa"/>
+        <a:font script="Syrn" typeface="Estrangelo Edessa"/>
+        <a:font script="Syrj" typeface="Estrangelo Edessa"/>
+        <a:font script="Syre" typeface="Estrangelo Edessa"/>
+        <a:font script="Sora" typeface="Nirmala UI"/>
+        <a:font script="Tale" typeface="Microsoft Tai Le"/>
+        <a:font script="Talu" typeface="Microsoft New Tai Lue"/>
+        <a:font script="Tfng" typeface="Ebrima"/>
+      </a:majorFont>
+      <a:minorFont>
+        <a:latin typeface="Calibri" panose="020F0502020204030204"/>
+        <a:ea typeface=""/>
+        <a:cs typeface=""/>
+        <a:font script="Jpan" typeface="游ゴシック"/>
+        <a:font script="Hang" typeface="맑은 고딕"/>
+        <a:font script="Hans" typeface="等线"/>
+        <a:font script="Hant" typeface="新細明體"/>
+        <a:font script="Arab" typeface="Arial"/>
+        <a:font script="Hebr" typeface="Arial"/>
+        <a:font script="Thai" typeface="Cordia New"/>
+        <a:font script="Ethi" typeface="Nyala"/>
+        <a:font script="Beng" typeface="Vrinda"/>
+        <a:font script="Gujr" typeface="Shruti"/>
+        <a:font script="Khmr" typeface="DaunPenh"/>
+        <a:font script="Knda" typeface="Tunga"/>
+        <a:font script="Guru" typeface="Raavi"/>
+        <a:font script="Cans" typeface="Euphemia"/>
+        <a:font script="Cher" typeface="Plantagenet Cherokee"/>
+        <a:font script="Yiii" typeface="Microsoft Yi Baiti"/>
+        <a:font script="Tibt" typeface="Microsoft Himalaya"/>
+        <a:font script="Thaa" typeface="MV Boli"/>
+        <a:font script="Deva" typeface="Mangal"/>
+        <a:font script="Telu" typeface="Gautami"/>
+        <a:font script="Taml" typeface="Latha"/>
+        <a:font script="Syrc" typeface="Estrangelo Edessa"/>
+        <a:font script="Orya" typeface="Kalinga"/>
+        <a:font script="Mlym" typeface="Kartika"/>
+        <a:font script="Laoo" typeface="DokChampa"/>
+        <a:font script="Sinh" typeface="Iskoola Pota"/>
+        <a:font script="Mong" typeface="Mongolian Baiti"/>
+        <a:font script="Viet" typeface="Arial"/>
+        <a:font script="Uigh" typeface="Microsoft Uighur"/>
+        <a:font script="Geor" typeface="Sylfaen"/>
+        <a:font script="Armn" typeface="Arial"/>
+        <a:font script="Bugi" typeface="Leelawadee UI"/>
+        <a:font script="Bopo" typeface="Microsoft JhengHei"/>
+        <a:font script="Java" typeface="Javanese Text"/>
+        <a:font script="Lisu" typeface="Segoe UI"/>
+        <a:font script="Mymr" typeface="Myanmar Text"/>
+        <a:font script="Nkoo" typeface="Ebrima"/>
+        <a:font script="Olck" typeface="Nirmala UI"/>
+        <a:font script="Osma" typeface="Ebrima"/>
+        <a:font script="Phag" typeface="Phagspa"/>
+        <a:font script="Syrn" typeface="Estrangelo Edessa"/>
+        <a:font script="Syrj" typeface="Estrangelo Edessa"/>
+        <a:font script="Syre" typeface="Estrangelo Edessa"/>
+        <a:font script="Sora" typeface="Nirmala UI"/>
+        <a:font script="Tale" typeface="Microsoft Tai Le"/>
+        <a:font script="Talu" typeface="Microsoft New Tai Lue"/>
+        <a:font script="Tfng" typeface="Ebrima"/>
+      </a:minorFont>
+    </a:fontScheme>
+    <a:fmtScheme name="Office">
+      <a:fillStyleLst>
+        <a:solidFill>
+          <a:schemeClr val="phClr"/>
+        </a:solidFill>
+        <a:gradFill rotWithShape="1">
+          <a:gsLst>
+            <a:gs pos="0">
+              <a:schemeClr val="phClr">
+                <a:lumMod val="110000"/>
+                <a:satMod val="105000"/>
+                <a:tint val="67000"/>
+              </a:schemeClr>
+            </a:gs>
+            <a:gs pos="50000">
+              <a:schemeClr val="phClr">
+                <a:lumMod val="105000"/>
+                <a:satMod val="103000"/>
+                <a:tint val="73000"/>
+              </a:schemeClr>
+            </a:gs>
+            <a:gs pos="100000">
+              <a:schemeClr val="phClr">
+                <a:lumMod val="105000"/>
+                <a:satMod val="109000"/>
+                <a:tint val="81000"/>
+              </a:schemeClr>
+            </a:gs>
+          </a:gsLst>
+          <a:lin ang="5400000" scaled="0"/>
+        </a:gradFill>
+        <a:gradFill rotWithShape="1">
+          <a:gsLst>
+            <a:gs pos="0">
+              <a:schemeClr val="phClr">
+                <a:satMod val="103000"/>
+                <a:lumMod val="102000"/>
+                <a:tint val="94000"/>
+              </a:schemeClr>
+            </a:gs>
+            <a:gs pos="50000">
+              <a:schemeClr val="phClr">
+                <a:satMod val="110000"/>
+                <a:lumMod val="100000"/>
+                <a:shade val="100000"/>
+              </a:schemeClr>
+            </a:gs>
+            <a:gs pos="100000">
+              <a:schemeClr val="phClr">
+                <a:lumMod val="99000"/>
+                <a:satMod val="120000"/>
+                <a:shade val="78000"/>
+              </a:schemeClr>
+            </a:gs>
+          </a:gsLst>
+          <a:lin ang="5400000" scaled="0"/>
+        </a:gradFill>
+      </a:fillStyleLst>
+      <a:lnStyleLst>
+        <a:ln w="6350" cap="flat" cmpd="sng" algn="ctr">
+          <a:solidFill>
+            <a:schemeClr val="phClr"/>
+          </a:solidFill>
+          <a:prstDash val="solid"/>
+          <a:miter lim="800000"/>
+        </a:ln>
+        <a:ln w="12700" cap="flat" cmpd="sng" algn="ctr">
+          <a:solidFill>
+            <a:schemeClr val="phClr"/>
+          </a:solidFill>
+          <a:prstDash val="solid"/>
+          <a:miter lim="800000"/>
+        </a:ln>
+        <a:ln w="19050" cap="flat" cmpd="sng" algn="ctr">
+          <a:solidFill>
+            <a:schemeClr val="phClr"/>
+          </a:solidFill>
+          <a:prstDash val="solid"/>
+          <a:miter lim="800000"/>
+        </a:ln>
+      </a:lnStyleLst>
+      <a:effectStyleLst>
+        <a:effectStyle>
+          <a:effectLst/>
+        </a:effectStyle>
+        <a:effectStyle>
+          <a:effectLst/>
+        </a:effectStyle>
+        <a:effectStyle>
+          <a:effectLst>
+            <a:outerShdw blurRad="57150" dist="19050" dir="5400000" algn="ctr" rotWithShape="0">
+              <a:srgbClr val="000000">
+                <a:alpha val="63000"/>
+              </a:srgbClr>
+            </a:outerShdw>
+          </a:effectLst>
+        </a:effectStyle>
+      </a:effectStyleLst>
+      <a:bgFillStyleLst>
+        <a:solidFill>
+          <a:schemeClr val="phClr"/>
+        </a:solidFill>
+        <a:solidFill>
+          <a:schemeClr val="phClr">
+            <a:tint val="95000"/>
+            <a:satMod val="170000"/>
+          </a:schemeClr>
+        </a:solidFill>
+        <a:gradFill rotWithShape="1">
+          <a:gsLst>
+            <a:gs pos="0">
+              <a:schemeClr val="phClr">
+                <a:tint val="93000"/>
+                <a:satMod val="150000"/>
+                <a:shade val="98000"/>
+                <a:lumMod val="102000"/>
+              </a:schemeClr>
+            </a:gs>
+            <a:gs pos="50000">
+              <a:schemeClr val="phClr">
+                <a:tint val="98000"/>
+                <a:satMod val="130000"/>
+                <a:shade val="90000"/>
+                <a:lumMod val="103000"/>
+              </a:schemeClr>
+            </a:gs>
+            <a:gs pos="100000">
+              <a:schemeClr val="phClr">
+                <a:shade val="63000"/>
+                <a:satMod val="120000"/>
+              </a:schemeClr>
+            </a:gs>
+          </a:gsLst>
+          <a:lin ang="5400000" scaled="0"/>
+        </a:gradFill>
+      </a:bgFillStyleLst>
+    </a:fmtScheme>
+  </a:themeElements>
+  <a:objectDefaults/>
+  <a:extraClrSchemeLst/>
+  <a:extLst>
+    <a:ext uri="{05A4C25C-085E-4340-85A3-A5531E510DB2}">
+      <thm15:themeFamily xmlns:thm15="http://schemas.microsoft.com/office/thememl/2012/main" name="Office Theme" id="{62F939B6-93AF-4DB8-9C6B-D6C7DFDC589F}" vid="{4A3C46E8-61CC-4603-A589-7422A47A8E4A}"/>
+    </a:ext>
+  </a:extLst>
+</a:theme>
+</file>
+
+<file path=ppt/webextensions/taskpanes.xml><?xml version="1.0" encoding="utf-8"?>
+<wetp:taskpanes xmlns:wetp="http://schemas.microsoft.com/office/webextensions/taskpanes/2010/11">
+  <wetp:taskpane dockstate="right" visibility="0" width="438" row="0">
+    <wetp:webextensionref xmlns:r="http://schemas.openxmlformats.org/officeDocument/2006/relationships" r:id="rId1"/>
+  </wetp:taskpane>
+</wetp:taskpanes>
+</file>
+
+<file path=ppt/webextensions/webextension1.xml><?xml version="1.0" encoding="utf-8"?>
+<we:webextension xmlns:we="http://schemas.microsoft.com/office/webextensions/webextension/2010/11" id="{60CD2E88-A5C1-4011-90A0-BA7C0141425D}">
+  <we:reference id="wa200010001" version="1.0.0.1" store="en-US" storeType="OMEX"/>
+  <we:alternateReferences>
+    <we:reference id="WA200010001" version="1.0.0.1" store="" storeType="OMEX"/>
+  </we:alternateReferences>
+  <we:properties>
+    <we:property name="claude.fileId" value="&quot;400659ad-0ebb-4b11-acde-eea9db3b7ab3&quot;"/>
+  </we:properties>
+  <we:bindings/>
+  <we:snapshot xmlns:r="http://schemas.openxmlformats.org/officeDocument/2006/relationships"/>
+</we:webextension>
 </file>